--- a/_attachment/一人公司（OPC）.pptx
+++ b/_attachment/一人公司（OPC）.pptx
@@ -11,12 +11,13 @@
     <p:sldId id="261" r:id="rId5"/>
     <p:sldId id="262" r:id="rId6"/>
     <p:sldId id="263" r:id="rId7"/>
-    <p:sldId id="264" r:id="rId8"/>
-    <p:sldId id="265" r:id="rId9"/>
-    <p:sldId id="266" r:id="rId10"/>
-    <p:sldId id="268" r:id="rId11"/>
-    <p:sldId id="267" r:id="rId12"/>
-    <p:sldId id="269" r:id="rId13"/>
+    <p:sldId id="270" r:id="rId8"/>
+    <p:sldId id="264" r:id="rId9"/>
+    <p:sldId id="265" r:id="rId10"/>
+    <p:sldId id="266" r:id="rId11"/>
+    <p:sldId id="268" r:id="rId12"/>
+    <p:sldId id="267" r:id="rId13"/>
+    <p:sldId id="269" r:id="rId14"/>
   </p:sldIdLst>
   <p:sldSz cx="12192000" cy="6858000"/>
   <p:notesSz cx="6858000" cy="9144000"/>
@@ -272,7 +273,7 @@
           <a:p>
             <a:fld id="{C424F68F-667C-44F2-BF6C-EF7AC8E97C48}" type="datetimeFigureOut">
               <a:rPr lang="zh-CN" altLang="en-US" smtClean="0"/>
-              <a:t>2026/1/28</a:t>
+              <a:t>2026/1/29</a:t>
             </a:fld>
             <a:endParaRPr lang="zh-CN" altLang="en-US"/>
           </a:p>
@@ -472,7 +473,7 @@
           <a:p>
             <a:fld id="{C424F68F-667C-44F2-BF6C-EF7AC8E97C48}" type="datetimeFigureOut">
               <a:rPr lang="zh-CN" altLang="en-US" smtClean="0"/>
-              <a:t>2026/1/28</a:t>
+              <a:t>2026/1/29</a:t>
             </a:fld>
             <a:endParaRPr lang="zh-CN" altLang="en-US"/>
           </a:p>
@@ -682,7 +683,7 @@
           <a:p>
             <a:fld id="{C424F68F-667C-44F2-BF6C-EF7AC8E97C48}" type="datetimeFigureOut">
               <a:rPr lang="zh-CN" altLang="en-US" smtClean="0"/>
-              <a:t>2026/1/28</a:t>
+              <a:t>2026/1/29</a:t>
             </a:fld>
             <a:endParaRPr lang="zh-CN" altLang="en-US"/>
           </a:p>
@@ -882,7 +883,7 @@
           <a:p>
             <a:fld id="{C424F68F-667C-44F2-BF6C-EF7AC8E97C48}" type="datetimeFigureOut">
               <a:rPr lang="zh-CN" altLang="en-US" smtClean="0"/>
-              <a:t>2026/1/28</a:t>
+              <a:t>2026/1/29</a:t>
             </a:fld>
             <a:endParaRPr lang="zh-CN" altLang="en-US"/>
           </a:p>
@@ -1158,7 +1159,7 @@
           <a:p>
             <a:fld id="{C424F68F-667C-44F2-BF6C-EF7AC8E97C48}" type="datetimeFigureOut">
               <a:rPr lang="zh-CN" altLang="en-US" smtClean="0"/>
-              <a:t>2026/1/28</a:t>
+              <a:t>2026/1/29</a:t>
             </a:fld>
             <a:endParaRPr lang="zh-CN" altLang="en-US"/>
           </a:p>
@@ -1426,7 +1427,7 @@
           <a:p>
             <a:fld id="{C424F68F-667C-44F2-BF6C-EF7AC8E97C48}" type="datetimeFigureOut">
               <a:rPr lang="zh-CN" altLang="en-US" smtClean="0"/>
-              <a:t>2026/1/28</a:t>
+              <a:t>2026/1/29</a:t>
             </a:fld>
             <a:endParaRPr lang="zh-CN" altLang="en-US"/>
           </a:p>
@@ -1841,7 +1842,7 @@
           <a:p>
             <a:fld id="{C424F68F-667C-44F2-BF6C-EF7AC8E97C48}" type="datetimeFigureOut">
               <a:rPr lang="zh-CN" altLang="en-US" smtClean="0"/>
-              <a:t>2026/1/28</a:t>
+              <a:t>2026/1/29</a:t>
             </a:fld>
             <a:endParaRPr lang="zh-CN" altLang="en-US"/>
           </a:p>
@@ -1983,7 +1984,7 @@
           <a:p>
             <a:fld id="{C424F68F-667C-44F2-BF6C-EF7AC8E97C48}" type="datetimeFigureOut">
               <a:rPr lang="zh-CN" altLang="en-US" smtClean="0"/>
-              <a:t>2026/1/28</a:t>
+              <a:t>2026/1/29</a:t>
             </a:fld>
             <a:endParaRPr lang="zh-CN" altLang="en-US"/>
           </a:p>
@@ -2096,7 +2097,7 @@
           <a:p>
             <a:fld id="{C424F68F-667C-44F2-BF6C-EF7AC8E97C48}" type="datetimeFigureOut">
               <a:rPr lang="zh-CN" altLang="en-US" smtClean="0"/>
-              <a:t>2026/1/28</a:t>
+              <a:t>2026/1/29</a:t>
             </a:fld>
             <a:endParaRPr lang="zh-CN" altLang="en-US"/>
           </a:p>
@@ -2409,7 +2410,7 @@
           <a:p>
             <a:fld id="{C424F68F-667C-44F2-BF6C-EF7AC8E97C48}" type="datetimeFigureOut">
               <a:rPr lang="zh-CN" altLang="en-US" smtClean="0"/>
-              <a:t>2026/1/28</a:t>
+              <a:t>2026/1/29</a:t>
             </a:fld>
             <a:endParaRPr lang="zh-CN" altLang="en-US"/>
           </a:p>
@@ -2698,7 +2699,7 @@
           <a:p>
             <a:fld id="{C424F68F-667C-44F2-BF6C-EF7AC8E97C48}" type="datetimeFigureOut">
               <a:rPr lang="zh-CN" altLang="en-US" smtClean="0"/>
-              <a:t>2026/1/28</a:t>
+              <a:t>2026/1/29</a:t>
             </a:fld>
             <a:endParaRPr lang="zh-CN" altLang="en-US"/>
           </a:p>
@@ -2941,7 +2942,7 @@
           <a:p>
             <a:fld id="{C424F68F-667C-44F2-BF6C-EF7AC8E97C48}" type="datetimeFigureOut">
               <a:rPr lang="zh-CN" altLang="en-US" smtClean="0"/>
-              <a:t>2026/1/28</a:t>
+              <a:t>2026/1/29</a:t>
             </a:fld>
             <a:endParaRPr lang="zh-CN" altLang="en-US"/>
           </a:p>
@@ -3490,12 +3491,7 @@
             <p:ph type="ctrTitle"/>
           </p:nvPr>
         </p:nvSpPr>
-        <p:spPr>
-          <a:xfrm>
-            <a:off x="1424412" y="163214"/>
-            <a:ext cx="9144000" cy="2387600"/>
-          </a:xfrm>
-        </p:spPr>
+        <p:spPr/>
         <p:txBody>
           <a:bodyPr anchor="ctr">
             <a:normAutofit/>
@@ -3503,8 +3499,12 @@
           <a:lstStyle/>
           <a:p>
             <a:r>
+              <a:rPr lang="en-US" altLang="zh-CN" sz="12000" b="1" dirty="0"/>
+              <a:t>AI</a:t>
+            </a:r>
+            <a:r>
               <a:rPr lang="zh-CN" altLang="en-US" sz="12000" b="1" dirty="0"/>
-              <a:t>赚人气</a:t>
+              <a:t>应用</a:t>
             </a:r>
           </a:p>
         </p:txBody>
@@ -3527,115 +3527,27 @@
         </p:nvSpPr>
         <p:spPr>
           <a:xfrm>
-            <a:off x="297256" y="2868707"/>
-            <a:ext cx="11597488" cy="3459666"/>
+            <a:off x="297256" y="4262941"/>
+            <a:ext cx="11597488" cy="1655762"/>
           </a:xfrm>
         </p:spPr>
         <p:txBody>
           <a:bodyPr anchor="ctr">
-            <a:normAutofit fontScale="92500" lnSpcReduction="10000"/>
+            <a:normAutofit/>
           </a:bodyPr>
           <a:lstStyle/>
           <a:p>
             <a:r>
+              <a:rPr lang="zh-CN" altLang="en-US" sz="5000" dirty="0"/>
+              <a:t>（</a:t>
+            </a:r>
+            <a:r>
               <a:rPr lang="en-US" altLang="zh-CN" sz="5000" dirty="0"/>
-              <a:t>0</a:t>
+              <a:t>Cutting-edge Applications</a:t>
             </a:r>
             <a:r>
               <a:rPr lang="zh-CN" altLang="en-US" sz="5000" dirty="0"/>
               <a:t>）</a:t>
-            </a:r>
-            <a:r>
-              <a:rPr lang="en-US" altLang="zh-CN" sz="5000" b="1" dirty="0">
-                <a:solidFill>
-                  <a:srgbClr val="FF0000"/>
-                </a:solidFill>
-              </a:rPr>
-              <a:t>in4tree</a:t>
-            </a:r>
-            <a:r>
-              <a:rPr lang="zh-CN" altLang="en-US" sz="5000" dirty="0"/>
-              <a:t>博客（</a:t>
-            </a:r>
-            <a:r>
-              <a:rPr lang="en-US" altLang="zh-CN" sz="5000" dirty="0"/>
-              <a:t>SEO</a:t>
-            </a:r>
-            <a:r>
-              <a:rPr lang="zh-CN" altLang="en-US" sz="5000" dirty="0"/>
-              <a:t>信息树）</a:t>
-            </a:r>
-            <a:endParaRPr lang="en-US" altLang="zh-CN" sz="5000" dirty="0"/>
-          </a:p>
-          <a:p>
-            <a:endParaRPr lang="en-US" altLang="zh-CN" sz="5000" dirty="0"/>
-          </a:p>
-          <a:p>
-            <a:r>
-              <a:rPr lang="en-US" altLang="zh-CN" sz="5000" dirty="0"/>
-              <a:t>1</a:t>
-            </a:r>
-            <a:r>
-              <a:rPr lang="zh-CN" altLang="en-US" sz="5000" dirty="0"/>
-              <a:t>）</a:t>
-            </a:r>
-            <a:r>
-              <a:rPr lang="en-US" altLang="zh-CN" sz="5000" b="1" dirty="0" err="1">
-                <a:solidFill>
-                  <a:srgbClr val="FF0000"/>
-                </a:solidFill>
-              </a:rPr>
-              <a:t>Youtube</a:t>
-            </a:r>
-            <a:r>
-              <a:rPr lang="zh-CN" altLang="en-US" sz="5000" dirty="0"/>
-              <a:t>视频</a:t>
-            </a:r>
-            <a:endParaRPr lang="en-US" altLang="zh-CN" sz="5000" dirty="0"/>
-          </a:p>
-          <a:p>
-            <a:endParaRPr lang="en-US" altLang="zh-CN" sz="5000" dirty="0"/>
-          </a:p>
-          <a:p>
-            <a:r>
-              <a:rPr lang="en-US" altLang="zh-CN" sz="5000" dirty="0"/>
-              <a:t>2</a:t>
-            </a:r>
-            <a:r>
-              <a:rPr lang="zh-CN" altLang="en-US" sz="5000" dirty="0"/>
-              <a:t>）</a:t>
-            </a:r>
-            <a:r>
-              <a:rPr lang="en-US" altLang="zh-CN" sz="5000" dirty="0" err="1"/>
-              <a:t>Tiktok</a:t>
-            </a:r>
-            <a:r>
-              <a:rPr lang="zh-CN" altLang="en-US" sz="5000" dirty="0"/>
-              <a:t>、小红书、</a:t>
-            </a:r>
-            <a:r>
-              <a:rPr lang="en-US" altLang="zh-CN" sz="5000" dirty="0"/>
-              <a:t>X</a:t>
-            </a:r>
-            <a:r>
-              <a:rPr lang="zh-CN" altLang="en-US" sz="5000" dirty="0"/>
-              <a:t>、</a:t>
-            </a:r>
-            <a:r>
-              <a:rPr lang="en-US" altLang="zh-CN" sz="5000" dirty="0"/>
-              <a:t>Meta</a:t>
-            </a:r>
-            <a:r>
-              <a:rPr lang="zh-CN" altLang="en-US" sz="5000" dirty="0"/>
-              <a:t>、</a:t>
-            </a:r>
-            <a:r>
-              <a:rPr lang="en-US" altLang="zh-CN" sz="5000"/>
-              <a:t>Reddit</a:t>
-            </a:r>
-            <a:r>
-              <a:rPr lang="zh-CN" altLang="en-US" sz="5000" dirty="0"/>
-              <a:t>、、、</a:t>
             </a:r>
           </a:p>
         </p:txBody>
@@ -3643,7 +3555,7 @@
     </p:spTree>
     <p:extLst>
       <p:ext uri="{BB962C8B-B14F-4D97-AF65-F5344CB8AC3E}">
-        <p14:creationId xmlns:p14="http://schemas.microsoft.com/office/powerpoint/2010/main" val="519541532"/>
+        <p14:creationId xmlns:p14="http://schemas.microsoft.com/office/powerpoint/2010/main" val="4014853989"/>
       </p:ext>
     </p:extLst>
   </p:cSld>
@@ -3700,13 +3612,8 @@
           <a:p>
             <a:r>
               <a:rPr lang="zh-CN" altLang="en-US" sz="12000" b="1" dirty="0"/>
-              <a:t>赚</a:t>
-            </a:r>
-            <a:r>
-              <a:rPr lang="en-US" altLang="zh-CN" sz="12000" b="1" dirty="0"/>
-              <a:t>$$$</a:t>
-            </a:r>
-            <a:endParaRPr lang="zh-CN" altLang="en-US" sz="12000" b="1" dirty="0"/>
+              <a:t>赚人气</a:t>
+            </a:r>
           </a:p>
         </p:txBody>
       </p:sp>
@@ -3728,78 +3635,115 @@
         </p:nvSpPr>
         <p:spPr>
           <a:xfrm>
-            <a:off x="669202" y="2859653"/>
-            <a:ext cx="10853595" cy="3459666"/>
+            <a:off x="297256" y="2868707"/>
+            <a:ext cx="11597488" cy="3459666"/>
           </a:xfrm>
         </p:spPr>
         <p:txBody>
           <a:bodyPr anchor="ctr">
-            <a:normAutofit/>
+            <a:normAutofit fontScale="92500" lnSpcReduction="10000"/>
           </a:bodyPr>
           <a:lstStyle/>
           <a:p>
-            <a:pPr algn="l"/>
-            <a:r>
-              <a:rPr lang="en-US" altLang="zh-CN" sz="4000" dirty="0"/>
-              <a:t>*** </a:t>
-            </a:r>
-            <a:r>
-              <a:rPr lang="zh-CN" altLang="en-US" sz="4000" dirty="0"/>
-              <a:t>数字商品：</a:t>
-            </a:r>
-            <a:r>
-              <a:rPr lang="zh-CN" altLang="en-US" sz="4000" dirty="0">
+            <a:r>
+              <a:rPr lang="en-US" altLang="zh-CN" sz="5000" dirty="0"/>
+              <a:t>0</a:t>
+            </a:r>
+            <a:r>
+              <a:rPr lang="zh-CN" altLang="en-US" sz="5000" dirty="0"/>
+              <a:t>）</a:t>
+            </a:r>
+            <a:r>
+              <a:rPr lang="en-US" altLang="zh-CN" sz="5000" b="1" dirty="0">
                 <a:solidFill>
                   <a:srgbClr val="FF0000"/>
                 </a:solidFill>
               </a:rPr>
-              <a:t>笔记</a:t>
-            </a:r>
-            <a:r>
-              <a:rPr lang="zh-CN" altLang="en-US" sz="4000" dirty="0"/>
-              <a:t>模板插件、</a:t>
-            </a:r>
-            <a:r>
-              <a:rPr lang="zh-CN" altLang="en-US" sz="4000" dirty="0">
+              <a:t>in4tree</a:t>
+            </a:r>
+            <a:r>
+              <a:rPr lang="zh-CN" altLang="en-US" sz="5000" dirty="0"/>
+              <a:t>博客（</a:t>
+            </a:r>
+            <a:r>
+              <a:rPr lang="en-US" altLang="zh-CN" sz="5000" dirty="0"/>
+              <a:t>SEO</a:t>
+            </a:r>
+            <a:r>
+              <a:rPr lang="zh-CN" altLang="en-US" sz="5000" dirty="0"/>
+              <a:t>信息树）</a:t>
+            </a:r>
+            <a:endParaRPr lang="en-US" altLang="zh-CN" sz="5000" dirty="0"/>
+          </a:p>
+          <a:p>
+            <a:endParaRPr lang="en-US" altLang="zh-CN" sz="5000" dirty="0"/>
+          </a:p>
+          <a:p>
+            <a:r>
+              <a:rPr lang="en-US" altLang="zh-CN" sz="5000" dirty="0"/>
+              <a:t>1</a:t>
+            </a:r>
+            <a:r>
+              <a:rPr lang="zh-CN" altLang="en-US" sz="5000" dirty="0"/>
+              <a:t>）</a:t>
+            </a:r>
+            <a:r>
+              <a:rPr lang="en-US" altLang="zh-CN" sz="5000" b="1" dirty="0" err="1">
                 <a:solidFill>
                   <a:srgbClr val="FF0000"/>
                 </a:solidFill>
               </a:rPr>
-              <a:t>课程</a:t>
-            </a:r>
-            <a:r>
-              <a:rPr lang="zh-CN" altLang="en-US" sz="4000" dirty="0"/>
-              <a:t>、书、商城</a:t>
-            </a:r>
-            <a:endParaRPr lang="en-US" altLang="zh-CN" sz="4000" dirty="0"/>
-          </a:p>
-          <a:p>
-            <a:endParaRPr lang="en-US" altLang="zh-CN" sz="4000" dirty="0"/>
-          </a:p>
-          <a:p>
-            <a:pPr algn="l"/>
-            <a:r>
-              <a:rPr lang="en-US" altLang="zh-CN" sz="4000" dirty="0"/>
-              <a:t>** </a:t>
-            </a:r>
-            <a:r>
-              <a:rPr lang="zh-CN" altLang="en-US" sz="4000" dirty="0"/>
-              <a:t>会员费</a:t>
-            </a:r>
-            <a:endParaRPr lang="en-US" altLang="zh-CN" sz="4000" dirty="0"/>
-          </a:p>
-          <a:p>
-            <a:endParaRPr lang="en-US" altLang="zh-CN" sz="4000" dirty="0"/>
-          </a:p>
-          <a:p>
-            <a:pPr algn="l"/>
-            <a:r>
-              <a:rPr lang="en-US" altLang="zh-CN" sz="4000" dirty="0"/>
-              <a:t>* </a:t>
-            </a:r>
-            <a:r>
-              <a:rPr lang="zh-CN" altLang="en-US" sz="4000" dirty="0"/>
-              <a:t>营销联盟</a:t>
+              <a:t>Youtube</a:t>
+            </a:r>
+            <a:r>
+              <a:rPr lang="zh-CN" altLang="en-US" sz="5000" dirty="0"/>
+              <a:t>视频</a:t>
+            </a:r>
+            <a:endParaRPr lang="en-US" altLang="zh-CN" sz="5000" dirty="0"/>
+          </a:p>
+          <a:p>
+            <a:endParaRPr lang="en-US" altLang="zh-CN" sz="5000" dirty="0"/>
+          </a:p>
+          <a:p>
+            <a:r>
+              <a:rPr lang="en-US" altLang="zh-CN" sz="5000" dirty="0"/>
+              <a:t>2</a:t>
+            </a:r>
+            <a:r>
+              <a:rPr lang="zh-CN" altLang="en-US" sz="5000" dirty="0"/>
+              <a:t>）</a:t>
+            </a:r>
+            <a:r>
+              <a:rPr lang="en-US" altLang="zh-CN" sz="5000" dirty="0" err="1"/>
+              <a:t>Tiktok</a:t>
+            </a:r>
+            <a:r>
+              <a:rPr lang="zh-CN" altLang="en-US" sz="5000" dirty="0"/>
+              <a:t>、小红书、</a:t>
+            </a:r>
+            <a:r>
+              <a:rPr lang="en-US" altLang="zh-CN" sz="5000" dirty="0"/>
+              <a:t>X</a:t>
+            </a:r>
+            <a:r>
+              <a:rPr lang="zh-CN" altLang="en-US" sz="5000" dirty="0"/>
+              <a:t>、</a:t>
+            </a:r>
+            <a:r>
+              <a:rPr lang="en-US" altLang="zh-CN" sz="5000" dirty="0"/>
+              <a:t>Meta</a:t>
+            </a:r>
+            <a:r>
+              <a:rPr lang="zh-CN" altLang="en-US" sz="5000" dirty="0"/>
+              <a:t>、</a:t>
+            </a:r>
+            <a:r>
+              <a:rPr lang="en-US" altLang="zh-CN" sz="5000"/>
+              <a:t>Reddit</a:t>
+            </a:r>
+            <a:r>
+              <a:rPr lang="zh-CN" altLang="en-US" sz="5000" dirty="0"/>
+              <a:t>、、、</a:t>
             </a:r>
           </a:p>
         </p:txBody>
@@ -3807,7 +3751,7 @@
     </p:spTree>
     <p:extLst>
       <p:ext uri="{BB962C8B-B14F-4D97-AF65-F5344CB8AC3E}">
-        <p14:creationId xmlns:p14="http://schemas.microsoft.com/office/powerpoint/2010/main" val="2293454213"/>
+        <p14:creationId xmlns:p14="http://schemas.microsoft.com/office/powerpoint/2010/main" val="519541532"/>
       </p:ext>
     </p:extLst>
   </p:cSld>
@@ -3863,6 +3807,170 @@
           <a:lstStyle/>
           <a:p>
             <a:r>
+              <a:rPr lang="zh-CN" altLang="en-US" sz="12000" b="1" dirty="0"/>
+              <a:t>赚</a:t>
+            </a:r>
+            <a:r>
+              <a:rPr lang="en-US" altLang="zh-CN" sz="12000" b="1" dirty="0"/>
+              <a:t>$$$</a:t>
+            </a:r>
+            <a:endParaRPr lang="zh-CN" altLang="en-US" sz="12000" b="1" dirty="0"/>
+          </a:p>
+        </p:txBody>
+      </p:sp>
+      <p:sp>
+        <p:nvSpPr>
+          <p:cNvPr id="3" name="Subtitle 2">
+            <a:extLst>
+              <a:ext uri="{FF2B5EF4-FFF2-40B4-BE49-F238E27FC236}">
+                <a16:creationId xmlns:a16="http://schemas.microsoft.com/office/drawing/2014/main" id="{65E0F069-7C05-7FBF-48CD-C6A9CA02F1CF}"/>
+              </a:ext>
+            </a:extLst>
+          </p:cNvPr>
+          <p:cNvSpPr>
+            <a:spLocks noGrp="1"/>
+          </p:cNvSpPr>
+          <p:nvPr>
+            <p:ph type="subTitle" idx="1"/>
+          </p:nvPr>
+        </p:nvSpPr>
+        <p:spPr>
+          <a:xfrm>
+            <a:off x="669202" y="2859653"/>
+            <a:ext cx="10853595" cy="3459666"/>
+          </a:xfrm>
+        </p:spPr>
+        <p:txBody>
+          <a:bodyPr anchor="ctr">
+            <a:normAutofit/>
+          </a:bodyPr>
+          <a:lstStyle/>
+          <a:p>
+            <a:pPr algn="l"/>
+            <a:r>
+              <a:rPr lang="en-US" altLang="zh-CN" sz="4000" dirty="0"/>
+              <a:t>*** </a:t>
+            </a:r>
+            <a:r>
+              <a:rPr lang="zh-CN" altLang="en-US" sz="4000" dirty="0"/>
+              <a:t>数字商品：</a:t>
+            </a:r>
+            <a:r>
+              <a:rPr lang="zh-CN" altLang="en-US" sz="4000" dirty="0">
+                <a:solidFill>
+                  <a:srgbClr val="FF0000"/>
+                </a:solidFill>
+              </a:rPr>
+              <a:t>笔记</a:t>
+            </a:r>
+            <a:r>
+              <a:rPr lang="zh-CN" altLang="en-US" sz="4000" dirty="0"/>
+              <a:t>模板插件、</a:t>
+            </a:r>
+            <a:r>
+              <a:rPr lang="zh-CN" altLang="en-US" sz="4000" dirty="0">
+                <a:solidFill>
+                  <a:srgbClr val="FF0000"/>
+                </a:solidFill>
+              </a:rPr>
+              <a:t>课程</a:t>
+            </a:r>
+            <a:r>
+              <a:rPr lang="zh-CN" altLang="en-US" sz="4000" dirty="0"/>
+              <a:t>、书、商城</a:t>
+            </a:r>
+            <a:endParaRPr lang="en-US" altLang="zh-CN" sz="4000" dirty="0"/>
+          </a:p>
+          <a:p>
+            <a:endParaRPr lang="en-US" altLang="zh-CN" sz="4000" dirty="0"/>
+          </a:p>
+          <a:p>
+            <a:pPr algn="l"/>
+            <a:r>
+              <a:rPr lang="en-US" altLang="zh-CN" sz="4000" dirty="0"/>
+              <a:t>** </a:t>
+            </a:r>
+            <a:r>
+              <a:rPr lang="zh-CN" altLang="en-US" sz="4000" dirty="0"/>
+              <a:t>会员费</a:t>
+            </a:r>
+            <a:endParaRPr lang="en-US" altLang="zh-CN" sz="4000" dirty="0"/>
+          </a:p>
+          <a:p>
+            <a:endParaRPr lang="en-US" altLang="zh-CN" sz="4000" dirty="0"/>
+          </a:p>
+          <a:p>
+            <a:pPr algn="l"/>
+            <a:r>
+              <a:rPr lang="en-US" altLang="zh-CN" sz="4000" dirty="0"/>
+              <a:t>* </a:t>
+            </a:r>
+            <a:r>
+              <a:rPr lang="zh-CN" altLang="en-US" sz="4000" dirty="0"/>
+              <a:t>营销联盟</a:t>
+            </a:r>
+          </a:p>
+        </p:txBody>
+      </p:sp>
+    </p:spTree>
+    <p:extLst>
+      <p:ext uri="{BB962C8B-B14F-4D97-AF65-F5344CB8AC3E}">
+        <p14:creationId xmlns:p14="http://schemas.microsoft.com/office/powerpoint/2010/main" val="2293454213"/>
+      </p:ext>
+    </p:extLst>
+  </p:cSld>
+  <p:clrMapOvr>
+    <a:masterClrMapping/>
+  </p:clrMapOvr>
+</p:sld>
+</file>
+
+<file path=ppt/slides/slide13.xml><?xml version="1.0" encoding="utf-8"?>
+<p:sld xmlns:a="http://schemas.openxmlformats.org/drawingml/2006/main" xmlns:r="http://schemas.openxmlformats.org/officeDocument/2006/relationships" xmlns:p="http://schemas.openxmlformats.org/presentationml/2006/main">
+  <p:cSld>
+    <p:spTree>
+      <p:nvGrpSpPr>
+        <p:cNvPr id="1" name=""/>
+        <p:cNvGrpSpPr/>
+        <p:nvPr/>
+      </p:nvGrpSpPr>
+      <p:grpSpPr>
+        <a:xfrm>
+          <a:off x="0" y="0"/>
+          <a:ext cx="0" cy="0"/>
+          <a:chOff x="0" y="0"/>
+          <a:chExt cx="0" cy="0"/>
+        </a:xfrm>
+      </p:grpSpPr>
+      <p:sp>
+        <p:nvSpPr>
+          <p:cNvPr id="2" name="Title 1">
+            <a:extLst>
+              <a:ext uri="{FF2B5EF4-FFF2-40B4-BE49-F238E27FC236}">
+                <a16:creationId xmlns:a16="http://schemas.microsoft.com/office/drawing/2014/main" id="{FAD6AE50-F6C3-190C-104C-A886A623FC96}"/>
+              </a:ext>
+            </a:extLst>
+          </p:cNvPr>
+          <p:cNvSpPr>
+            <a:spLocks noGrp="1"/>
+          </p:cNvSpPr>
+          <p:nvPr>
+            <p:ph type="ctrTitle"/>
+          </p:nvPr>
+        </p:nvSpPr>
+        <p:spPr>
+          <a:xfrm>
+            <a:off x="1424412" y="163214"/>
+            <a:ext cx="9144000" cy="2387600"/>
+          </a:xfrm>
+        </p:spPr>
+        <p:txBody>
+          <a:bodyPr anchor="ctr">
+            <a:normAutofit/>
+          </a:bodyPr>
+          <a:lstStyle/>
+          <a:p>
+            <a:r>
               <a:rPr lang="zh-CN" altLang="en-US" sz="12000" b="1" dirty="0">
                 <a:solidFill>
                   <a:srgbClr val="00B050"/>
@@ -3903,16 +4011,12 @@
           <a:p>
             <a:pPr algn="l"/>
             <a:r>
-              <a:rPr lang="en-US" altLang="zh-CN" sz="4000" dirty="0" err="1"/>
-              <a:t>Youtube</a:t>
-            </a:r>
-            <a:r>
               <a:rPr lang="zh-CN" altLang="en-US" sz="4000" dirty="0"/>
-              <a:t>：各领域全栈树（</a:t>
+              <a:t>各领域全栈树知识笔记（</a:t>
             </a:r>
             <a:r>
               <a:rPr lang="en-US" altLang="zh-CN" sz="4000" dirty="0"/>
-              <a:t>ALL Area Full Stack Tree</a:t>
+              <a:t>Full Area Stack Tree OB</a:t>
             </a:r>
             <a:r>
               <a:rPr lang="zh-CN" altLang="en-US" sz="4000" dirty="0"/>
@@ -4802,7 +4906,7 @@
         </p:nvSpPr>
         <p:spPr>
           <a:xfrm>
-            <a:off x="297256" y="4262941"/>
+            <a:off x="297256" y="3509963"/>
             <a:ext cx="11597488" cy="1655762"/>
           </a:xfrm>
         </p:spPr>
@@ -4814,7 +4918,7 @@
           <a:p>
             <a:r>
               <a:rPr lang="zh-CN" altLang="en-US" sz="5000" dirty="0"/>
-              <a:t>（知识库、链接、知识图谱）</a:t>
+              <a:t>（知识库、知识图谱、链接）</a:t>
             </a:r>
           </a:p>
         </p:txBody>
@@ -4865,7 +4969,12 @@
             <p:ph type="ctrTitle"/>
           </p:nvPr>
         </p:nvSpPr>
-        <p:spPr/>
+        <p:spPr>
+          <a:xfrm>
+            <a:off x="446637" y="660402"/>
+            <a:ext cx="11298725" cy="2387600"/>
+          </a:xfrm>
+        </p:spPr>
         <p:txBody>
           <a:bodyPr anchor="ctr">
             <a:normAutofit/>
@@ -4873,55 +4982,411 @@
           <a:lstStyle/>
           <a:p>
             <a:r>
-              <a:rPr lang="en-US" altLang="zh-CN" sz="12000" b="1" dirty="0"/>
-              <a:t>AI</a:t>
-            </a:r>
-            <a:r>
-              <a:rPr lang="zh-CN" altLang="en-US" sz="12000" b="1" dirty="0"/>
-              <a:t>概念术语</a:t>
-            </a:r>
-          </a:p>
-        </p:txBody>
-      </p:sp>
-      <p:sp>
-        <p:nvSpPr>
-          <p:cNvPr id="3" name="Subtitle 2">
-            <a:extLst>
-              <a:ext uri="{FF2B5EF4-FFF2-40B4-BE49-F238E27FC236}">
-                <a16:creationId xmlns:a16="http://schemas.microsoft.com/office/drawing/2014/main" id="{65E0F069-7C05-7FBF-48CD-C6A9CA02F1CF}"/>
-              </a:ext>
-            </a:extLst>
-          </p:cNvPr>
-          <p:cNvSpPr>
-            <a:spLocks noGrp="1"/>
-          </p:cNvSpPr>
-          <p:nvPr>
-            <p:ph type="subTitle" idx="1"/>
-          </p:nvPr>
+              <a:rPr lang="en-US" altLang="zh-CN" sz="7200" b="1" dirty="0"/>
+              <a:t>FAST  Learning &amp; Thinking</a:t>
+            </a:r>
+            <a:endParaRPr lang="zh-CN" altLang="en-US" sz="7200" b="1" dirty="0"/>
+          </a:p>
+        </p:txBody>
+      </p:sp>
+      <p:sp>
+        <p:nvSpPr>
+          <p:cNvPr id="4" name="Subtitle 2">
+            <a:extLst>
+              <a:ext uri="{FF2B5EF4-FFF2-40B4-BE49-F238E27FC236}">
+                <a16:creationId xmlns:a16="http://schemas.microsoft.com/office/drawing/2014/main" id="{468994D0-35F4-420B-0B2F-88887FD19675}"/>
+              </a:ext>
+            </a:extLst>
+          </p:cNvPr>
+          <p:cNvSpPr txBox="1">
+            <a:spLocks/>
+          </p:cNvSpPr>
+          <p:nvPr/>
         </p:nvSpPr>
         <p:spPr>
           <a:xfrm>
-            <a:off x="297256" y="4262941"/>
+            <a:off x="297256" y="4694458"/>
             <a:ext cx="11597488" cy="1655762"/>
           </a:xfrm>
+          <a:prstGeom prst="rect">
+            <a:avLst/>
+          </a:prstGeom>
         </p:spPr>
         <p:txBody>
-          <a:bodyPr anchor="ctr">
+          <a:bodyPr vert="horz" lIns="91440" tIns="45720" rIns="91440" bIns="45720" rtlCol="0" anchor="ctr">
             <a:normAutofit/>
           </a:bodyPr>
-          <a:lstStyle/>
-          <a:p>
-            <a:r>
-              <a:rPr lang="zh-CN" altLang="en-US" sz="5000" dirty="0"/>
-              <a:t>（</a:t>
-            </a:r>
-            <a:r>
-              <a:rPr lang="en-US" altLang="zh-CN" sz="5000" dirty="0"/>
-              <a:t>Cutting-edge Terms</a:t>
-            </a:r>
-            <a:r>
-              <a:rPr lang="zh-CN" altLang="en-US" sz="5000" dirty="0"/>
-              <a:t>）</a:t>
+          <a:lstStyle>
+            <a:lvl1pPr marL="0" indent="0" algn="ctr" defTabSz="914400" rtl="0" eaLnBrk="1" latinLnBrk="0" hangingPunct="1">
+              <a:lnSpc>
+                <a:spcPct val="90000"/>
+              </a:lnSpc>
+              <a:spcBef>
+                <a:spcPts val="1000"/>
+              </a:spcBef>
+              <a:buFont typeface="Arial" panose="020B0604020202020204" pitchFamily="34" charset="0"/>
+              <a:buNone/>
+              <a:defRPr sz="2400" kern="1200">
+                <a:solidFill>
+                  <a:schemeClr val="tx1"/>
+                </a:solidFill>
+                <a:latin typeface="+mn-lt"/>
+                <a:ea typeface="+mn-ea"/>
+                <a:cs typeface="+mn-cs"/>
+              </a:defRPr>
+            </a:lvl1pPr>
+            <a:lvl2pPr marL="457200" indent="0" algn="ctr" defTabSz="914400" rtl="0" eaLnBrk="1" latinLnBrk="0" hangingPunct="1">
+              <a:lnSpc>
+                <a:spcPct val="90000"/>
+              </a:lnSpc>
+              <a:spcBef>
+                <a:spcPts val="500"/>
+              </a:spcBef>
+              <a:buFont typeface="Arial" panose="020B0604020202020204" pitchFamily="34" charset="0"/>
+              <a:buNone/>
+              <a:defRPr sz="2000" kern="1200">
+                <a:solidFill>
+                  <a:schemeClr val="tx1"/>
+                </a:solidFill>
+                <a:latin typeface="+mn-lt"/>
+                <a:ea typeface="+mn-ea"/>
+                <a:cs typeface="+mn-cs"/>
+              </a:defRPr>
+            </a:lvl2pPr>
+            <a:lvl3pPr marL="914400" indent="0" algn="ctr" defTabSz="914400" rtl="0" eaLnBrk="1" latinLnBrk="0" hangingPunct="1">
+              <a:lnSpc>
+                <a:spcPct val="90000"/>
+              </a:lnSpc>
+              <a:spcBef>
+                <a:spcPts val="500"/>
+              </a:spcBef>
+              <a:buFont typeface="Arial" panose="020B0604020202020204" pitchFamily="34" charset="0"/>
+              <a:buNone/>
+              <a:defRPr sz="1800" kern="1200">
+                <a:solidFill>
+                  <a:schemeClr val="tx1"/>
+                </a:solidFill>
+                <a:latin typeface="+mn-lt"/>
+                <a:ea typeface="+mn-ea"/>
+                <a:cs typeface="+mn-cs"/>
+              </a:defRPr>
+            </a:lvl3pPr>
+            <a:lvl4pPr marL="1371600" indent="0" algn="ctr" defTabSz="914400" rtl="0" eaLnBrk="1" latinLnBrk="0" hangingPunct="1">
+              <a:lnSpc>
+                <a:spcPct val="90000"/>
+              </a:lnSpc>
+              <a:spcBef>
+                <a:spcPts val="500"/>
+              </a:spcBef>
+              <a:buFont typeface="Arial" panose="020B0604020202020204" pitchFamily="34" charset="0"/>
+              <a:buNone/>
+              <a:defRPr sz="1600" kern="1200">
+                <a:solidFill>
+                  <a:schemeClr val="tx1"/>
+                </a:solidFill>
+                <a:latin typeface="+mn-lt"/>
+                <a:ea typeface="+mn-ea"/>
+                <a:cs typeface="+mn-cs"/>
+              </a:defRPr>
+            </a:lvl4pPr>
+            <a:lvl5pPr marL="1828800" indent="0" algn="ctr" defTabSz="914400" rtl="0" eaLnBrk="1" latinLnBrk="0" hangingPunct="1">
+              <a:lnSpc>
+                <a:spcPct val="90000"/>
+              </a:lnSpc>
+              <a:spcBef>
+                <a:spcPts val="500"/>
+              </a:spcBef>
+              <a:buFont typeface="Arial" panose="020B0604020202020204" pitchFamily="34" charset="0"/>
+              <a:buNone/>
+              <a:defRPr sz="1600" kern="1200">
+                <a:solidFill>
+                  <a:schemeClr val="tx1"/>
+                </a:solidFill>
+                <a:latin typeface="+mn-lt"/>
+                <a:ea typeface="+mn-ea"/>
+                <a:cs typeface="+mn-cs"/>
+              </a:defRPr>
+            </a:lvl5pPr>
+            <a:lvl6pPr marL="2286000" indent="0" algn="ctr" defTabSz="914400" rtl="0" eaLnBrk="1" latinLnBrk="0" hangingPunct="1">
+              <a:lnSpc>
+                <a:spcPct val="90000"/>
+              </a:lnSpc>
+              <a:spcBef>
+                <a:spcPts val="500"/>
+              </a:spcBef>
+              <a:buFont typeface="Arial" panose="020B0604020202020204" pitchFamily="34" charset="0"/>
+              <a:buNone/>
+              <a:defRPr sz="1600" kern="1200">
+                <a:solidFill>
+                  <a:schemeClr val="tx1"/>
+                </a:solidFill>
+                <a:latin typeface="+mn-lt"/>
+                <a:ea typeface="+mn-ea"/>
+                <a:cs typeface="+mn-cs"/>
+              </a:defRPr>
+            </a:lvl6pPr>
+            <a:lvl7pPr marL="2743200" indent="0" algn="ctr" defTabSz="914400" rtl="0" eaLnBrk="1" latinLnBrk="0" hangingPunct="1">
+              <a:lnSpc>
+                <a:spcPct val="90000"/>
+              </a:lnSpc>
+              <a:spcBef>
+                <a:spcPts val="500"/>
+              </a:spcBef>
+              <a:buFont typeface="Arial" panose="020B0604020202020204" pitchFamily="34" charset="0"/>
+              <a:buNone/>
+              <a:defRPr sz="1600" kern="1200">
+                <a:solidFill>
+                  <a:schemeClr val="tx1"/>
+                </a:solidFill>
+                <a:latin typeface="+mn-lt"/>
+                <a:ea typeface="+mn-ea"/>
+                <a:cs typeface="+mn-cs"/>
+              </a:defRPr>
+            </a:lvl7pPr>
+            <a:lvl8pPr marL="3200400" indent="0" algn="ctr" defTabSz="914400" rtl="0" eaLnBrk="1" latinLnBrk="0" hangingPunct="1">
+              <a:lnSpc>
+                <a:spcPct val="90000"/>
+              </a:lnSpc>
+              <a:spcBef>
+                <a:spcPts val="500"/>
+              </a:spcBef>
+              <a:buFont typeface="Arial" panose="020B0604020202020204" pitchFamily="34" charset="0"/>
+              <a:buNone/>
+              <a:defRPr sz="1600" kern="1200">
+                <a:solidFill>
+                  <a:schemeClr val="tx1"/>
+                </a:solidFill>
+                <a:latin typeface="+mn-lt"/>
+                <a:ea typeface="+mn-ea"/>
+                <a:cs typeface="+mn-cs"/>
+              </a:defRPr>
+            </a:lvl8pPr>
+            <a:lvl9pPr marL="3657600" indent="0" algn="ctr" defTabSz="914400" rtl="0" eaLnBrk="1" latinLnBrk="0" hangingPunct="1">
+              <a:lnSpc>
+                <a:spcPct val="90000"/>
+              </a:lnSpc>
+              <a:spcBef>
+                <a:spcPts val="500"/>
+              </a:spcBef>
+              <a:buFont typeface="Arial" panose="020B0604020202020204" pitchFamily="34" charset="0"/>
+              <a:buNone/>
+              <a:defRPr sz="1600" kern="1200">
+                <a:solidFill>
+                  <a:schemeClr val="tx1"/>
+                </a:solidFill>
+                <a:latin typeface="+mn-lt"/>
+                <a:ea typeface="+mn-ea"/>
+                <a:cs typeface="+mn-cs"/>
+              </a:defRPr>
+            </a:lvl9pPr>
+          </a:lstStyle>
+          <a:p>
+            <a:r>
+              <a:rPr lang="zh-CN" altLang="en-US" sz="4000" dirty="0"/>
+              <a:t>（知识网：点、线、面，以及彼此间的联系）</a:t>
+            </a:r>
+          </a:p>
+        </p:txBody>
+      </p:sp>
+      <p:sp>
+        <p:nvSpPr>
+          <p:cNvPr id="7" name="Subtitle 2">
+            <a:extLst>
+              <a:ext uri="{FF2B5EF4-FFF2-40B4-BE49-F238E27FC236}">
+                <a16:creationId xmlns:a16="http://schemas.microsoft.com/office/drawing/2014/main" id="{D4EE80BF-55F9-0C3E-8BCA-5F7E220C1528}"/>
+              </a:ext>
+            </a:extLst>
+          </p:cNvPr>
+          <p:cNvSpPr txBox="1">
+            <a:spLocks/>
+          </p:cNvSpPr>
+          <p:nvPr/>
+        </p:nvSpPr>
+        <p:spPr>
+          <a:xfrm>
+            <a:off x="297256" y="3274330"/>
+            <a:ext cx="11597488" cy="1655762"/>
+          </a:xfrm>
+          <a:prstGeom prst="rect">
+            <a:avLst/>
+          </a:prstGeom>
+        </p:spPr>
+        <p:txBody>
+          <a:bodyPr vert="horz" lIns="91440" tIns="45720" rIns="91440" bIns="45720" rtlCol="0" anchor="ctr">
+            <a:normAutofit/>
+          </a:bodyPr>
+          <a:lstStyle>
+            <a:lvl1pPr marL="0" indent="0" algn="ctr" defTabSz="914400" rtl="0" eaLnBrk="1" latinLnBrk="0" hangingPunct="1">
+              <a:lnSpc>
+                <a:spcPct val="90000"/>
+              </a:lnSpc>
+              <a:spcBef>
+                <a:spcPts val="1000"/>
+              </a:spcBef>
+              <a:buFont typeface="Arial" panose="020B0604020202020204" pitchFamily="34" charset="0"/>
+              <a:buNone/>
+              <a:defRPr sz="2400" kern="1200">
+                <a:solidFill>
+                  <a:schemeClr val="tx1"/>
+                </a:solidFill>
+                <a:latin typeface="+mn-lt"/>
+                <a:ea typeface="+mn-ea"/>
+                <a:cs typeface="+mn-cs"/>
+              </a:defRPr>
+            </a:lvl1pPr>
+            <a:lvl2pPr marL="457200" indent="0" algn="ctr" defTabSz="914400" rtl="0" eaLnBrk="1" latinLnBrk="0" hangingPunct="1">
+              <a:lnSpc>
+                <a:spcPct val="90000"/>
+              </a:lnSpc>
+              <a:spcBef>
+                <a:spcPts val="500"/>
+              </a:spcBef>
+              <a:buFont typeface="Arial" panose="020B0604020202020204" pitchFamily="34" charset="0"/>
+              <a:buNone/>
+              <a:defRPr sz="2000" kern="1200">
+                <a:solidFill>
+                  <a:schemeClr val="tx1"/>
+                </a:solidFill>
+                <a:latin typeface="+mn-lt"/>
+                <a:ea typeface="+mn-ea"/>
+                <a:cs typeface="+mn-cs"/>
+              </a:defRPr>
+            </a:lvl2pPr>
+            <a:lvl3pPr marL="914400" indent="0" algn="ctr" defTabSz="914400" rtl="0" eaLnBrk="1" latinLnBrk="0" hangingPunct="1">
+              <a:lnSpc>
+                <a:spcPct val="90000"/>
+              </a:lnSpc>
+              <a:spcBef>
+                <a:spcPts val="500"/>
+              </a:spcBef>
+              <a:buFont typeface="Arial" panose="020B0604020202020204" pitchFamily="34" charset="0"/>
+              <a:buNone/>
+              <a:defRPr sz="1800" kern="1200">
+                <a:solidFill>
+                  <a:schemeClr val="tx1"/>
+                </a:solidFill>
+                <a:latin typeface="+mn-lt"/>
+                <a:ea typeface="+mn-ea"/>
+                <a:cs typeface="+mn-cs"/>
+              </a:defRPr>
+            </a:lvl3pPr>
+            <a:lvl4pPr marL="1371600" indent="0" algn="ctr" defTabSz="914400" rtl="0" eaLnBrk="1" latinLnBrk="0" hangingPunct="1">
+              <a:lnSpc>
+                <a:spcPct val="90000"/>
+              </a:lnSpc>
+              <a:spcBef>
+                <a:spcPts val="500"/>
+              </a:spcBef>
+              <a:buFont typeface="Arial" panose="020B0604020202020204" pitchFamily="34" charset="0"/>
+              <a:buNone/>
+              <a:defRPr sz="1600" kern="1200">
+                <a:solidFill>
+                  <a:schemeClr val="tx1"/>
+                </a:solidFill>
+                <a:latin typeface="+mn-lt"/>
+                <a:ea typeface="+mn-ea"/>
+                <a:cs typeface="+mn-cs"/>
+              </a:defRPr>
+            </a:lvl4pPr>
+            <a:lvl5pPr marL="1828800" indent="0" algn="ctr" defTabSz="914400" rtl="0" eaLnBrk="1" latinLnBrk="0" hangingPunct="1">
+              <a:lnSpc>
+                <a:spcPct val="90000"/>
+              </a:lnSpc>
+              <a:spcBef>
+                <a:spcPts val="500"/>
+              </a:spcBef>
+              <a:buFont typeface="Arial" panose="020B0604020202020204" pitchFamily="34" charset="0"/>
+              <a:buNone/>
+              <a:defRPr sz="1600" kern="1200">
+                <a:solidFill>
+                  <a:schemeClr val="tx1"/>
+                </a:solidFill>
+                <a:latin typeface="+mn-lt"/>
+                <a:ea typeface="+mn-ea"/>
+                <a:cs typeface="+mn-cs"/>
+              </a:defRPr>
+            </a:lvl5pPr>
+            <a:lvl6pPr marL="2286000" indent="0" algn="ctr" defTabSz="914400" rtl="0" eaLnBrk="1" latinLnBrk="0" hangingPunct="1">
+              <a:lnSpc>
+                <a:spcPct val="90000"/>
+              </a:lnSpc>
+              <a:spcBef>
+                <a:spcPts val="500"/>
+              </a:spcBef>
+              <a:buFont typeface="Arial" panose="020B0604020202020204" pitchFamily="34" charset="0"/>
+              <a:buNone/>
+              <a:defRPr sz="1600" kern="1200">
+                <a:solidFill>
+                  <a:schemeClr val="tx1"/>
+                </a:solidFill>
+                <a:latin typeface="+mn-lt"/>
+                <a:ea typeface="+mn-ea"/>
+                <a:cs typeface="+mn-cs"/>
+              </a:defRPr>
+            </a:lvl6pPr>
+            <a:lvl7pPr marL="2743200" indent="0" algn="ctr" defTabSz="914400" rtl="0" eaLnBrk="1" latinLnBrk="0" hangingPunct="1">
+              <a:lnSpc>
+                <a:spcPct val="90000"/>
+              </a:lnSpc>
+              <a:spcBef>
+                <a:spcPts val="500"/>
+              </a:spcBef>
+              <a:buFont typeface="Arial" panose="020B0604020202020204" pitchFamily="34" charset="0"/>
+              <a:buNone/>
+              <a:defRPr sz="1600" kern="1200">
+                <a:solidFill>
+                  <a:schemeClr val="tx1"/>
+                </a:solidFill>
+                <a:latin typeface="+mn-lt"/>
+                <a:ea typeface="+mn-ea"/>
+                <a:cs typeface="+mn-cs"/>
+              </a:defRPr>
+            </a:lvl7pPr>
+            <a:lvl8pPr marL="3200400" indent="0" algn="ctr" defTabSz="914400" rtl="0" eaLnBrk="1" latinLnBrk="0" hangingPunct="1">
+              <a:lnSpc>
+                <a:spcPct val="90000"/>
+              </a:lnSpc>
+              <a:spcBef>
+                <a:spcPts val="500"/>
+              </a:spcBef>
+              <a:buFont typeface="Arial" panose="020B0604020202020204" pitchFamily="34" charset="0"/>
+              <a:buNone/>
+              <a:defRPr sz="1600" kern="1200">
+                <a:solidFill>
+                  <a:schemeClr val="tx1"/>
+                </a:solidFill>
+                <a:latin typeface="+mn-lt"/>
+                <a:ea typeface="+mn-ea"/>
+                <a:cs typeface="+mn-cs"/>
+              </a:defRPr>
+            </a:lvl8pPr>
+            <a:lvl9pPr marL="3657600" indent="0" algn="ctr" defTabSz="914400" rtl="0" eaLnBrk="1" latinLnBrk="0" hangingPunct="1">
+              <a:lnSpc>
+                <a:spcPct val="90000"/>
+              </a:lnSpc>
+              <a:spcBef>
+                <a:spcPts val="500"/>
+              </a:spcBef>
+              <a:buFont typeface="Arial" panose="020B0604020202020204" pitchFamily="34" charset="0"/>
+              <a:buNone/>
+              <a:defRPr sz="1600" kern="1200">
+                <a:solidFill>
+                  <a:schemeClr val="tx1"/>
+                </a:solidFill>
+                <a:latin typeface="+mn-lt"/>
+                <a:ea typeface="+mn-ea"/>
+                <a:cs typeface="+mn-cs"/>
+              </a:defRPr>
+            </a:lvl9pPr>
+          </a:lstStyle>
+          <a:p>
+            <a:r>
+              <a:rPr lang="en-US" altLang="zh-CN" sz="4000" dirty="0"/>
+              <a:t>Full Area Stack Tree </a:t>
+            </a:r>
+            <a:r>
+              <a:rPr lang="zh-CN" altLang="en-US" sz="4000" dirty="0"/>
+              <a:t>学习（笔记）思考（链接）</a:t>
             </a:r>
           </a:p>
         </p:txBody>
@@ -4929,7 +5394,7 @@
     </p:spTree>
     <p:extLst>
       <p:ext uri="{BB962C8B-B14F-4D97-AF65-F5344CB8AC3E}">
-        <p14:creationId xmlns:p14="http://schemas.microsoft.com/office/powerpoint/2010/main" val="1168533393"/>
+        <p14:creationId xmlns:p14="http://schemas.microsoft.com/office/powerpoint/2010/main" val="1331241091"/>
       </p:ext>
     </p:extLst>
   </p:cSld>
@@ -4985,7 +5450,7 @@
             </a:r>
             <a:r>
               <a:rPr lang="zh-CN" altLang="en-US" sz="12000" b="1" dirty="0"/>
-              <a:t>工具</a:t>
+              <a:t>概念术语</a:t>
             </a:r>
           </a:p>
         </p:txBody>
@@ -5024,7 +5489,7 @@
             </a:r>
             <a:r>
               <a:rPr lang="en-US" altLang="zh-CN" sz="5000" dirty="0"/>
-              <a:t>Cutting-edge Tools</a:t>
+              <a:t>Cutting-edge Terms</a:t>
             </a:r>
             <a:r>
               <a:rPr lang="zh-CN" altLang="en-US" sz="5000" dirty="0"/>
@@ -5036,7 +5501,7 @@
     </p:spTree>
     <p:extLst>
       <p:ext uri="{BB962C8B-B14F-4D97-AF65-F5344CB8AC3E}">
-        <p14:creationId xmlns:p14="http://schemas.microsoft.com/office/powerpoint/2010/main" val="679959001"/>
+        <p14:creationId xmlns:p14="http://schemas.microsoft.com/office/powerpoint/2010/main" val="1168533393"/>
       </p:ext>
     </p:extLst>
   </p:cSld>
@@ -5092,7 +5557,7 @@
             </a:r>
             <a:r>
               <a:rPr lang="zh-CN" altLang="en-US" sz="12000" b="1" dirty="0"/>
-              <a:t>应用</a:t>
+              <a:t>工具</a:t>
             </a:r>
           </a:p>
         </p:txBody>
@@ -5131,7 +5596,7 @@
             </a:r>
             <a:r>
               <a:rPr lang="en-US" altLang="zh-CN" sz="5000" dirty="0"/>
-              <a:t>Cutting-edge Applications</a:t>
+              <a:t>Cutting-edge Tools</a:t>
             </a:r>
             <a:r>
               <a:rPr lang="zh-CN" altLang="en-US" sz="5000" dirty="0"/>
@@ -5143,7 +5608,7 @@
     </p:spTree>
     <p:extLst>
       <p:ext uri="{BB962C8B-B14F-4D97-AF65-F5344CB8AC3E}">
-        <p14:creationId xmlns:p14="http://schemas.microsoft.com/office/powerpoint/2010/main" val="4014853989"/>
+        <p14:creationId xmlns:p14="http://schemas.microsoft.com/office/powerpoint/2010/main" val="679959001"/>
       </p:ext>
     </p:extLst>
   </p:cSld>

--- a/_attachment/一人公司（OPC）.pptx
+++ b/_attachment/一人公司（OPC）.pptx
@@ -4005,7 +4005,7 @@
         </p:spPr>
         <p:txBody>
           <a:bodyPr anchor="ctr">
-            <a:normAutofit fontScale="92500"/>
+            <a:normAutofit lnSpcReduction="10000"/>
           </a:bodyPr>
           <a:lstStyle/>
           <a:p>
@@ -4016,7 +4016,7 @@
             </a:r>
             <a:r>
               <a:rPr lang="en-US" altLang="zh-CN" sz="4000" dirty="0"/>
-              <a:t>Full Area Stack Tree OB</a:t>
+              <a:t>Full Area Stack Tree</a:t>
             </a:r>
             <a:r>
               <a:rPr lang="zh-CN" altLang="en-US" sz="4000" dirty="0"/>
@@ -4101,6 +4101,14 @@
             <a:r>
               <a:rPr lang="zh-CN" altLang="en-US" dirty="0"/>
               <a:t>）</a:t>
+            </a:r>
+            <a:r>
+              <a:rPr lang="en-US" altLang="zh-CN" dirty="0"/>
+              <a:t>Notion</a:t>
+            </a:r>
+            <a:r>
+              <a:rPr lang="zh-CN" altLang="en-US" dirty="0"/>
+              <a:t>和</a:t>
             </a:r>
             <a:r>
               <a:rPr lang="en-US" altLang="zh-CN" dirty="0"/>

--- a/_attachment/一人公司（OPC）.pptx
+++ b/_attachment/一人公司（OPC）.pptx
@@ -17,7 +17,8 @@
     <p:sldId id="266" r:id="rId11"/>
     <p:sldId id="268" r:id="rId12"/>
     <p:sldId id="267" r:id="rId13"/>
-    <p:sldId id="269" r:id="rId14"/>
+    <p:sldId id="271" r:id="rId14"/>
+    <p:sldId id="269" r:id="rId15"/>
   </p:sldIdLst>
   <p:sldSz cx="12192000" cy="6858000"/>
   <p:notesSz cx="6858000" cy="9144000"/>
@@ -273,7 +274,7 @@
           <a:p>
             <a:fld id="{C424F68F-667C-44F2-BF6C-EF7AC8E97C48}" type="datetimeFigureOut">
               <a:rPr lang="zh-CN" altLang="en-US" smtClean="0"/>
-              <a:t>2026/1/29</a:t>
+              <a:t>2026/1/30</a:t>
             </a:fld>
             <a:endParaRPr lang="zh-CN" altLang="en-US"/>
           </a:p>
@@ -473,7 +474,7 @@
           <a:p>
             <a:fld id="{C424F68F-667C-44F2-BF6C-EF7AC8E97C48}" type="datetimeFigureOut">
               <a:rPr lang="zh-CN" altLang="en-US" smtClean="0"/>
-              <a:t>2026/1/29</a:t>
+              <a:t>2026/1/30</a:t>
             </a:fld>
             <a:endParaRPr lang="zh-CN" altLang="en-US"/>
           </a:p>
@@ -683,7 +684,7 @@
           <a:p>
             <a:fld id="{C424F68F-667C-44F2-BF6C-EF7AC8E97C48}" type="datetimeFigureOut">
               <a:rPr lang="zh-CN" altLang="en-US" smtClean="0"/>
-              <a:t>2026/1/29</a:t>
+              <a:t>2026/1/30</a:t>
             </a:fld>
             <a:endParaRPr lang="zh-CN" altLang="en-US"/>
           </a:p>
@@ -883,7 +884,7 @@
           <a:p>
             <a:fld id="{C424F68F-667C-44F2-BF6C-EF7AC8E97C48}" type="datetimeFigureOut">
               <a:rPr lang="zh-CN" altLang="en-US" smtClean="0"/>
-              <a:t>2026/1/29</a:t>
+              <a:t>2026/1/30</a:t>
             </a:fld>
             <a:endParaRPr lang="zh-CN" altLang="en-US"/>
           </a:p>
@@ -1159,7 +1160,7 @@
           <a:p>
             <a:fld id="{C424F68F-667C-44F2-BF6C-EF7AC8E97C48}" type="datetimeFigureOut">
               <a:rPr lang="zh-CN" altLang="en-US" smtClean="0"/>
-              <a:t>2026/1/29</a:t>
+              <a:t>2026/1/30</a:t>
             </a:fld>
             <a:endParaRPr lang="zh-CN" altLang="en-US"/>
           </a:p>
@@ -1427,7 +1428,7 @@
           <a:p>
             <a:fld id="{C424F68F-667C-44F2-BF6C-EF7AC8E97C48}" type="datetimeFigureOut">
               <a:rPr lang="zh-CN" altLang="en-US" smtClean="0"/>
-              <a:t>2026/1/29</a:t>
+              <a:t>2026/1/30</a:t>
             </a:fld>
             <a:endParaRPr lang="zh-CN" altLang="en-US"/>
           </a:p>
@@ -1842,7 +1843,7 @@
           <a:p>
             <a:fld id="{C424F68F-667C-44F2-BF6C-EF7AC8E97C48}" type="datetimeFigureOut">
               <a:rPr lang="zh-CN" altLang="en-US" smtClean="0"/>
-              <a:t>2026/1/29</a:t>
+              <a:t>2026/1/30</a:t>
             </a:fld>
             <a:endParaRPr lang="zh-CN" altLang="en-US"/>
           </a:p>
@@ -1984,7 +1985,7 @@
           <a:p>
             <a:fld id="{C424F68F-667C-44F2-BF6C-EF7AC8E97C48}" type="datetimeFigureOut">
               <a:rPr lang="zh-CN" altLang="en-US" smtClean="0"/>
-              <a:t>2026/1/29</a:t>
+              <a:t>2026/1/30</a:t>
             </a:fld>
             <a:endParaRPr lang="zh-CN" altLang="en-US"/>
           </a:p>
@@ -2097,7 +2098,7 @@
           <a:p>
             <a:fld id="{C424F68F-667C-44F2-BF6C-EF7AC8E97C48}" type="datetimeFigureOut">
               <a:rPr lang="zh-CN" altLang="en-US" smtClean="0"/>
-              <a:t>2026/1/29</a:t>
+              <a:t>2026/1/30</a:t>
             </a:fld>
             <a:endParaRPr lang="zh-CN" altLang="en-US"/>
           </a:p>
@@ -2410,7 +2411,7 @@
           <a:p>
             <a:fld id="{C424F68F-667C-44F2-BF6C-EF7AC8E97C48}" type="datetimeFigureOut">
               <a:rPr lang="zh-CN" altLang="en-US" smtClean="0"/>
-              <a:t>2026/1/29</a:t>
+              <a:t>2026/1/30</a:t>
             </a:fld>
             <a:endParaRPr lang="zh-CN" altLang="en-US"/>
           </a:p>
@@ -2699,7 +2700,7 @@
           <a:p>
             <a:fld id="{C424F68F-667C-44F2-BF6C-EF7AC8E97C48}" type="datetimeFigureOut">
               <a:rPr lang="zh-CN" altLang="en-US" smtClean="0"/>
-              <a:t>2026/1/29</a:t>
+              <a:t>2026/1/30</a:t>
             </a:fld>
             <a:endParaRPr lang="zh-CN" altLang="en-US"/>
           </a:p>
@@ -2942,7 +2943,7 @@
           <a:p>
             <a:fld id="{C424F68F-667C-44F2-BF6C-EF7AC8E97C48}" type="datetimeFigureOut">
               <a:rPr lang="zh-CN" altLang="en-US" smtClean="0"/>
-              <a:t>2026/1/29</a:t>
+              <a:t>2026/1/30</a:t>
             </a:fld>
             <a:endParaRPr lang="zh-CN" altLang="en-US"/>
           </a:p>
@@ -3999,12 +4000,137 @@
         </p:nvSpPr>
         <p:spPr>
           <a:xfrm>
-            <a:off x="669202" y="2696690"/>
+            <a:off x="669202" y="3294219"/>
             <a:ext cx="10853595" cy="1313995"/>
           </a:xfrm>
         </p:spPr>
         <p:txBody>
           <a:bodyPr anchor="ctr">
+            <a:normAutofit/>
+          </a:bodyPr>
+          <a:lstStyle/>
+          <a:p>
+            <a:r>
+              <a:rPr lang="en-US" altLang="zh-CN" sz="8000" dirty="0"/>
+              <a:t>Email</a:t>
+            </a:r>
+            <a:r>
+              <a:rPr lang="zh-CN" altLang="en-US" sz="8000" dirty="0"/>
+              <a:t>简报</a:t>
+            </a:r>
+            <a:endParaRPr lang="en-US" altLang="zh-CN" sz="8000" dirty="0"/>
+          </a:p>
+        </p:txBody>
+      </p:sp>
+    </p:spTree>
+    <p:extLst>
+      <p:ext uri="{BB962C8B-B14F-4D97-AF65-F5344CB8AC3E}">
+        <p14:creationId xmlns:p14="http://schemas.microsoft.com/office/powerpoint/2010/main" val="4098743248"/>
+      </p:ext>
+    </p:extLst>
+  </p:cSld>
+  <p:clrMapOvr>
+    <a:masterClrMapping/>
+  </p:clrMapOvr>
+</p:sld>
+</file>
+
+<file path=ppt/slides/slide14.xml><?xml version="1.0" encoding="utf-8"?>
+<p:sld xmlns:a="http://schemas.openxmlformats.org/drawingml/2006/main" xmlns:r="http://schemas.openxmlformats.org/officeDocument/2006/relationships" xmlns:p="http://schemas.openxmlformats.org/presentationml/2006/main">
+  <p:cSld>
+    <p:spTree>
+      <p:nvGrpSpPr>
+        <p:cNvPr id="1" name=""/>
+        <p:cNvGrpSpPr/>
+        <p:nvPr/>
+      </p:nvGrpSpPr>
+      <p:grpSpPr>
+        <a:xfrm>
+          <a:off x="0" y="0"/>
+          <a:ext cx="0" cy="0"/>
+          <a:chOff x="0" y="0"/>
+          <a:chExt cx="0" cy="0"/>
+        </a:xfrm>
+      </p:grpSpPr>
+      <p:sp>
+        <p:nvSpPr>
+          <p:cNvPr id="2" name="Title 1">
+            <a:extLst>
+              <a:ext uri="{FF2B5EF4-FFF2-40B4-BE49-F238E27FC236}">
+                <a16:creationId xmlns:a16="http://schemas.microsoft.com/office/drawing/2014/main" id="{FAD6AE50-F6C3-190C-104C-A886A623FC96}"/>
+              </a:ext>
+            </a:extLst>
+          </p:cNvPr>
+          <p:cNvSpPr>
+            <a:spLocks noGrp="1"/>
+          </p:cNvSpPr>
+          <p:nvPr>
+            <p:ph type="ctrTitle"/>
+          </p:nvPr>
+        </p:nvSpPr>
+        <p:spPr>
+          <a:xfrm>
+            <a:off x="434566" y="163214"/>
+            <a:ext cx="11316832" cy="2387600"/>
+          </a:xfrm>
+        </p:spPr>
+        <p:txBody>
+          <a:bodyPr anchor="ctr">
+            <a:normAutofit fontScale="90000"/>
+          </a:bodyPr>
+          <a:lstStyle/>
+          <a:p>
+            <a:r>
+              <a:rPr lang="zh-CN" altLang="en-US" sz="12000" b="1" dirty="0">
+                <a:solidFill>
+                  <a:srgbClr val="00B050"/>
+                </a:solidFill>
+              </a:rPr>
+              <a:t>项目：</a:t>
+            </a:r>
+            <a:r>
+              <a:rPr lang="en-US" altLang="zh-CN" sz="12000" b="1" dirty="0">
+                <a:solidFill>
+                  <a:srgbClr val="00B050"/>
+                </a:solidFill>
+              </a:rPr>
+              <a:t>FAST</a:t>
+            </a:r>
+            <a:r>
+              <a:rPr lang="zh-CN" altLang="en-US" sz="12000" b="1" dirty="0">
+                <a:solidFill>
+                  <a:srgbClr val="00B050"/>
+                </a:solidFill>
+              </a:rPr>
+              <a:t>全栈树</a:t>
+            </a:r>
+          </a:p>
+        </p:txBody>
+      </p:sp>
+      <p:sp>
+        <p:nvSpPr>
+          <p:cNvPr id="3" name="Subtitle 2">
+            <a:extLst>
+              <a:ext uri="{FF2B5EF4-FFF2-40B4-BE49-F238E27FC236}">
+                <a16:creationId xmlns:a16="http://schemas.microsoft.com/office/drawing/2014/main" id="{65E0F069-7C05-7FBF-48CD-C6A9CA02F1CF}"/>
+              </a:ext>
+            </a:extLst>
+          </p:cNvPr>
+          <p:cNvSpPr>
+            <a:spLocks noGrp="1"/>
+          </p:cNvSpPr>
+          <p:nvPr>
+            <p:ph type="subTitle" idx="1"/>
+          </p:nvPr>
+        </p:nvSpPr>
+        <p:spPr>
+          <a:xfrm>
+            <a:off x="669202" y="2452247"/>
+            <a:ext cx="10853595" cy="1313995"/>
+          </a:xfrm>
+        </p:spPr>
+        <p:txBody>
+          <a:bodyPr anchor="ctr">
             <a:normAutofit lnSpcReduction="10000"/>
           </a:bodyPr>
           <a:lstStyle/>
@@ -4012,15 +4138,7 @@
             <a:pPr algn="l"/>
             <a:r>
               <a:rPr lang="zh-CN" altLang="en-US" sz="4000" dirty="0"/>
-              <a:t>各领域全栈树知识笔记（</a:t>
-            </a:r>
-            <a:r>
-              <a:rPr lang="en-US" altLang="zh-CN" sz="4000" dirty="0"/>
-              <a:t>Full Area Stack Tree</a:t>
-            </a:r>
-            <a:r>
-              <a:rPr lang="zh-CN" altLang="en-US" sz="4000" dirty="0"/>
-              <a:t>）</a:t>
+              <a:t>各领域全栈树知识笔记</a:t>
             </a:r>
             <a:endParaRPr lang="en-US" altLang="zh-CN" sz="4000" dirty="0"/>
           </a:p>

--- a/_attachment/一人公司（OPC）.pptx
+++ b/_attachment/一人公司（OPC）.pptx
@@ -14,11 +14,16 @@
     <p:sldId id="270" r:id="rId8"/>
     <p:sldId id="264" r:id="rId9"/>
     <p:sldId id="265" r:id="rId10"/>
-    <p:sldId id="266" r:id="rId11"/>
-    <p:sldId id="268" r:id="rId12"/>
-    <p:sldId id="267" r:id="rId13"/>
-    <p:sldId id="271" r:id="rId14"/>
+    <p:sldId id="271" r:id="rId11"/>
+    <p:sldId id="266" r:id="rId12"/>
+    <p:sldId id="268" r:id="rId13"/>
+    <p:sldId id="267" r:id="rId14"/>
     <p:sldId id="269" r:id="rId15"/>
+    <p:sldId id="272" r:id="rId16"/>
+    <p:sldId id="273" r:id="rId17"/>
+    <p:sldId id="276" r:id="rId18"/>
+    <p:sldId id="275" r:id="rId19"/>
+    <p:sldId id="277" r:id="rId20"/>
   </p:sldIdLst>
   <p:sldSz cx="12192000" cy="6858000"/>
   <p:notesSz cx="6858000" cy="9144000"/>
@@ -274,7 +279,7 @@
           <a:p>
             <a:fld id="{C424F68F-667C-44F2-BF6C-EF7AC8E97C48}" type="datetimeFigureOut">
               <a:rPr lang="zh-CN" altLang="en-US" smtClean="0"/>
-              <a:t>2026/1/30</a:t>
+              <a:t>2026/2/1</a:t>
             </a:fld>
             <a:endParaRPr lang="zh-CN" altLang="en-US"/>
           </a:p>
@@ -474,7 +479,7 @@
           <a:p>
             <a:fld id="{C424F68F-667C-44F2-BF6C-EF7AC8E97C48}" type="datetimeFigureOut">
               <a:rPr lang="zh-CN" altLang="en-US" smtClean="0"/>
-              <a:t>2026/1/30</a:t>
+              <a:t>2026/2/1</a:t>
             </a:fld>
             <a:endParaRPr lang="zh-CN" altLang="en-US"/>
           </a:p>
@@ -684,7 +689,7 @@
           <a:p>
             <a:fld id="{C424F68F-667C-44F2-BF6C-EF7AC8E97C48}" type="datetimeFigureOut">
               <a:rPr lang="zh-CN" altLang="en-US" smtClean="0"/>
-              <a:t>2026/1/30</a:t>
+              <a:t>2026/2/1</a:t>
             </a:fld>
             <a:endParaRPr lang="zh-CN" altLang="en-US"/>
           </a:p>
@@ -884,7 +889,7 @@
           <a:p>
             <a:fld id="{C424F68F-667C-44F2-BF6C-EF7AC8E97C48}" type="datetimeFigureOut">
               <a:rPr lang="zh-CN" altLang="en-US" smtClean="0"/>
-              <a:t>2026/1/30</a:t>
+              <a:t>2026/2/1</a:t>
             </a:fld>
             <a:endParaRPr lang="zh-CN" altLang="en-US"/>
           </a:p>
@@ -1160,7 +1165,7 @@
           <a:p>
             <a:fld id="{C424F68F-667C-44F2-BF6C-EF7AC8E97C48}" type="datetimeFigureOut">
               <a:rPr lang="zh-CN" altLang="en-US" smtClean="0"/>
-              <a:t>2026/1/30</a:t>
+              <a:t>2026/2/1</a:t>
             </a:fld>
             <a:endParaRPr lang="zh-CN" altLang="en-US"/>
           </a:p>
@@ -1428,7 +1433,7 @@
           <a:p>
             <a:fld id="{C424F68F-667C-44F2-BF6C-EF7AC8E97C48}" type="datetimeFigureOut">
               <a:rPr lang="zh-CN" altLang="en-US" smtClean="0"/>
-              <a:t>2026/1/30</a:t>
+              <a:t>2026/2/1</a:t>
             </a:fld>
             <a:endParaRPr lang="zh-CN" altLang="en-US"/>
           </a:p>
@@ -1843,7 +1848,7 @@
           <a:p>
             <a:fld id="{C424F68F-667C-44F2-BF6C-EF7AC8E97C48}" type="datetimeFigureOut">
               <a:rPr lang="zh-CN" altLang="en-US" smtClean="0"/>
-              <a:t>2026/1/30</a:t>
+              <a:t>2026/2/1</a:t>
             </a:fld>
             <a:endParaRPr lang="zh-CN" altLang="en-US"/>
           </a:p>
@@ -1985,7 +1990,7 @@
           <a:p>
             <a:fld id="{C424F68F-667C-44F2-BF6C-EF7AC8E97C48}" type="datetimeFigureOut">
               <a:rPr lang="zh-CN" altLang="en-US" smtClean="0"/>
-              <a:t>2026/1/30</a:t>
+              <a:t>2026/2/1</a:t>
             </a:fld>
             <a:endParaRPr lang="zh-CN" altLang="en-US"/>
           </a:p>
@@ -2098,7 +2103,7 @@
           <a:p>
             <a:fld id="{C424F68F-667C-44F2-BF6C-EF7AC8E97C48}" type="datetimeFigureOut">
               <a:rPr lang="zh-CN" altLang="en-US" smtClean="0"/>
-              <a:t>2026/1/30</a:t>
+              <a:t>2026/2/1</a:t>
             </a:fld>
             <a:endParaRPr lang="zh-CN" altLang="en-US"/>
           </a:p>
@@ -2411,7 +2416,7 @@
           <a:p>
             <a:fld id="{C424F68F-667C-44F2-BF6C-EF7AC8E97C48}" type="datetimeFigureOut">
               <a:rPr lang="zh-CN" altLang="en-US" smtClean="0"/>
-              <a:t>2026/1/30</a:t>
+              <a:t>2026/2/1</a:t>
             </a:fld>
             <a:endParaRPr lang="zh-CN" altLang="en-US"/>
           </a:p>
@@ -2700,7 +2705,7 @@
           <a:p>
             <a:fld id="{C424F68F-667C-44F2-BF6C-EF7AC8E97C48}" type="datetimeFigureOut">
               <a:rPr lang="zh-CN" altLang="en-US" smtClean="0"/>
-              <a:t>2026/1/30</a:t>
+              <a:t>2026/2/1</a:t>
             </a:fld>
             <a:endParaRPr lang="zh-CN" altLang="en-US"/>
           </a:p>
@@ -2943,7 +2948,7 @@
           <a:p>
             <a:fld id="{C424F68F-667C-44F2-BF6C-EF7AC8E97C48}" type="datetimeFigureOut">
               <a:rPr lang="zh-CN" altLang="en-US" smtClean="0"/>
-              <a:t>2026/1/30</a:t>
+              <a:t>2026/2/1</a:t>
             </a:fld>
             <a:endParaRPr lang="zh-CN" altLang="en-US"/>
           </a:p>
@@ -3492,7 +3497,12 @@
             <p:ph type="ctrTitle"/>
           </p:nvPr>
         </p:nvSpPr>
-        <p:spPr/>
+        <p:spPr>
+          <a:xfrm>
+            <a:off x="1524000" y="1521234"/>
+            <a:ext cx="9144000" cy="2387600"/>
+          </a:xfrm>
+        </p:spPr>
         <p:txBody>
           <a:bodyPr anchor="ctr">
             <a:normAutofit/>
@@ -3500,63 +3510,25 @@
           <a:lstStyle/>
           <a:p>
             <a:r>
-              <a:rPr lang="en-US" altLang="zh-CN" sz="12000" b="1" dirty="0"/>
-              <a:t>AI</a:t>
-            </a:r>
-            <a:r>
-              <a:rPr lang="zh-CN" altLang="en-US" sz="12000" b="1" dirty="0"/>
-              <a:t>应用</a:t>
-            </a:r>
-          </a:p>
-        </p:txBody>
-      </p:sp>
-      <p:sp>
-        <p:nvSpPr>
-          <p:cNvPr id="3" name="Subtitle 2">
-            <a:extLst>
-              <a:ext uri="{FF2B5EF4-FFF2-40B4-BE49-F238E27FC236}">
-                <a16:creationId xmlns:a16="http://schemas.microsoft.com/office/drawing/2014/main" id="{65E0F069-7C05-7FBF-48CD-C6A9CA02F1CF}"/>
-              </a:ext>
-            </a:extLst>
-          </p:cNvPr>
-          <p:cNvSpPr>
-            <a:spLocks noGrp="1"/>
-          </p:cNvSpPr>
-          <p:nvPr>
-            <p:ph type="subTitle" idx="1"/>
-          </p:nvPr>
-        </p:nvSpPr>
-        <p:spPr>
-          <a:xfrm>
-            <a:off x="297256" y="4262941"/>
-            <a:ext cx="11597488" cy="1655762"/>
-          </a:xfrm>
-        </p:spPr>
-        <p:txBody>
-          <a:bodyPr anchor="ctr">
-            <a:normAutofit/>
-          </a:bodyPr>
-          <a:lstStyle/>
-          <a:p>
-            <a:r>
-              <a:rPr lang="zh-CN" altLang="en-US" sz="5000" dirty="0"/>
-              <a:t>（</a:t>
-            </a:r>
-            <a:r>
-              <a:rPr lang="en-US" altLang="zh-CN" sz="5000" dirty="0"/>
-              <a:t>Cutting-edge Applications</a:t>
-            </a:r>
-            <a:r>
-              <a:rPr lang="zh-CN" altLang="en-US" sz="5000" dirty="0"/>
-              <a:t>）</a:t>
-            </a:r>
+              <a:rPr lang="en-US" altLang="zh-CN" sz="12000" b="1" dirty="0">
+                <a:solidFill>
+                  <a:srgbClr val="00B050"/>
+                </a:solidFill>
+              </a:rPr>
+              <a:t>n8n</a:t>
+            </a:r>
+            <a:endParaRPr lang="zh-CN" altLang="en-US" sz="12000" b="1" dirty="0">
+              <a:solidFill>
+                <a:srgbClr val="00B050"/>
+              </a:solidFill>
+            </a:endParaRPr>
           </a:p>
         </p:txBody>
       </p:sp>
     </p:spTree>
     <p:extLst>
       <p:ext uri="{BB962C8B-B14F-4D97-AF65-F5344CB8AC3E}">
-        <p14:creationId xmlns:p14="http://schemas.microsoft.com/office/powerpoint/2010/main" val="4014853989"/>
+        <p14:creationId xmlns:p14="http://schemas.microsoft.com/office/powerpoint/2010/main" val="4098743248"/>
       </p:ext>
     </p:extLst>
   </p:cSld>
@@ -3599,12 +3571,7 @@
             <p:ph type="ctrTitle"/>
           </p:nvPr>
         </p:nvSpPr>
-        <p:spPr>
-          <a:xfrm>
-            <a:off x="1424412" y="163214"/>
-            <a:ext cx="9144000" cy="2387600"/>
-          </a:xfrm>
-        </p:spPr>
+        <p:spPr/>
         <p:txBody>
           <a:bodyPr anchor="ctr">
             <a:normAutofit/>
@@ -3612,8 +3579,12 @@
           <a:lstStyle/>
           <a:p>
             <a:r>
+              <a:rPr lang="en-US" altLang="zh-CN" sz="12000" b="1" dirty="0"/>
+              <a:t>AI</a:t>
+            </a:r>
+            <a:r>
               <a:rPr lang="zh-CN" altLang="en-US" sz="12000" b="1" dirty="0"/>
-              <a:t>赚人气</a:t>
+              <a:t>应用</a:t>
             </a:r>
           </a:p>
         </p:txBody>
@@ -3636,115 +3607,27 @@
         </p:nvSpPr>
         <p:spPr>
           <a:xfrm>
-            <a:off x="297256" y="2868707"/>
-            <a:ext cx="11597488" cy="3459666"/>
+            <a:off x="297256" y="4262941"/>
+            <a:ext cx="11597488" cy="1655762"/>
           </a:xfrm>
         </p:spPr>
         <p:txBody>
           <a:bodyPr anchor="ctr">
-            <a:normAutofit fontScale="92500" lnSpcReduction="10000"/>
+            <a:normAutofit/>
           </a:bodyPr>
           <a:lstStyle/>
           <a:p>
             <a:r>
+              <a:rPr lang="zh-CN" altLang="en-US" sz="5000" dirty="0"/>
+              <a:t>（</a:t>
+            </a:r>
+            <a:r>
               <a:rPr lang="en-US" altLang="zh-CN" sz="5000" dirty="0"/>
-              <a:t>0</a:t>
+              <a:t>Cutting-edge Applications</a:t>
             </a:r>
             <a:r>
               <a:rPr lang="zh-CN" altLang="en-US" sz="5000" dirty="0"/>
               <a:t>）</a:t>
-            </a:r>
-            <a:r>
-              <a:rPr lang="en-US" altLang="zh-CN" sz="5000" b="1" dirty="0">
-                <a:solidFill>
-                  <a:srgbClr val="FF0000"/>
-                </a:solidFill>
-              </a:rPr>
-              <a:t>in4tree</a:t>
-            </a:r>
-            <a:r>
-              <a:rPr lang="zh-CN" altLang="en-US" sz="5000" dirty="0"/>
-              <a:t>博客（</a:t>
-            </a:r>
-            <a:r>
-              <a:rPr lang="en-US" altLang="zh-CN" sz="5000" dirty="0"/>
-              <a:t>SEO</a:t>
-            </a:r>
-            <a:r>
-              <a:rPr lang="zh-CN" altLang="en-US" sz="5000" dirty="0"/>
-              <a:t>信息树）</a:t>
-            </a:r>
-            <a:endParaRPr lang="en-US" altLang="zh-CN" sz="5000" dirty="0"/>
-          </a:p>
-          <a:p>
-            <a:endParaRPr lang="en-US" altLang="zh-CN" sz="5000" dirty="0"/>
-          </a:p>
-          <a:p>
-            <a:r>
-              <a:rPr lang="en-US" altLang="zh-CN" sz="5000" dirty="0"/>
-              <a:t>1</a:t>
-            </a:r>
-            <a:r>
-              <a:rPr lang="zh-CN" altLang="en-US" sz="5000" dirty="0"/>
-              <a:t>）</a:t>
-            </a:r>
-            <a:r>
-              <a:rPr lang="en-US" altLang="zh-CN" sz="5000" b="1" dirty="0" err="1">
-                <a:solidFill>
-                  <a:srgbClr val="FF0000"/>
-                </a:solidFill>
-              </a:rPr>
-              <a:t>Youtube</a:t>
-            </a:r>
-            <a:r>
-              <a:rPr lang="zh-CN" altLang="en-US" sz="5000" dirty="0"/>
-              <a:t>视频</a:t>
-            </a:r>
-            <a:endParaRPr lang="en-US" altLang="zh-CN" sz="5000" dirty="0"/>
-          </a:p>
-          <a:p>
-            <a:endParaRPr lang="en-US" altLang="zh-CN" sz="5000" dirty="0"/>
-          </a:p>
-          <a:p>
-            <a:r>
-              <a:rPr lang="en-US" altLang="zh-CN" sz="5000" dirty="0"/>
-              <a:t>2</a:t>
-            </a:r>
-            <a:r>
-              <a:rPr lang="zh-CN" altLang="en-US" sz="5000" dirty="0"/>
-              <a:t>）</a:t>
-            </a:r>
-            <a:r>
-              <a:rPr lang="en-US" altLang="zh-CN" sz="5000" dirty="0" err="1"/>
-              <a:t>Tiktok</a:t>
-            </a:r>
-            <a:r>
-              <a:rPr lang="zh-CN" altLang="en-US" sz="5000" dirty="0"/>
-              <a:t>、小红书、</a:t>
-            </a:r>
-            <a:r>
-              <a:rPr lang="en-US" altLang="zh-CN" sz="5000" dirty="0"/>
-              <a:t>X</a:t>
-            </a:r>
-            <a:r>
-              <a:rPr lang="zh-CN" altLang="en-US" sz="5000" dirty="0"/>
-              <a:t>、</a:t>
-            </a:r>
-            <a:r>
-              <a:rPr lang="en-US" altLang="zh-CN" sz="5000" dirty="0"/>
-              <a:t>Meta</a:t>
-            </a:r>
-            <a:r>
-              <a:rPr lang="zh-CN" altLang="en-US" sz="5000" dirty="0"/>
-              <a:t>、</a:t>
-            </a:r>
-            <a:r>
-              <a:rPr lang="en-US" altLang="zh-CN" sz="5000"/>
-              <a:t>Reddit</a:t>
-            </a:r>
-            <a:r>
-              <a:rPr lang="zh-CN" altLang="en-US" sz="5000" dirty="0"/>
-              <a:t>、、、</a:t>
             </a:r>
           </a:p>
         </p:txBody>
@@ -3752,7 +3635,7 @@
     </p:spTree>
     <p:extLst>
       <p:ext uri="{BB962C8B-B14F-4D97-AF65-F5344CB8AC3E}">
-        <p14:creationId xmlns:p14="http://schemas.microsoft.com/office/powerpoint/2010/main" val="519541532"/>
+        <p14:creationId xmlns:p14="http://schemas.microsoft.com/office/powerpoint/2010/main" val="4014853989"/>
       </p:ext>
     </p:extLst>
   </p:cSld>
@@ -3809,13 +3692,8 @@
           <a:p>
             <a:r>
               <a:rPr lang="zh-CN" altLang="en-US" sz="12000" b="1" dirty="0"/>
-              <a:t>赚</a:t>
-            </a:r>
-            <a:r>
-              <a:rPr lang="en-US" altLang="zh-CN" sz="12000" b="1" dirty="0"/>
-              <a:t>$$$</a:t>
-            </a:r>
-            <a:endParaRPr lang="zh-CN" altLang="en-US" sz="12000" b="1" dirty="0"/>
+              <a:t>赚人气</a:t>
+            </a:r>
           </a:p>
         </p:txBody>
       </p:sp>
@@ -3837,78 +3715,115 @@
         </p:nvSpPr>
         <p:spPr>
           <a:xfrm>
-            <a:off x="669202" y="2859653"/>
-            <a:ext cx="10853595" cy="3459666"/>
+            <a:off x="297256" y="2868707"/>
+            <a:ext cx="11597488" cy="3459666"/>
           </a:xfrm>
         </p:spPr>
         <p:txBody>
           <a:bodyPr anchor="ctr">
-            <a:normAutofit/>
+            <a:normAutofit fontScale="92500" lnSpcReduction="10000"/>
           </a:bodyPr>
           <a:lstStyle/>
           <a:p>
-            <a:pPr algn="l"/>
-            <a:r>
-              <a:rPr lang="en-US" altLang="zh-CN" sz="4000" dirty="0"/>
-              <a:t>*** </a:t>
-            </a:r>
-            <a:r>
-              <a:rPr lang="zh-CN" altLang="en-US" sz="4000" dirty="0"/>
-              <a:t>数字商品：</a:t>
-            </a:r>
-            <a:r>
-              <a:rPr lang="zh-CN" altLang="en-US" sz="4000" dirty="0">
+            <a:r>
+              <a:rPr lang="en-US" altLang="zh-CN" sz="5000" dirty="0"/>
+              <a:t>0</a:t>
+            </a:r>
+            <a:r>
+              <a:rPr lang="zh-CN" altLang="en-US" sz="5000" dirty="0"/>
+              <a:t>）</a:t>
+            </a:r>
+            <a:r>
+              <a:rPr lang="en-US" altLang="zh-CN" sz="5000" b="1" dirty="0">
                 <a:solidFill>
                   <a:srgbClr val="FF0000"/>
                 </a:solidFill>
               </a:rPr>
-              <a:t>笔记</a:t>
-            </a:r>
-            <a:r>
-              <a:rPr lang="zh-CN" altLang="en-US" sz="4000" dirty="0"/>
-              <a:t>模板插件、</a:t>
-            </a:r>
-            <a:r>
-              <a:rPr lang="zh-CN" altLang="en-US" sz="4000" dirty="0">
+              <a:t>in4tree</a:t>
+            </a:r>
+            <a:r>
+              <a:rPr lang="zh-CN" altLang="en-US" sz="5000" dirty="0"/>
+              <a:t>博客（</a:t>
+            </a:r>
+            <a:r>
+              <a:rPr lang="en-US" altLang="zh-CN" sz="5000" dirty="0"/>
+              <a:t>SEO</a:t>
+            </a:r>
+            <a:r>
+              <a:rPr lang="zh-CN" altLang="en-US" sz="5000" dirty="0"/>
+              <a:t>信息树）</a:t>
+            </a:r>
+            <a:endParaRPr lang="en-US" altLang="zh-CN" sz="5000" dirty="0"/>
+          </a:p>
+          <a:p>
+            <a:endParaRPr lang="en-US" altLang="zh-CN" sz="5000" dirty="0"/>
+          </a:p>
+          <a:p>
+            <a:r>
+              <a:rPr lang="en-US" altLang="zh-CN" sz="5000" dirty="0"/>
+              <a:t>1</a:t>
+            </a:r>
+            <a:r>
+              <a:rPr lang="zh-CN" altLang="en-US" sz="5000" dirty="0"/>
+              <a:t>）</a:t>
+            </a:r>
+            <a:r>
+              <a:rPr lang="en-US" altLang="zh-CN" sz="5000" b="1" dirty="0" err="1">
                 <a:solidFill>
                   <a:srgbClr val="FF0000"/>
                 </a:solidFill>
               </a:rPr>
-              <a:t>课程</a:t>
-            </a:r>
-            <a:r>
-              <a:rPr lang="zh-CN" altLang="en-US" sz="4000" dirty="0"/>
-              <a:t>、书、商城</a:t>
-            </a:r>
-            <a:endParaRPr lang="en-US" altLang="zh-CN" sz="4000" dirty="0"/>
-          </a:p>
-          <a:p>
-            <a:endParaRPr lang="en-US" altLang="zh-CN" sz="4000" dirty="0"/>
-          </a:p>
-          <a:p>
-            <a:pPr algn="l"/>
-            <a:r>
-              <a:rPr lang="en-US" altLang="zh-CN" sz="4000" dirty="0"/>
-              <a:t>** </a:t>
-            </a:r>
-            <a:r>
-              <a:rPr lang="zh-CN" altLang="en-US" sz="4000" dirty="0"/>
-              <a:t>会员费</a:t>
-            </a:r>
-            <a:endParaRPr lang="en-US" altLang="zh-CN" sz="4000" dirty="0"/>
-          </a:p>
-          <a:p>
-            <a:endParaRPr lang="en-US" altLang="zh-CN" sz="4000" dirty="0"/>
-          </a:p>
-          <a:p>
-            <a:pPr algn="l"/>
-            <a:r>
-              <a:rPr lang="en-US" altLang="zh-CN" sz="4000" dirty="0"/>
-              <a:t>* </a:t>
-            </a:r>
-            <a:r>
-              <a:rPr lang="zh-CN" altLang="en-US" sz="4000" dirty="0"/>
-              <a:t>营销联盟</a:t>
+              <a:t>Youtube</a:t>
+            </a:r>
+            <a:r>
+              <a:rPr lang="zh-CN" altLang="en-US" sz="5000" dirty="0"/>
+              <a:t>视频</a:t>
+            </a:r>
+            <a:endParaRPr lang="en-US" altLang="zh-CN" sz="5000" dirty="0"/>
+          </a:p>
+          <a:p>
+            <a:endParaRPr lang="en-US" altLang="zh-CN" sz="5000" dirty="0"/>
+          </a:p>
+          <a:p>
+            <a:r>
+              <a:rPr lang="en-US" altLang="zh-CN" sz="5000" dirty="0"/>
+              <a:t>2</a:t>
+            </a:r>
+            <a:r>
+              <a:rPr lang="zh-CN" altLang="en-US" sz="5000" dirty="0"/>
+              <a:t>）</a:t>
+            </a:r>
+            <a:r>
+              <a:rPr lang="en-US" altLang="zh-CN" sz="5000" dirty="0" err="1"/>
+              <a:t>Tiktok</a:t>
+            </a:r>
+            <a:r>
+              <a:rPr lang="zh-CN" altLang="en-US" sz="5000" dirty="0"/>
+              <a:t>、小红书、</a:t>
+            </a:r>
+            <a:r>
+              <a:rPr lang="en-US" altLang="zh-CN" sz="5000" dirty="0"/>
+              <a:t>X</a:t>
+            </a:r>
+            <a:r>
+              <a:rPr lang="zh-CN" altLang="en-US" sz="5000" dirty="0"/>
+              <a:t>、</a:t>
+            </a:r>
+            <a:r>
+              <a:rPr lang="en-US" altLang="zh-CN" sz="5000" dirty="0"/>
+              <a:t>Meta</a:t>
+            </a:r>
+            <a:r>
+              <a:rPr lang="zh-CN" altLang="en-US" sz="5000" dirty="0"/>
+              <a:t>、</a:t>
+            </a:r>
+            <a:r>
+              <a:rPr lang="en-US" altLang="zh-CN" sz="5000"/>
+              <a:t>Reddit</a:t>
+            </a:r>
+            <a:r>
+              <a:rPr lang="zh-CN" altLang="en-US" sz="5000" dirty="0"/>
+              <a:t>、、、</a:t>
             </a:r>
           </a:p>
         </p:txBody>
@@ -3916,7 +3831,7 @@
     </p:spTree>
     <p:extLst>
       <p:ext uri="{BB962C8B-B14F-4D97-AF65-F5344CB8AC3E}">
-        <p14:creationId xmlns:p14="http://schemas.microsoft.com/office/powerpoint/2010/main" val="2293454213"/>
+        <p14:creationId xmlns:p14="http://schemas.microsoft.com/office/powerpoint/2010/main" val="519541532"/>
       </p:ext>
     </p:extLst>
   </p:cSld>
@@ -3972,13 +3887,14 @@
           <a:lstStyle/>
           <a:p>
             <a:r>
-              <a:rPr lang="zh-CN" altLang="en-US" sz="12000" b="1" dirty="0">
-                <a:solidFill>
-                  <a:srgbClr val="00B050"/>
-                </a:solidFill>
-              </a:rPr>
-              <a:t>最小产品</a:t>
-            </a:r>
+              <a:rPr lang="zh-CN" altLang="en-US" sz="12000" b="1" dirty="0"/>
+              <a:t>赚</a:t>
+            </a:r>
+            <a:r>
+              <a:rPr lang="en-US" altLang="zh-CN" sz="12000" b="1" dirty="0"/>
+              <a:t>$$$</a:t>
+            </a:r>
+            <a:endParaRPr lang="zh-CN" altLang="en-US" sz="12000" b="1" dirty="0"/>
           </a:p>
         </p:txBody>
       </p:sp>
@@ -4000,8 +3916,8 @@
         </p:nvSpPr>
         <p:spPr>
           <a:xfrm>
-            <a:off x="669202" y="3294219"/>
-            <a:ext cx="10853595" cy="1313995"/>
+            <a:off x="669202" y="2859653"/>
+            <a:ext cx="10853595" cy="3459666"/>
           </a:xfrm>
         </p:spPr>
         <p:txBody>
@@ -4010,22 +3926,76 @@
           </a:bodyPr>
           <a:lstStyle/>
           <a:p>
-            <a:r>
-              <a:rPr lang="en-US" altLang="zh-CN" sz="8000" dirty="0"/>
-              <a:t>Email</a:t>
-            </a:r>
-            <a:r>
-              <a:rPr lang="zh-CN" altLang="en-US" sz="8000" dirty="0"/>
-              <a:t>简报</a:t>
-            </a:r>
-            <a:endParaRPr lang="en-US" altLang="zh-CN" sz="8000" dirty="0"/>
+            <a:pPr algn="l"/>
+            <a:r>
+              <a:rPr lang="en-US" altLang="zh-CN" sz="4000" dirty="0"/>
+              <a:t>*** </a:t>
+            </a:r>
+            <a:r>
+              <a:rPr lang="zh-CN" altLang="en-US" sz="4000" dirty="0"/>
+              <a:t>数字商品：</a:t>
+            </a:r>
+            <a:r>
+              <a:rPr lang="zh-CN" altLang="en-US" sz="4000" dirty="0">
+                <a:solidFill>
+                  <a:srgbClr val="FF0000"/>
+                </a:solidFill>
+              </a:rPr>
+              <a:t>笔记</a:t>
+            </a:r>
+            <a:r>
+              <a:rPr lang="zh-CN" altLang="en-US" sz="4000" dirty="0"/>
+              <a:t>模板插件、</a:t>
+            </a:r>
+            <a:r>
+              <a:rPr lang="zh-CN" altLang="en-US" sz="4000" dirty="0">
+                <a:solidFill>
+                  <a:srgbClr val="FF0000"/>
+                </a:solidFill>
+              </a:rPr>
+              <a:t>课程</a:t>
+            </a:r>
+            <a:r>
+              <a:rPr lang="zh-CN" altLang="en-US" sz="4000" dirty="0"/>
+              <a:t>、书、商城</a:t>
+            </a:r>
+            <a:endParaRPr lang="en-US" altLang="zh-CN" sz="4000" dirty="0"/>
+          </a:p>
+          <a:p>
+            <a:endParaRPr lang="en-US" altLang="zh-CN" sz="4000" dirty="0"/>
+          </a:p>
+          <a:p>
+            <a:pPr algn="l"/>
+            <a:r>
+              <a:rPr lang="en-US" altLang="zh-CN" sz="4000" dirty="0"/>
+              <a:t>** </a:t>
+            </a:r>
+            <a:r>
+              <a:rPr lang="zh-CN" altLang="en-US" sz="4000" dirty="0"/>
+              <a:t>会员费</a:t>
+            </a:r>
+            <a:endParaRPr lang="en-US" altLang="zh-CN" sz="4000" dirty="0"/>
+          </a:p>
+          <a:p>
+            <a:endParaRPr lang="en-US" altLang="zh-CN" sz="4000" dirty="0"/>
+          </a:p>
+          <a:p>
+            <a:pPr algn="l"/>
+            <a:r>
+              <a:rPr lang="en-US" altLang="zh-CN" sz="4000" dirty="0"/>
+              <a:t>* </a:t>
+            </a:r>
+            <a:r>
+              <a:rPr lang="zh-CN" altLang="en-US" sz="4000" dirty="0"/>
+              <a:t>营销联盟</a:t>
+            </a:r>
           </a:p>
         </p:txBody>
       </p:sp>
     </p:spTree>
     <p:extLst>
       <p:ext uri="{BB962C8B-B14F-4D97-AF65-F5344CB8AC3E}">
-        <p14:creationId xmlns:p14="http://schemas.microsoft.com/office/powerpoint/2010/main" val="4098743248"/>
+        <p14:creationId xmlns:p14="http://schemas.microsoft.com/office/powerpoint/2010/main" val="2293454213"/>
       </p:ext>
     </p:extLst>
   </p:cSld>
@@ -4076,20 +4046,20 @@
         </p:spPr>
         <p:txBody>
           <a:bodyPr anchor="ctr">
-            <a:normAutofit fontScale="90000"/>
+            <a:normAutofit/>
           </a:bodyPr>
           <a:lstStyle/>
           <a:p>
             <a:r>
-              <a:rPr lang="zh-CN" altLang="en-US" sz="12000" b="1" dirty="0">
+              <a:rPr lang="zh-CN" altLang="en-US" sz="8000" b="1" dirty="0">
                 <a:solidFill>
                   <a:srgbClr val="00B050"/>
                 </a:solidFill>
               </a:rPr>
-              <a:t>项目：</a:t>
-            </a:r>
-            <a:r>
-              <a:rPr lang="en-US" altLang="zh-CN" sz="12000" b="1" dirty="0">
+              <a:t>最小产品：</a:t>
+            </a:r>
+            <a:r>
+              <a:rPr lang="en-US" altLang="zh-CN" sz="8000" b="1" dirty="0">
                 <a:solidFill>
                   <a:srgbClr val="00B050"/>
                 </a:solidFill>
@@ -4097,7 +4067,7 @@
               <a:t>FAST</a:t>
             </a:r>
             <a:r>
-              <a:rPr lang="zh-CN" altLang="en-US" sz="12000" b="1" dirty="0">
+              <a:rPr lang="zh-CN" altLang="en-US" sz="8000" b="1" dirty="0">
                 <a:solidFill>
                   <a:srgbClr val="00B050"/>
                 </a:solidFill>
@@ -4423,6 +4393,377 @@
     <p:extLst>
       <p:ext uri="{BB962C8B-B14F-4D97-AF65-F5344CB8AC3E}">
         <p14:creationId xmlns:p14="http://schemas.microsoft.com/office/powerpoint/2010/main" val="876508381"/>
+      </p:ext>
+    </p:extLst>
+  </p:cSld>
+  <p:clrMapOvr>
+    <a:masterClrMapping/>
+  </p:clrMapOvr>
+</p:sld>
+</file>
+
+<file path=ppt/slides/slide15.xml><?xml version="1.0" encoding="utf-8"?>
+<p:sld xmlns:a="http://schemas.openxmlformats.org/drawingml/2006/main" xmlns:r="http://schemas.openxmlformats.org/officeDocument/2006/relationships" xmlns:p="http://schemas.openxmlformats.org/presentationml/2006/main">
+  <p:cSld>
+    <p:spTree>
+      <p:nvGrpSpPr>
+        <p:cNvPr id="1" name=""/>
+        <p:cNvGrpSpPr/>
+        <p:nvPr/>
+      </p:nvGrpSpPr>
+      <p:grpSpPr>
+        <a:xfrm>
+          <a:off x="0" y="0"/>
+          <a:ext cx="0" cy="0"/>
+          <a:chOff x="0" y="0"/>
+          <a:chExt cx="0" cy="0"/>
+        </a:xfrm>
+      </p:grpSpPr>
+      <p:sp>
+        <p:nvSpPr>
+          <p:cNvPr id="2" name="Title 1">
+            <a:extLst>
+              <a:ext uri="{FF2B5EF4-FFF2-40B4-BE49-F238E27FC236}">
+                <a16:creationId xmlns:a16="http://schemas.microsoft.com/office/drawing/2014/main" id="{FAD6AE50-F6C3-190C-104C-A886A623FC96}"/>
+              </a:ext>
+            </a:extLst>
+          </p:cNvPr>
+          <p:cNvSpPr>
+            <a:spLocks noGrp="1"/>
+          </p:cNvSpPr>
+          <p:nvPr>
+            <p:ph type="ctrTitle"/>
+          </p:nvPr>
+        </p:nvSpPr>
+        <p:spPr>
+          <a:xfrm>
+            <a:off x="1524000" y="1439234"/>
+            <a:ext cx="9144000" cy="2387600"/>
+          </a:xfrm>
+        </p:spPr>
+        <p:txBody>
+          <a:bodyPr anchor="ctr">
+            <a:normAutofit/>
+          </a:bodyPr>
+          <a:lstStyle/>
+          <a:p>
+            <a:r>
+              <a:rPr lang="en-US" altLang="zh-CN" sz="12000" b="1" dirty="0"/>
+              <a:t>$ </a:t>
+            </a:r>
+            <a:r>
+              <a:rPr lang="zh-CN" altLang="en-US" sz="12000" b="1" dirty="0"/>
+              <a:t>电子书 </a:t>
+            </a:r>
+            <a:r>
+              <a:rPr lang="en-US" altLang="zh-CN" sz="12000" b="1" dirty="0"/>
+              <a:t>$</a:t>
+            </a:r>
+            <a:endParaRPr lang="zh-CN" altLang="en-US" sz="12000" b="1" dirty="0"/>
+          </a:p>
+        </p:txBody>
+      </p:sp>
+    </p:spTree>
+    <p:extLst>
+      <p:ext uri="{BB962C8B-B14F-4D97-AF65-F5344CB8AC3E}">
+        <p14:creationId xmlns:p14="http://schemas.microsoft.com/office/powerpoint/2010/main" val="2682966737"/>
+      </p:ext>
+    </p:extLst>
+  </p:cSld>
+  <p:clrMapOvr>
+    <a:masterClrMapping/>
+  </p:clrMapOvr>
+</p:sld>
+</file>
+
+<file path=ppt/slides/slide16.xml><?xml version="1.0" encoding="utf-8"?>
+<p:sld xmlns:a="http://schemas.openxmlformats.org/drawingml/2006/main" xmlns:r="http://schemas.openxmlformats.org/officeDocument/2006/relationships" xmlns:p="http://schemas.openxmlformats.org/presentationml/2006/main">
+  <p:cSld>
+    <p:spTree>
+      <p:nvGrpSpPr>
+        <p:cNvPr id="1" name=""/>
+        <p:cNvGrpSpPr/>
+        <p:nvPr/>
+      </p:nvGrpSpPr>
+      <p:grpSpPr>
+        <a:xfrm>
+          <a:off x="0" y="0"/>
+          <a:ext cx="0" cy="0"/>
+          <a:chOff x="0" y="0"/>
+          <a:chExt cx="0" cy="0"/>
+        </a:xfrm>
+      </p:grpSpPr>
+      <p:sp>
+        <p:nvSpPr>
+          <p:cNvPr id="2" name="Title 1">
+            <a:extLst>
+              <a:ext uri="{FF2B5EF4-FFF2-40B4-BE49-F238E27FC236}">
+                <a16:creationId xmlns:a16="http://schemas.microsoft.com/office/drawing/2014/main" id="{FAD6AE50-F6C3-190C-104C-A886A623FC96}"/>
+              </a:ext>
+            </a:extLst>
+          </p:cNvPr>
+          <p:cNvSpPr>
+            <a:spLocks noGrp="1"/>
+          </p:cNvSpPr>
+          <p:nvPr>
+            <p:ph type="ctrTitle"/>
+          </p:nvPr>
+        </p:nvSpPr>
+        <p:spPr>
+          <a:xfrm>
+            <a:off x="1524000" y="1439234"/>
+            <a:ext cx="9144000" cy="2387600"/>
+          </a:xfrm>
+        </p:spPr>
+        <p:txBody>
+          <a:bodyPr anchor="ctr">
+            <a:normAutofit/>
+          </a:bodyPr>
+          <a:lstStyle/>
+          <a:p>
+            <a:r>
+              <a:rPr lang="en-US" altLang="zh-CN" sz="12000" b="1" dirty="0"/>
+              <a:t>$ </a:t>
+            </a:r>
+            <a:r>
+              <a:rPr lang="zh-CN" altLang="en-US" sz="12000" b="1" dirty="0"/>
+              <a:t>课程 </a:t>
+            </a:r>
+            <a:r>
+              <a:rPr lang="en-US" altLang="zh-CN" sz="12000" b="1" dirty="0"/>
+              <a:t>$</a:t>
+            </a:r>
+            <a:endParaRPr lang="zh-CN" altLang="en-US" sz="12000" b="1" dirty="0"/>
+          </a:p>
+        </p:txBody>
+      </p:sp>
+    </p:spTree>
+    <p:extLst>
+      <p:ext uri="{BB962C8B-B14F-4D97-AF65-F5344CB8AC3E}">
+        <p14:creationId xmlns:p14="http://schemas.microsoft.com/office/powerpoint/2010/main" val="488188383"/>
+      </p:ext>
+    </p:extLst>
+  </p:cSld>
+  <p:clrMapOvr>
+    <a:masterClrMapping/>
+  </p:clrMapOvr>
+</p:sld>
+</file>
+
+<file path=ppt/slides/slide17.xml><?xml version="1.0" encoding="utf-8"?>
+<p:sld xmlns:a="http://schemas.openxmlformats.org/drawingml/2006/main" xmlns:r="http://schemas.openxmlformats.org/officeDocument/2006/relationships" xmlns:p="http://schemas.openxmlformats.org/presentationml/2006/main">
+  <p:cSld>
+    <p:spTree>
+      <p:nvGrpSpPr>
+        <p:cNvPr id="1" name=""/>
+        <p:cNvGrpSpPr/>
+        <p:nvPr/>
+      </p:nvGrpSpPr>
+      <p:grpSpPr>
+        <a:xfrm>
+          <a:off x="0" y="0"/>
+          <a:ext cx="0" cy="0"/>
+          <a:chOff x="0" y="0"/>
+          <a:chExt cx="0" cy="0"/>
+        </a:xfrm>
+      </p:grpSpPr>
+      <p:sp>
+        <p:nvSpPr>
+          <p:cNvPr id="2" name="Title 1">
+            <a:extLst>
+              <a:ext uri="{FF2B5EF4-FFF2-40B4-BE49-F238E27FC236}">
+                <a16:creationId xmlns:a16="http://schemas.microsoft.com/office/drawing/2014/main" id="{FAD6AE50-F6C3-190C-104C-A886A623FC96}"/>
+              </a:ext>
+            </a:extLst>
+          </p:cNvPr>
+          <p:cNvSpPr>
+            <a:spLocks noGrp="1"/>
+          </p:cNvSpPr>
+          <p:nvPr>
+            <p:ph type="ctrTitle"/>
+          </p:nvPr>
+        </p:nvSpPr>
+        <p:spPr>
+          <a:xfrm>
+            <a:off x="1273521" y="1529769"/>
+            <a:ext cx="9644958" cy="2387600"/>
+          </a:xfrm>
+        </p:spPr>
+        <p:txBody>
+          <a:bodyPr anchor="ctr">
+            <a:normAutofit/>
+          </a:bodyPr>
+          <a:lstStyle/>
+          <a:p>
+            <a:r>
+              <a:rPr lang="en-US" altLang="zh-CN" sz="12000" b="1" dirty="0"/>
+              <a:t>in4tree</a:t>
+            </a:r>
+            <a:r>
+              <a:rPr lang="zh-CN" altLang="en-US" sz="12000" b="1" dirty="0"/>
+              <a:t>信息树</a:t>
+            </a:r>
+          </a:p>
+        </p:txBody>
+      </p:sp>
+    </p:spTree>
+    <p:extLst>
+      <p:ext uri="{BB962C8B-B14F-4D97-AF65-F5344CB8AC3E}">
+        <p14:creationId xmlns:p14="http://schemas.microsoft.com/office/powerpoint/2010/main" val="890280069"/>
+      </p:ext>
+    </p:extLst>
+  </p:cSld>
+  <p:clrMapOvr>
+    <a:masterClrMapping/>
+  </p:clrMapOvr>
+</p:sld>
+</file>
+
+<file path=ppt/slides/slide18.xml><?xml version="1.0" encoding="utf-8"?>
+<p:sld xmlns:a="http://schemas.openxmlformats.org/drawingml/2006/main" xmlns:r="http://schemas.openxmlformats.org/officeDocument/2006/relationships" xmlns:p="http://schemas.openxmlformats.org/presentationml/2006/main">
+  <p:cSld>
+    <p:spTree>
+      <p:nvGrpSpPr>
+        <p:cNvPr id="1" name=""/>
+        <p:cNvGrpSpPr/>
+        <p:nvPr/>
+      </p:nvGrpSpPr>
+      <p:grpSpPr>
+        <a:xfrm>
+          <a:off x="0" y="0"/>
+          <a:ext cx="0" cy="0"/>
+          <a:chOff x="0" y="0"/>
+          <a:chExt cx="0" cy="0"/>
+        </a:xfrm>
+      </p:grpSpPr>
+      <p:sp>
+        <p:nvSpPr>
+          <p:cNvPr id="2" name="Title 1">
+            <a:extLst>
+              <a:ext uri="{FF2B5EF4-FFF2-40B4-BE49-F238E27FC236}">
+                <a16:creationId xmlns:a16="http://schemas.microsoft.com/office/drawing/2014/main" id="{FAD6AE50-F6C3-190C-104C-A886A623FC96}"/>
+              </a:ext>
+            </a:extLst>
+          </p:cNvPr>
+          <p:cNvSpPr>
+            <a:spLocks noGrp="1"/>
+          </p:cNvSpPr>
+          <p:nvPr>
+            <p:ph type="ctrTitle"/>
+          </p:nvPr>
+        </p:nvSpPr>
+        <p:spPr>
+          <a:xfrm>
+            <a:off x="1273521" y="1457341"/>
+            <a:ext cx="9644958" cy="2387600"/>
+          </a:xfrm>
+        </p:spPr>
+        <p:txBody>
+          <a:bodyPr anchor="ctr">
+            <a:normAutofit fontScale="90000"/>
+          </a:bodyPr>
+          <a:lstStyle/>
+          <a:p>
+            <a:r>
+              <a:rPr lang="en-US" altLang="zh-CN" sz="12000" b="1" dirty="0" err="1"/>
+              <a:t>Youtube</a:t>
+            </a:r>
+            <a:r>
+              <a:rPr lang="en-US" altLang="zh-CN" sz="12000" b="1" dirty="0"/>
+              <a:t> #0</a:t>
+            </a:r>
+            <a:br>
+              <a:rPr lang="en-US" altLang="zh-CN" sz="12000" b="1" dirty="0"/>
+            </a:br>
+            <a:r>
+              <a:rPr lang="en-US" altLang="zh-CN" sz="12000" b="1" dirty="0"/>
+              <a:t>OPC</a:t>
+            </a:r>
+            <a:endParaRPr lang="zh-CN" altLang="en-US" sz="12000" b="1" dirty="0"/>
+          </a:p>
+        </p:txBody>
+      </p:sp>
+    </p:spTree>
+    <p:extLst>
+      <p:ext uri="{BB962C8B-B14F-4D97-AF65-F5344CB8AC3E}">
+        <p14:creationId xmlns:p14="http://schemas.microsoft.com/office/powerpoint/2010/main" val="3786504956"/>
+      </p:ext>
+    </p:extLst>
+  </p:cSld>
+  <p:clrMapOvr>
+    <a:masterClrMapping/>
+  </p:clrMapOvr>
+</p:sld>
+</file>
+
+<file path=ppt/slides/slide19.xml><?xml version="1.0" encoding="utf-8"?>
+<p:sld xmlns:a="http://schemas.openxmlformats.org/drawingml/2006/main" xmlns:r="http://schemas.openxmlformats.org/officeDocument/2006/relationships" xmlns:p="http://schemas.openxmlformats.org/presentationml/2006/main">
+  <p:cSld>
+    <p:spTree>
+      <p:nvGrpSpPr>
+        <p:cNvPr id="1" name=""/>
+        <p:cNvGrpSpPr/>
+        <p:nvPr/>
+      </p:nvGrpSpPr>
+      <p:grpSpPr>
+        <a:xfrm>
+          <a:off x="0" y="0"/>
+          <a:ext cx="0" cy="0"/>
+          <a:chOff x="0" y="0"/>
+          <a:chExt cx="0" cy="0"/>
+        </a:xfrm>
+      </p:grpSpPr>
+      <p:sp>
+        <p:nvSpPr>
+          <p:cNvPr id="2" name="Title 1">
+            <a:extLst>
+              <a:ext uri="{FF2B5EF4-FFF2-40B4-BE49-F238E27FC236}">
+                <a16:creationId xmlns:a16="http://schemas.microsoft.com/office/drawing/2014/main" id="{FAD6AE50-F6C3-190C-104C-A886A623FC96}"/>
+              </a:ext>
+            </a:extLst>
+          </p:cNvPr>
+          <p:cNvSpPr>
+            <a:spLocks noGrp="1"/>
+          </p:cNvSpPr>
+          <p:nvPr>
+            <p:ph type="ctrTitle"/>
+          </p:nvPr>
+        </p:nvSpPr>
+        <p:spPr>
+          <a:xfrm>
+            <a:off x="1273521" y="1457341"/>
+            <a:ext cx="9644958" cy="2387600"/>
+          </a:xfrm>
+        </p:spPr>
+        <p:txBody>
+          <a:bodyPr anchor="ctr">
+            <a:normAutofit fontScale="90000"/>
+          </a:bodyPr>
+          <a:lstStyle/>
+          <a:p>
+            <a:r>
+              <a:rPr lang="en-US" altLang="zh-CN" sz="12000" b="1" dirty="0" err="1"/>
+              <a:t>Youtube</a:t>
+            </a:r>
+            <a:r>
+              <a:rPr lang="en-US" altLang="zh-CN" sz="12000" b="1" dirty="0"/>
+              <a:t> #1</a:t>
+            </a:r>
+            <a:br>
+              <a:rPr lang="en-US" altLang="zh-CN" sz="12000" b="1" dirty="0"/>
+            </a:br>
+            <a:r>
+              <a:rPr lang="en-US" altLang="zh-CN" sz="12000" b="1" dirty="0"/>
+              <a:t>FAST</a:t>
+            </a:r>
+            <a:endParaRPr lang="zh-CN" altLang="en-US" sz="12000" b="1" dirty="0"/>
+          </a:p>
+        </p:txBody>
+      </p:sp>
+    </p:spTree>
+    <p:extLst>
+      <p:ext uri="{BB962C8B-B14F-4D97-AF65-F5344CB8AC3E}">
+        <p14:creationId xmlns:p14="http://schemas.microsoft.com/office/powerpoint/2010/main" val="2448213135"/>
       </p:ext>
     </p:extLst>
   </p:cSld>

--- a/_attachment/一人公司（OPC）.pptx
+++ b/_attachment/一人公司（OPC）.pptx
@@ -11,7 +11,7 @@
     <p:sldId id="261" r:id="rId5"/>
     <p:sldId id="262" r:id="rId6"/>
     <p:sldId id="263" r:id="rId7"/>
-    <p:sldId id="270" r:id="rId8"/>
+    <p:sldId id="284" r:id="rId8"/>
     <p:sldId id="264" r:id="rId9"/>
     <p:sldId id="265" r:id="rId10"/>
     <p:sldId id="271" r:id="rId11"/>
@@ -24,6 +24,14 @@
     <p:sldId id="276" r:id="rId18"/>
     <p:sldId id="275" r:id="rId19"/>
     <p:sldId id="277" r:id="rId20"/>
+    <p:sldId id="283" r:id="rId21"/>
+    <p:sldId id="278" r:id="rId22"/>
+    <p:sldId id="282" r:id="rId23"/>
+    <p:sldId id="279" r:id="rId24"/>
+    <p:sldId id="280" r:id="rId25"/>
+    <p:sldId id="281" r:id="rId26"/>
+    <p:sldId id="285" r:id="rId27"/>
+    <p:sldId id="286" r:id="rId28"/>
   </p:sldIdLst>
   <p:sldSz cx="12192000" cy="6858000"/>
   <p:notesSz cx="6858000" cy="9144000"/>
@@ -279,7 +287,7 @@
           <a:p>
             <a:fld id="{C424F68F-667C-44F2-BF6C-EF7AC8E97C48}" type="datetimeFigureOut">
               <a:rPr lang="zh-CN" altLang="en-US" smtClean="0"/>
-              <a:t>2026/2/1</a:t>
+              <a:t>2026/2/12</a:t>
             </a:fld>
             <a:endParaRPr lang="zh-CN" altLang="en-US"/>
           </a:p>
@@ -479,7 +487,7 @@
           <a:p>
             <a:fld id="{C424F68F-667C-44F2-BF6C-EF7AC8E97C48}" type="datetimeFigureOut">
               <a:rPr lang="zh-CN" altLang="en-US" smtClean="0"/>
-              <a:t>2026/2/1</a:t>
+              <a:t>2026/2/12</a:t>
             </a:fld>
             <a:endParaRPr lang="zh-CN" altLang="en-US"/>
           </a:p>
@@ -689,7 +697,7 @@
           <a:p>
             <a:fld id="{C424F68F-667C-44F2-BF6C-EF7AC8E97C48}" type="datetimeFigureOut">
               <a:rPr lang="zh-CN" altLang="en-US" smtClean="0"/>
-              <a:t>2026/2/1</a:t>
+              <a:t>2026/2/12</a:t>
             </a:fld>
             <a:endParaRPr lang="zh-CN" altLang="en-US"/>
           </a:p>
@@ -889,7 +897,7 @@
           <a:p>
             <a:fld id="{C424F68F-667C-44F2-BF6C-EF7AC8E97C48}" type="datetimeFigureOut">
               <a:rPr lang="zh-CN" altLang="en-US" smtClean="0"/>
-              <a:t>2026/2/1</a:t>
+              <a:t>2026/2/12</a:t>
             </a:fld>
             <a:endParaRPr lang="zh-CN" altLang="en-US"/>
           </a:p>
@@ -1165,7 +1173,7 @@
           <a:p>
             <a:fld id="{C424F68F-667C-44F2-BF6C-EF7AC8E97C48}" type="datetimeFigureOut">
               <a:rPr lang="zh-CN" altLang="en-US" smtClean="0"/>
-              <a:t>2026/2/1</a:t>
+              <a:t>2026/2/12</a:t>
             </a:fld>
             <a:endParaRPr lang="zh-CN" altLang="en-US"/>
           </a:p>
@@ -1433,7 +1441,7 @@
           <a:p>
             <a:fld id="{C424F68F-667C-44F2-BF6C-EF7AC8E97C48}" type="datetimeFigureOut">
               <a:rPr lang="zh-CN" altLang="en-US" smtClean="0"/>
-              <a:t>2026/2/1</a:t>
+              <a:t>2026/2/12</a:t>
             </a:fld>
             <a:endParaRPr lang="zh-CN" altLang="en-US"/>
           </a:p>
@@ -1848,7 +1856,7 @@
           <a:p>
             <a:fld id="{C424F68F-667C-44F2-BF6C-EF7AC8E97C48}" type="datetimeFigureOut">
               <a:rPr lang="zh-CN" altLang="en-US" smtClean="0"/>
-              <a:t>2026/2/1</a:t>
+              <a:t>2026/2/12</a:t>
             </a:fld>
             <a:endParaRPr lang="zh-CN" altLang="en-US"/>
           </a:p>
@@ -1990,7 +1998,7 @@
           <a:p>
             <a:fld id="{C424F68F-667C-44F2-BF6C-EF7AC8E97C48}" type="datetimeFigureOut">
               <a:rPr lang="zh-CN" altLang="en-US" smtClean="0"/>
-              <a:t>2026/2/1</a:t>
+              <a:t>2026/2/12</a:t>
             </a:fld>
             <a:endParaRPr lang="zh-CN" altLang="en-US"/>
           </a:p>
@@ -2103,7 +2111,7 @@
           <a:p>
             <a:fld id="{C424F68F-667C-44F2-BF6C-EF7AC8E97C48}" type="datetimeFigureOut">
               <a:rPr lang="zh-CN" altLang="en-US" smtClean="0"/>
-              <a:t>2026/2/1</a:t>
+              <a:t>2026/2/12</a:t>
             </a:fld>
             <a:endParaRPr lang="zh-CN" altLang="en-US"/>
           </a:p>
@@ -2416,7 +2424,7 @@
           <a:p>
             <a:fld id="{C424F68F-667C-44F2-BF6C-EF7AC8E97C48}" type="datetimeFigureOut">
               <a:rPr lang="zh-CN" altLang="en-US" smtClean="0"/>
-              <a:t>2026/2/1</a:t>
+              <a:t>2026/2/12</a:t>
             </a:fld>
             <a:endParaRPr lang="zh-CN" altLang="en-US"/>
           </a:p>
@@ -2705,7 +2713,7 @@
           <a:p>
             <a:fld id="{C424F68F-667C-44F2-BF6C-EF7AC8E97C48}" type="datetimeFigureOut">
               <a:rPr lang="zh-CN" altLang="en-US" smtClean="0"/>
-              <a:t>2026/2/1</a:t>
+              <a:t>2026/2/12</a:t>
             </a:fld>
             <a:endParaRPr lang="zh-CN" altLang="en-US"/>
           </a:p>
@@ -2948,7 +2956,7 @@
           <a:p>
             <a:fld id="{C424F68F-667C-44F2-BF6C-EF7AC8E97C48}" type="datetimeFigureOut">
               <a:rPr lang="zh-CN" altLang="en-US" smtClean="0"/>
-              <a:t>2026/2/1</a:t>
+              <a:t>2026/2/12</a:t>
             </a:fld>
             <a:endParaRPr lang="zh-CN" altLang="en-US"/>
           </a:p>
@@ -3394,15 +3402,24 @@
           <a:lstStyle/>
           <a:p>
             <a:r>
-              <a:rPr lang="zh-CN" altLang="en-US" sz="11000" b="1" dirty="0"/>
+              <a:rPr lang="zh-CN" altLang="en-US" sz="11000" b="1" dirty="0">
+                <a:latin typeface="+mn-ea"/>
+                <a:ea typeface="+mn-ea"/>
+              </a:rPr>
               <a:t>一人公司（</a:t>
             </a:r>
             <a:r>
-              <a:rPr lang="en-US" altLang="zh-CN" sz="11000" b="1" dirty="0"/>
+              <a:rPr lang="en-US" altLang="zh-CN" sz="11000" b="1" dirty="0">
+                <a:latin typeface="+mn-ea"/>
+                <a:ea typeface="+mn-ea"/>
+              </a:rPr>
               <a:t>OPC</a:t>
             </a:r>
             <a:r>
-              <a:rPr lang="zh-CN" altLang="en-US" sz="11000" b="1" dirty="0"/>
+              <a:rPr lang="zh-CN" altLang="en-US" sz="11000" b="1" dirty="0">
+                <a:latin typeface="+mn-ea"/>
+                <a:ea typeface="+mn-ea"/>
+              </a:rPr>
               <a:t>）</a:t>
             </a:r>
           </a:p>
@@ -3437,15 +3454,21 @@
           <a:lstStyle/>
           <a:p>
             <a:r>
-              <a:rPr lang="zh-CN" altLang="en-US" sz="9600" dirty="0"/>
+              <a:rPr lang="zh-CN" altLang="en-US" sz="9600" dirty="0">
+                <a:latin typeface="+mn-ea"/>
+              </a:rPr>
               <a:t>（学、</a:t>
             </a:r>
             <a:r>
-              <a:rPr lang="en-US" altLang="zh-CN" sz="9600" dirty="0"/>
+              <a:rPr lang="en-US" altLang="zh-CN" sz="9600" dirty="0">
+                <a:latin typeface="+mn-ea"/>
+              </a:rPr>
               <a:t>AI</a:t>
             </a:r>
             <a:r>
-              <a:rPr lang="zh-CN" altLang="en-US" sz="9600" dirty="0"/>
+              <a:rPr lang="zh-CN" altLang="en-US" sz="9600" dirty="0">
+                <a:latin typeface="+mn-ea"/>
+              </a:rPr>
               <a:t>、赚）</a:t>
             </a:r>
           </a:p>
@@ -3514,6 +3537,8 @@
                 <a:solidFill>
                   <a:srgbClr val="00B050"/>
                 </a:solidFill>
+                <a:latin typeface="+mn-ea"/>
+                <a:ea typeface="+mn-ea"/>
               </a:rPr>
               <a:t>n8n</a:t>
             </a:r>
@@ -3521,6 +3546,8 @@
               <a:solidFill>
                 <a:srgbClr val="00B050"/>
               </a:solidFill>
+              <a:latin typeface="+mn-ea"/>
+              <a:ea typeface="+mn-ea"/>
             </a:endParaRPr>
           </a:p>
         </p:txBody>
@@ -3579,11 +3606,17 @@
           <a:lstStyle/>
           <a:p>
             <a:r>
-              <a:rPr lang="en-US" altLang="zh-CN" sz="12000" b="1" dirty="0"/>
+              <a:rPr lang="en-US" altLang="zh-CN" sz="12000" b="1" dirty="0">
+                <a:latin typeface="+mn-ea"/>
+                <a:ea typeface="+mn-ea"/>
+              </a:rPr>
               <a:t>AI</a:t>
             </a:r>
             <a:r>
-              <a:rPr lang="zh-CN" altLang="en-US" sz="12000" b="1" dirty="0"/>
+              <a:rPr lang="zh-CN" altLang="en-US" sz="12000" b="1" dirty="0">
+                <a:latin typeface="+mn-ea"/>
+                <a:ea typeface="+mn-ea"/>
+              </a:rPr>
               <a:t>应用</a:t>
             </a:r>
           </a:p>
@@ -3618,15 +3651,21 @@
           <a:lstStyle/>
           <a:p>
             <a:r>
-              <a:rPr lang="zh-CN" altLang="en-US" sz="5000" dirty="0"/>
+              <a:rPr lang="zh-CN" altLang="en-US" sz="5000" dirty="0">
+                <a:latin typeface="+mn-ea"/>
+              </a:rPr>
               <a:t>（</a:t>
             </a:r>
             <a:r>
-              <a:rPr lang="en-US" altLang="zh-CN" sz="5000" dirty="0"/>
+              <a:rPr lang="en-US" altLang="zh-CN" sz="5000" dirty="0">
+                <a:latin typeface="+mn-ea"/>
+              </a:rPr>
               <a:t>Cutting-edge Applications</a:t>
             </a:r>
             <a:r>
-              <a:rPr lang="zh-CN" altLang="en-US" sz="5000" dirty="0"/>
+              <a:rPr lang="zh-CN" altLang="en-US" sz="5000" dirty="0">
+                <a:latin typeface="+mn-ea"/>
+              </a:rPr>
               <a:t>）</a:t>
             </a:r>
           </a:p>
@@ -3691,7 +3730,10 @@
           <a:lstStyle/>
           <a:p>
             <a:r>
-              <a:rPr lang="zh-CN" altLang="en-US" sz="12000" b="1" dirty="0"/>
+              <a:rPr lang="zh-CN" altLang="en-US" sz="12000" b="1" dirty="0">
+                <a:latin typeface="+mn-ea"/>
+                <a:ea typeface="+mn-ea"/>
+              </a:rPr>
               <a:t>赚人气</a:t>
             </a:r>
           </a:p>
@@ -3726,11 +3768,15 @@
           <a:lstStyle/>
           <a:p>
             <a:r>
-              <a:rPr lang="en-US" altLang="zh-CN" sz="5000" dirty="0"/>
+              <a:rPr lang="en-US" altLang="zh-CN" sz="5000" dirty="0">
+                <a:latin typeface="+mn-ea"/>
+              </a:rPr>
               <a:t>0</a:t>
             </a:r>
             <a:r>
-              <a:rPr lang="zh-CN" altLang="en-US" sz="5000" dirty="0"/>
+              <a:rPr lang="zh-CN" altLang="en-US" sz="5000" dirty="0">
+                <a:latin typeface="+mn-ea"/>
+              </a:rPr>
               <a:t>）</a:t>
             </a:r>
             <a:r>
@@ -3738,33 +3784,48 @@
                 <a:solidFill>
                   <a:srgbClr val="FF0000"/>
                 </a:solidFill>
+                <a:latin typeface="+mn-ea"/>
               </a:rPr>
               <a:t>in4tree</a:t>
             </a:r>
             <a:r>
-              <a:rPr lang="zh-CN" altLang="en-US" sz="5000" dirty="0"/>
+              <a:rPr lang="zh-CN" altLang="en-US" sz="5000" dirty="0">
+                <a:latin typeface="+mn-ea"/>
+              </a:rPr>
               <a:t>博客（</a:t>
             </a:r>
             <a:r>
-              <a:rPr lang="en-US" altLang="zh-CN" sz="5000" dirty="0"/>
+              <a:rPr lang="en-US" altLang="zh-CN" sz="5000" dirty="0">
+                <a:latin typeface="+mn-ea"/>
+              </a:rPr>
               <a:t>SEO</a:t>
             </a:r>
             <a:r>
-              <a:rPr lang="zh-CN" altLang="en-US" sz="5000" dirty="0"/>
+              <a:rPr lang="zh-CN" altLang="en-US" sz="5000" dirty="0">
+                <a:latin typeface="+mn-ea"/>
+              </a:rPr>
               <a:t>信息树）</a:t>
             </a:r>
-            <a:endParaRPr lang="en-US" altLang="zh-CN" sz="5000" dirty="0"/>
-          </a:p>
-          <a:p>
-            <a:endParaRPr lang="en-US" altLang="zh-CN" sz="5000" dirty="0"/>
-          </a:p>
-          <a:p>
-            <a:r>
-              <a:rPr lang="en-US" altLang="zh-CN" sz="5000" dirty="0"/>
+            <a:endParaRPr lang="en-US" altLang="zh-CN" sz="5000" dirty="0">
+              <a:latin typeface="+mn-ea"/>
+            </a:endParaRPr>
+          </a:p>
+          <a:p>
+            <a:endParaRPr lang="en-US" altLang="zh-CN" sz="5000" dirty="0">
+              <a:latin typeface="+mn-ea"/>
+            </a:endParaRPr>
+          </a:p>
+          <a:p>
+            <a:r>
+              <a:rPr lang="en-US" altLang="zh-CN" sz="5000" dirty="0">
+                <a:latin typeface="+mn-ea"/>
+              </a:rPr>
               <a:t>1</a:t>
             </a:r>
             <a:r>
-              <a:rPr lang="zh-CN" altLang="en-US" sz="5000" dirty="0"/>
+              <a:rPr lang="zh-CN" altLang="en-US" sz="5000" dirty="0">
+                <a:latin typeface="+mn-ea"/>
+              </a:rPr>
               <a:t>）</a:t>
             </a:r>
             <a:r>
@@ -3772,57 +3833,84 @@
                 <a:solidFill>
                   <a:srgbClr val="FF0000"/>
                 </a:solidFill>
+                <a:latin typeface="+mn-ea"/>
               </a:rPr>
               <a:t>Youtube</a:t>
             </a:r>
             <a:r>
-              <a:rPr lang="zh-CN" altLang="en-US" sz="5000" dirty="0"/>
+              <a:rPr lang="zh-CN" altLang="en-US" sz="5000" dirty="0">
+                <a:latin typeface="+mn-ea"/>
+              </a:rPr>
               <a:t>视频</a:t>
             </a:r>
-            <a:endParaRPr lang="en-US" altLang="zh-CN" sz="5000" dirty="0"/>
-          </a:p>
-          <a:p>
-            <a:endParaRPr lang="en-US" altLang="zh-CN" sz="5000" dirty="0"/>
-          </a:p>
-          <a:p>
-            <a:r>
-              <a:rPr lang="en-US" altLang="zh-CN" sz="5000" dirty="0"/>
+            <a:endParaRPr lang="en-US" altLang="zh-CN" sz="5000" dirty="0">
+              <a:latin typeface="+mn-ea"/>
+            </a:endParaRPr>
+          </a:p>
+          <a:p>
+            <a:endParaRPr lang="en-US" altLang="zh-CN" sz="5000" dirty="0">
+              <a:latin typeface="+mn-ea"/>
+            </a:endParaRPr>
+          </a:p>
+          <a:p>
+            <a:r>
+              <a:rPr lang="en-US" altLang="zh-CN" sz="5000" dirty="0">
+                <a:latin typeface="+mn-ea"/>
+              </a:rPr>
               <a:t>2</a:t>
             </a:r>
             <a:r>
-              <a:rPr lang="zh-CN" altLang="en-US" sz="5000" dirty="0"/>
+              <a:rPr lang="zh-CN" altLang="en-US" sz="5000" dirty="0">
+                <a:latin typeface="+mn-ea"/>
+              </a:rPr>
               <a:t>）</a:t>
             </a:r>
             <a:r>
-              <a:rPr lang="en-US" altLang="zh-CN" sz="5000" dirty="0" err="1"/>
+              <a:rPr lang="en-US" altLang="zh-CN" sz="5000" dirty="0" err="1">
+                <a:latin typeface="+mn-ea"/>
+              </a:rPr>
               <a:t>Tiktok</a:t>
             </a:r>
             <a:r>
-              <a:rPr lang="zh-CN" altLang="en-US" sz="5000" dirty="0"/>
+              <a:rPr lang="zh-CN" altLang="en-US" sz="5000" dirty="0">
+                <a:latin typeface="+mn-ea"/>
+              </a:rPr>
               <a:t>、小红书、</a:t>
             </a:r>
             <a:r>
-              <a:rPr lang="en-US" altLang="zh-CN" sz="5000" dirty="0"/>
+              <a:rPr lang="en-US" altLang="zh-CN" sz="5000" dirty="0">
+                <a:latin typeface="+mn-ea"/>
+              </a:rPr>
               <a:t>X</a:t>
             </a:r>
             <a:r>
-              <a:rPr lang="zh-CN" altLang="en-US" sz="5000" dirty="0"/>
+              <a:rPr lang="zh-CN" altLang="en-US" sz="5000" dirty="0">
+                <a:latin typeface="+mn-ea"/>
+              </a:rPr>
               <a:t>、</a:t>
             </a:r>
             <a:r>
-              <a:rPr lang="en-US" altLang="zh-CN" sz="5000" dirty="0"/>
+              <a:rPr lang="en-US" altLang="zh-CN" sz="5000" dirty="0">
+                <a:latin typeface="+mn-ea"/>
+              </a:rPr>
               <a:t>Meta</a:t>
             </a:r>
             <a:r>
-              <a:rPr lang="zh-CN" altLang="en-US" sz="5000" dirty="0"/>
+              <a:rPr lang="zh-CN" altLang="en-US" sz="5000" dirty="0">
+                <a:latin typeface="+mn-ea"/>
+              </a:rPr>
               <a:t>、</a:t>
             </a:r>
             <a:r>
-              <a:rPr lang="en-US" altLang="zh-CN" sz="5000"/>
+              <a:rPr lang="en-US" altLang="zh-CN" sz="5000" dirty="0">
+                <a:latin typeface="+mn-ea"/>
+              </a:rPr>
               <a:t>Reddit</a:t>
             </a:r>
             <a:r>
-              <a:rPr lang="zh-CN" altLang="en-US" sz="5000" dirty="0"/>
+              <a:rPr lang="zh-CN" altLang="en-US" sz="5000" dirty="0">
+                <a:latin typeface="+mn-ea"/>
+              </a:rPr>
               <a:t>、、、</a:t>
             </a:r>
           </a:p>
@@ -3887,14 +3975,23 @@
           <a:lstStyle/>
           <a:p>
             <a:r>
-              <a:rPr lang="zh-CN" altLang="en-US" sz="12000" b="1" dirty="0"/>
+              <a:rPr lang="zh-CN" altLang="en-US" sz="12000" b="1" dirty="0">
+                <a:latin typeface="+mn-ea"/>
+                <a:ea typeface="+mn-ea"/>
+              </a:rPr>
               <a:t>赚</a:t>
             </a:r>
             <a:r>
-              <a:rPr lang="en-US" altLang="zh-CN" sz="12000" b="1" dirty="0"/>
+              <a:rPr lang="en-US" altLang="zh-CN" sz="12000" b="1" dirty="0">
+                <a:latin typeface="+mn-ea"/>
+                <a:ea typeface="+mn-ea"/>
+              </a:rPr>
               <a:t>$$$</a:t>
             </a:r>
-            <a:endParaRPr lang="zh-CN" altLang="en-US" sz="12000" b="1" dirty="0"/>
+            <a:endParaRPr lang="zh-CN" altLang="en-US" sz="12000" b="1" dirty="0">
+              <a:latin typeface="+mn-ea"/>
+              <a:ea typeface="+mn-ea"/>
+            </a:endParaRPr>
           </a:p>
         </p:txBody>
       </p:sp>
@@ -3928,11 +4025,15 @@
           <a:p>
             <a:pPr algn="l"/>
             <a:r>
-              <a:rPr lang="en-US" altLang="zh-CN" sz="4000" dirty="0"/>
+              <a:rPr lang="en-US" altLang="zh-CN" sz="4000" dirty="0">
+                <a:latin typeface="+mn-ea"/>
+              </a:rPr>
               <a:t>*** </a:t>
             </a:r>
             <a:r>
-              <a:rPr lang="zh-CN" altLang="en-US" sz="4000" dirty="0"/>
+              <a:rPr lang="zh-CN" altLang="en-US" sz="4000" dirty="0">
+                <a:latin typeface="+mn-ea"/>
+              </a:rPr>
               <a:t>数字商品：</a:t>
             </a:r>
             <a:r>
@@ -3940,11 +4041,14 @@
                 <a:solidFill>
                   <a:srgbClr val="FF0000"/>
                 </a:solidFill>
+                <a:latin typeface="+mn-ea"/>
               </a:rPr>
               <a:t>笔记</a:t>
             </a:r>
             <a:r>
-              <a:rPr lang="zh-CN" altLang="en-US" sz="4000" dirty="0"/>
+              <a:rPr lang="zh-CN" altLang="en-US" sz="4000" dirty="0">
+                <a:latin typeface="+mn-ea"/>
+              </a:rPr>
               <a:t>模板插件、</a:t>
             </a:r>
             <a:r>
@@ -3952,41 +4056,60 @@
                 <a:solidFill>
                   <a:srgbClr val="FF0000"/>
                 </a:solidFill>
+                <a:latin typeface="+mn-ea"/>
               </a:rPr>
               <a:t>课程</a:t>
             </a:r>
             <a:r>
-              <a:rPr lang="zh-CN" altLang="en-US" sz="4000" dirty="0"/>
+              <a:rPr lang="zh-CN" altLang="en-US" sz="4000" dirty="0">
+                <a:latin typeface="+mn-ea"/>
+              </a:rPr>
               <a:t>、书、商城</a:t>
             </a:r>
-            <a:endParaRPr lang="en-US" altLang="zh-CN" sz="4000" dirty="0"/>
-          </a:p>
-          <a:p>
-            <a:endParaRPr lang="en-US" altLang="zh-CN" sz="4000" dirty="0"/>
+            <a:endParaRPr lang="en-US" altLang="zh-CN" sz="4000" dirty="0">
+              <a:latin typeface="+mn-ea"/>
+            </a:endParaRPr>
+          </a:p>
+          <a:p>
+            <a:endParaRPr lang="en-US" altLang="zh-CN" sz="4000" dirty="0">
+              <a:latin typeface="+mn-ea"/>
+            </a:endParaRPr>
           </a:p>
           <a:p>
             <a:pPr algn="l"/>
             <a:r>
-              <a:rPr lang="en-US" altLang="zh-CN" sz="4000" dirty="0"/>
+              <a:rPr lang="en-US" altLang="zh-CN" sz="4000" dirty="0">
+                <a:latin typeface="+mn-ea"/>
+              </a:rPr>
               <a:t>** </a:t>
             </a:r>
             <a:r>
-              <a:rPr lang="zh-CN" altLang="en-US" sz="4000" dirty="0"/>
+              <a:rPr lang="zh-CN" altLang="en-US" sz="4000" dirty="0">
+                <a:latin typeface="+mn-ea"/>
+              </a:rPr>
               <a:t>会员费</a:t>
             </a:r>
-            <a:endParaRPr lang="en-US" altLang="zh-CN" sz="4000" dirty="0"/>
-          </a:p>
-          <a:p>
-            <a:endParaRPr lang="en-US" altLang="zh-CN" sz="4000" dirty="0"/>
+            <a:endParaRPr lang="en-US" altLang="zh-CN" sz="4000" dirty="0">
+              <a:latin typeface="+mn-ea"/>
+            </a:endParaRPr>
+          </a:p>
+          <a:p>
+            <a:endParaRPr lang="en-US" altLang="zh-CN" sz="4000" dirty="0">
+              <a:latin typeface="+mn-ea"/>
+            </a:endParaRPr>
           </a:p>
           <a:p>
             <a:pPr algn="l"/>
             <a:r>
-              <a:rPr lang="en-US" altLang="zh-CN" sz="4000" dirty="0"/>
+              <a:rPr lang="en-US" altLang="zh-CN" sz="4000" dirty="0">
+                <a:latin typeface="+mn-ea"/>
+              </a:rPr>
               <a:t>* </a:t>
             </a:r>
             <a:r>
-              <a:rPr lang="zh-CN" altLang="en-US" sz="4000" dirty="0"/>
+              <a:rPr lang="zh-CN" altLang="en-US" sz="4000" dirty="0">
+                <a:latin typeface="+mn-ea"/>
+              </a:rPr>
               <a:t>营销联盟</a:t>
             </a:r>
           </a:p>
@@ -4055,6 +4178,8 @@
                 <a:solidFill>
                   <a:srgbClr val="00B050"/>
                 </a:solidFill>
+                <a:latin typeface="+mn-ea"/>
+                <a:ea typeface="+mn-ea"/>
               </a:rPr>
               <a:t>最小产品：</a:t>
             </a:r>
@@ -4063,6 +4188,8 @@
                 <a:solidFill>
                   <a:srgbClr val="00B050"/>
                 </a:solidFill>
+                <a:latin typeface="+mn-ea"/>
+                <a:ea typeface="+mn-ea"/>
               </a:rPr>
               <a:t>FAST</a:t>
             </a:r>
@@ -4071,6 +4198,8 @@
                 <a:solidFill>
                   <a:srgbClr val="00B050"/>
                 </a:solidFill>
+                <a:latin typeface="+mn-ea"/>
+                <a:ea typeface="+mn-ea"/>
               </a:rPr>
               <a:t>全栈树</a:t>
             </a:r>
@@ -4107,19 +4236,27 @@
           <a:p>
             <a:pPr algn="l"/>
             <a:r>
-              <a:rPr lang="zh-CN" altLang="en-US" sz="4000" dirty="0"/>
+              <a:rPr lang="zh-CN" altLang="en-US" sz="4000" dirty="0">
+                <a:latin typeface="+mn-ea"/>
+              </a:rPr>
               <a:t>各领域全栈树知识笔记</a:t>
             </a:r>
-            <a:endParaRPr lang="en-US" altLang="zh-CN" sz="4000" dirty="0"/>
+            <a:endParaRPr lang="en-US" altLang="zh-CN" sz="4000" dirty="0">
+              <a:latin typeface="+mn-ea"/>
+            </a:endParaRPr>
           </a:p>
           <a:p>
             <a:pPr algn="r"/>
             <a:r>
-              <a:rPr lang="en-US" altLang="zh-CN" sz="4000" dirty="0"/>
+              <a:rPr lang="en-US" altLang="zh-CN" sz="4000" dirty="0">
+                <a:latin typeface="+mn-ea"/>
+              </a:rPr>
               <a:t>-</a:t>
             </a:r>
             <a:r>
-              <a:rPr lang="zh-CN" altLang="en-US" sz="3200" dirty="0"/>
+              <a:rPr lang="zh-CN" altLang="en-US" sz="3200" dirty="0">
+                <a:latin typeface="+mn-ea"/>
+              </a:rPr>
               <a:t>学习各领域知识的</a:t>
             </a:r>
             <a:r>
@@ -4127,6 +4264,7 @@
                 <a:solidFill>
                   <a:srgbClr val="FF0000"/>
                 </a:solidFill>
+                <a:latin typeface="+mn-ea"/>
               </a:rPr>
               <a:t>第</a:t>
             </a:r>
@@ -4135,6 +4273,7 @@
                 <a:solidFill>
                   <a:srgbClr val="FF0000"/>
                 </a:solidFill>
+                <a:latin typeface="+mn-ea"/>
               </a:rPr>
               <a:t>0</a:t>
             </a:r>
@@ -4143,14 +4282,19 @@
                 <a:solidFill>
                   <a:srgbClr val="FF0000"/>
                 </a:solidFill>
+                <a:latin typeface="+mn-ea"/>
               </a:rPr>
               <a:t>步</a:t>
             </a:r>
             <a:r>
-              <a:rPr lang="zh-CN" altLang="en-US" sz="3200" dirty="0"/>
+              <a:rPr lang="zh-CN" altLang="en-US" sz="3200" dirty="0">
+                <a:latin typeface="+mn-ea"/>
+              </a:rPr>
               <a:t>！</a:t>
             </a:r>
-            <a:endParaRPr lang="en-US" altLang="zh-CN" sz="4000" dirty="0"/>
+            <a:endParaRPr lang="en-US" altLang="zh-CN" sz="4000" dirty="0">
+              <a:latin typeface="+mn-ea"/>
+            </a:endParaRPr>
           </a:p>
         </p:txBody>
       </p:sp>
@@ -4183,68 +4327,102 @@
           <a:lstStyle/>
           <a:p>
             <a:r>
-              <a:rPr lang="en-US" altLang="zh-CN" dirty="0"/>
+              <a:rPr lang="en-US" altLang="zh-CN" dirty="0">
+                <a:latin typeface="+mn-ea"/>
+              </a:rPr>
               <a:t>1</a:t>
             </a:r>
             <a:r>
-              <a:rPr lang="zh-CN" altLang="en-US" dirty="0"/>
+              <a:rPr lang="zh-CN" altLang="en-US" dirty="0">
+                <a:latin typeface="+mn-ea"/>
+              </a:rPr>
               <a:t>）</a:t>
             </a:r>
             <a:r>
-              <a:rPr lang="en-US" altLang="zh-CN" dirty="0"/>
+              <a:rPr lang="en-US" altLang="zh-CN" dirty="0">
+                <a:latin typeface="+mn-ea"/>
+              </a:rPr>
               <a:t>Notion</a:t>
             </a:r>
             <a:r>
-              <a:rPr lang="zh-CN" altLang="en-US" dirty="0"/>
+              <a:rPr lang="zh-CN" altLang="en-US" dirty="0">
+                <a:latin typeface="+mn-ea"/>
+              </a:rPr>
               <a:t>和</a:t>
             </a:r>
             <a:r>
-              <a:rPr lang="en-US" altLang="zh-CN" dirty="0"/>
+              <a:rPr lang="en-US" altLang="zh-CN" dirty="0">
+                <a:latin typeface="+mn-ea"/>
+              </a:rPr>
               <a:t>OB</a:t>
             </a:r>
             <a:r>
-              <a:rPr lang="zh-CN" altLang="en-US" dirty="0"/>
+              <a:rPr lang="zh-CN" altLang="en-US" dirty="0">
+                <a:latin typeface="+mn-ea"/>
+              </a:rPr>
               <a:t>笔记</a:t>
             </a:r>
-            <a:endParaRPr lang="en-US" altLang="zh-CN" dirty="0"/>
-          </a:p>
-          <a:p>
-            <a:r>
-              <a:rPr lang="en-US" altLang="zh-CN" dirty="0"/>
+            <a:endParaRPr lang="en-US" altLang="zh-CN" dirty="0">
+              <a:latin typeface="+mn-ea"/>
+            </a:endParaRPr>
+          </a:p>
+          <a:p>
+            <a:r>
+              <a:rPr lang="en-US" altLang="zh-CN" dirty="0">
+                <a:latin typeface="+mn-ea"/>
+              </a:rPr>
               <a:t>2</a:t>
             </a:r>
             <a:r>
-              <a:rPr lang="zh-CN" altLang="en-US" dirty="0"/>
+              <a:rPr lang="zh-CN" altLang="en-US" dirty="0">
+                <a:latin typeface="+mn-ea"/>
+              </a:rPr>
               <a:t>）学习路径</a:t>
             </a:r>
-            <a:endParaRPr lang="en-US" altLang="zh-CN" dirty="0"/>
-          </a:p>
-          <a:p>
-            <a:r>
-              <a:rPr lang="en-US" altLang="zh-CN" dirty="0"/>
+            <a:endParaRPr lang="en-US" altLang="zh-CN" dirty="0">
+              <a:latin typeface="+mn-ea"/>
+            </a:endParaRPr>
+          </a:p>
+          <a:p>
+            <a:r>
+              <a:rPr lang="en-US" altLang="zh-CN" dirty="0">
+                <a:latin typeface="+mn-ea"/>
+              </a:rPr>
               <a:t>3</a:t>
             </a:r>
             <a:r>
-              <a:rPr lang="zh-CN" altLang="en-US" dirty="0"/>
+              <a:rPr lang="zh-CN" altLang="en-US" dirty="0">
+                <a:latin typeface="+mn-ea"/>
+              </a:rPr>
               <a:t>）测验题闪卡问答、双人问答播客视频</a:t>
             </a:r>
-            <a:endParaRPr lang="en-US" altLang="zh-CN" dirty="0"/>
-          </a:p>
-          <a:p>
-            <a:r>
-              <a:rPr lang="en-US" altLang="zh-CN" dirty="0"/>
+            <a:endParaRPr lang="en-US" altLang="zh-CN" dirty="0">
+              <a:latin typeface="+mn-ea"/>
+            </a:endParaRPr>
+          </a:p>
+          <a:p>
+            <a:r>
+              <a:rPr lang="en-US" altLang="zh-CN" dirty="0">
+                <a:latin typeface="+mn-ea"/>
+              </a:rPr>
               <a:t>4</a:t>
             </a:r>
             <a:r>
-              <a:rPr lang="zh-CN" altLang="en-US" dirty="0"/>
+              <a:rPr lang="zh-CN" altLang="en-US" dirty="0">
+                <a:latin typeface="+mn-ea"/>
+              </a:rPr>
               <a:t>）来源参考（</a:t>
             </a:r>
             <a:r>
-              <a:rPr lang="en-US" altLang="zh-CN" dirty="0" err="1"/>
+              <a:rPr lang="en-US" altLang="zh-CN" dirty="0" err="1">
+                <a:latin typeface="+mn-ea"/>
+              </a:rPr>
               <a:t>Youtube</a:t>
             </a:r>
             <a:r>
-              <a:rPr lang="zh-CN" altLang="en-US" dirty="0"/>
+              <a:rPr lang="zh-CN" altLang="en-US" dirty="0">
+                <a:latin typeface="+mn-ea"/>
+              </a:rPr>
               <a:t>索引推荐领域导航！）</a:t>
             </a:r>
           </a:p>
@@ -4279,33 +4457,49 @@
           <a:lstStyle/>
           <a:p>
             <a:r>
-              <a:rPr lang="en-US" altLang="zh-CN" dirty="0"/>
+              <a:rPr lang="en-US" altLang="zh-CN" dirty="0">
+                <a:latin typeface="+mn-ea"/>
+              </a:rPr>
               <a:t>- </a:t>
             </a:r>
             <a:r>
-              <a:rPr lang="zh-CN" altLang="en-US" dirty="0"/>
+              <a:rPr lang="zh-CN" altLang="en-US" dirty="0">
+                <a:latin typeface="+mn-ea"/>
+              </a:rPr>
               <a:t>制作简单、技术门槛要求低！</a:t>
             </a:r>
-            <a:endParaRPr lang="en-US" altLang="zh-CN" dirty="0"/>
-          </a:p>
-          <a:p>
-            <a:r>
-              <a:rPr lang="en-US" altLang="zh-CN" dirty="0"/>
+            <a:endParaRPr lang="en-US" altLang="zh-CN" dirty="0">
+              <a:latin typeface="+mn-ea"/>
+            </a:endParaRPr>
+          </a:p>
+          <a:p>
+            <a:r>
+              <a:rPr lang="en-US" altLang="zh-CN" dirty="0">
+                <a:latin typeface="+mn-ea"/>
+              </a:rPr>
               <a:t>- AI</a:t>
             </a:r>
             <a:r>
-              <a:rPr lang="zh-CN" altLang="en-US" dirty="0"/>
+              <a:rPr lang="zh-CN" altLang="en-US" dirty="0">
+                <a:latin typeface="+mn-ea"/>
+              </a:rPr>
               <a:t>自动化生成、不占用时间（副业赚钱！）</a:t>
             </a:r>
-            <a:endParaRPr lang="en-US" altLang="zh-CN" dirty="0"/>
-          </a:p>
-          <a:p>
-            <a:r>
-              <a:rPr lang="en-US" altLang="zh-CN" dirty="0"/>
+            <a:endParaRPr lang="en-US" altLang="zh-CN" dirty="0">
+              <a:latin typeface="+mn-ea"/>
+            </a:endParaRPr>
+          </a:p>
+          <a:p>
+            <a:r>
+              <a:rPr lang="en-US" altLang="zh-CN" dirty="0">
+                <a:latin typeface="+mn-ea"/>
+              </a:rPr>
               <a:t>- </a:t>
             </a:r>
             <a:r>
-              <a:rPr lang="zh-CN" altLang="en-US" dirty="0"/>
+              <a:rPr lang="zh-CN" altLang="en-US" dirty="0">
+                <a:latin typeface="+mn-ea"/>
+              </a:rPr>
               <a:t>自己顺便扩展了各个领域知识面！</a:t>
             </a:r>
           </a:p>
@@ -4344,10 +4538,14 @@
               <a:buChar char="•"/>
             </a:pPr>
             <a:r>
-              <a:rPr lang="zh-CN" altLang="en-US" dirty="0"/>
+              <a:rPr lang="zh-CN" altLang="en-US" dirty="0">
+                <a:latin typeface="+mn-ea"/>
+              </a:rPr>
               <a:t>赚人气：参考视频的评论中回复引流</a:t>
             </a:r>
-            <a:endParaRPr lang="en-US" altLang="zh-CN" dirty="0"/>
+            <a:endParaRPr lang="en-US" altLang="zh-CN" dirty="0">
+              <a:latin typeface="+mn-ea"/>
+            </a:endParaRPr>
           </a:p>
           <a:p>
             <a:pPr marL="285750" indent="-285750">
@@ -4355,23 +4553,33 @@
               <a:buChar char="•"/>
             </a:pPr>
             <a:r>
-              <a:rPr lang="zh-CN" altLang="en-US" dirty="0"/>
+              <a:rPr lang="zh-CN" altLang="en-US" dirty="0">
+                <a:latin typeface="+mn-ea"/>
+              </a:rPr>
               <a:t>赚</a:t>
             </a:r>
             <a:r>
-              <a:rPr lang="en-US" altLang="zh-CN" dirty="0"/>
+              <a:rPr lang="en-US" altLang="zh-CN" dirty="0">
+                <a:latin typeface="+mn-ea"/>
+              </a:rPr>
               <a:t>$$$</a:t>
             </a:r>
             <a:r>
-              <a:rPr lang="zh-CN" altLang="en-US" dirty="0"/>
+              <a:rPr lang="zh-CN" altLang="en-US" dirty="0">
+                <a:latin typeface="+mn-ea"/>
+              </a:rPr>
               <a:t>：卖</a:t>
             </a:r>
             <a:r>
-              <a:rPr lang="en-US" altLang="zh-CN" dirty="0"/>
+              <a:rPr lang="en-US" altLang="zh-CN" dirty="0">
+                <a:latin typeface="+mn-ea"/>
+              </a:rPr>
               <a:t>OB</a:t>
             </a:r>
             <a:r>
-              <a:rPr lang="zh-CN" altLang="en-US" dirty="0"/>
+              <a:rPr lang="zh-CN" altLang="en-US" dirty="0">
+                <a:latin typeface="+mn-ea"/>
+              </a:rPr>
               <a:t>全栈树</a:t>
             </a:r>
             <a:r>
@@ -4379,11 +4587,14 @@
                 <a:solidFill>
                   <a:srgbClr val="FF0000"/>
                 </a:solidFill>
+                <a:latin typeface="+mn-ea"/>
               </a:rPr>
               <a:t>笔记</a:t>
             </a:r>
             <a:r>
-              <a:rPr lang="zh-CN" altLang="en-US" dirty="0"/>
+              <a:rPr lang="zh-CN" altLang="en-US" dirty="0">
+                <a:latin typeface="+mn-ea"/>
+              </a:rPr>
               <a:t>！！！会员费！广告位</a:t>
             </a:r>
           </a:p>
@@ -4448,18 +4659,30 @@
           <a:lstStyle/>
           <a:p>
             <a:r>
-              <a:rPr lang="en-US" altLang="zh-CN" sz="12000" b="1" dirty="0"/>
+              <a:rPr lang="en-US" altLang="zh-CN" sz="12000" b="1" dirty="0">
+                <a:latin typeface="+mn-ea"/>
+                <a:ea typeface="+mn-ea"/>
+              </a:rPr>
               <a:t>$ </a:t>
             </a:r>
             <a:r>
-              <a:rPr lang="zh-CN" altLang="en-US" sz="12000" b="1" dirty="0"/>
+              <a:rPr lang="zh-CN" altLang="en-US" sz="12000" b="1" dirty="0">
+                <a:latin typeface="+mn-ea"/>
+                <a:ea typeface="+mn-ea"/>
+              </a:rPr>
               <a:t>电子书 </a:t>
             </a:r>
             <a:r>
-              <a:rPr lang="en-US" altLang="zh-CN" sz="12000" b="1" dirty="0"/>
+              <a:rPr lang="en-US" altLang="zh-CN" sz="12000" b="1" dirty="0">
+                <a:latin typeface="+mn-ea"/>
+                <a:ea typeface="+mn-ea"/>
+              </a:rPr>
               <a:t>$</a:t>
             </a:r>
-            <a:endParaRPr lang="zh-CN" altLang="en-US" sz="12000" b="1" dirty="0"/>
+            <a:endParaRPr lang="zh-CN" altLang="en-US" sz="12000" b="1" dirty="0">
+              <a:latin typeface="+mn-ea"/>
+              <a:ea typeface="+mn-ea"/>
+            </a:endParaRPr>
           </a:p>
         </p:txBody>
       </p:sp>
@@ -4522,18 +4745,30 @@
           <a:lstStyle/>
           <a:p>
             <a:r>
-              <a:rPr lang="en-US" altLang="zh-CN" sz="12000" b="1" dirty="0"/>
+              <a:rPr lang="en-US" altLang="zh-CN" sz="12000" b="1" dirty="0">
+                <a:latin typeface="+mn-ea"/>
+                <a:ea typeface="+mn-ea"/>
+              </a:rPr>
               <a:t>$ </a:t>
             </a:r>
             <a:r>
-              <a:rPr lang="zh-CN" altLang="en-US" sz="12000" b="1" dirty="0"/>
+              <a:rPr lang="zh-CN" altLang="en-US" sz="12000" b="1" dirty="0">
+                <a:latin typeface="+mn-ea"/>
+                <a:ea typeface="+mn-ea"/>
+              </a:rPr>
               <a:t>课程 </a:t>
             </a:r>
             <a:r>
-              <a:rPr lang="en-US" altLang="zh-CN" sz="12000" b="1" dirty="0"/>
+              <a:rPr lang="en-US" altLang="zh-CN" sz="12000" b="1" dirty="0">
+                <a:latin typeface="+mn-ea"/>
+                <a:ea typeface="+mn-ea"/>
+              </a:rPr>
               <a:t>$</a:t>
             </a:r>
-            <a:endParaRPr lang="zh-CN" altLang="en-US" sz="12000" b="1" dirty="0"/>
+            <a:endParaRPr lang="zh-CN" altLang="en-US" sz="12000" b="1" dirty="0">
+              <a:latin typeface="+mn-ea"/>
+              <a:ea typeface="+mn-ea"/>
+            </a:endParaRPr>
           </a:p>
         </p:txBody>
       </p:sp>
@@ -4591,17 +4826,29 @@
         </p:spPr>
         <p:txBody>
           <a:bodyPr anchor="ctr">
-            <a:normAutofit/>
+            <a:normAutofit fontScale="90000"/>
           </a:bodyPr>
           <a:lstStyle/>
           <a:p>
             <a:r>
-              <a:rPr lang="en-US" altLang="zh-CN" sz="12000" b="1" dirty="0"/>
-              <a:t>in4tree</a:t>
-            </a:r>
-            <a:r>
-              <a:rPr lang="zh-CN" altLang="en-US" sz="12000" b="1" dirty="0"/>
-              <a:t>信息树</a:t>
+              <a:rPr lang="en-US" altLang="zh-CN" sz="12000" b="1" dirty="0">
+                <a:latin typeface="+mn-ea"/>
+                <a:ea typeface="+mn-ea"/>
+              </a:rPr>
+              <a:t>In4tree</a:t>
+            </a:r>
+            <a:br>
+              <a:rPr lang="en-US" altLang="zh-CN" sz="12000" b="1" dirty="0">
+                <a:latin typeface="+mn-ea"/>
+                <a:ea typeface="+mn-ea"/>
+              </a:rPr>
+            </a:br>
+            <a:r>
+              <a:rPr lang="zh-CN" altLang="en-US" sz="12000" b="1" dirty="0">
+                <a:latin typeface="+mn-ea"/>
+                <a:ea typeface="+mn-ea"/>
+              </a:rPr>
+              <a:t>（信息树）</a:t>
             </a:r>
           </a:p>
         </p:txBody>
@@ -4665,21 +4912,36 @@
           <a:lstStyle/>
           <a:p>
             <a:r>
-              <a:rPr lang="en-US" altLang="zh-CN" sz="12000" b="1" dirty="0" err="1"/>
+              <a:rPr lang="en-US" altLang="zh-CN" sz="12000" b="1" dirty="0" err="1">
+                <a:latin typeface="+mn-ea"/>
+                <a:ea typeface="+mn-ea"/>
+              </a:rPr>
               <a:t>Youtube</a:t>
             </a:r>
             <a:r>
-              <a:rPr lang="en-US" altLang="zh-CN" sz="12000" b="1" dirty="0"/>
+              <a:rPr lang="en-US" altLang="zh-CN" sz="12000" b="1" dirty="0">
+                <a:latin typeface="+mn-ea"/>
+                <a:ea typeface="+mn-ea"/>
+              </a:rPr>
               <a:t> #0</a:t>
             </a:r>
             <a:br>
-              <a:rPr lang="en-US" altLang="zh-CN" sz="12000" b="1" dirty="0"/>
+              <a:rPr lang="en-US" altLang="zh-CN" sz="12000" b="1" dirty="0">
+                <a:latin typeface="+mn-ea"/>
+                <a:ea typeface="+mn-ea"/>
+              </a:rPr>
             </a:br>
             <a:r>
-              <a:rPr lang="en-US" altLang="zh-CN" sz="12000" b="1" dirty="0"/>
+              <a:rPr lang="en-US" altLang="zh-CN" sz="12000" b="1" dirty="0">
+                <a:latin typeface="+mn-ea"/>
+                <a:ea typeface="+mn-ea"/>
+              </a:rPr>
               <a:t>OPC</a:t>
             </a:r>
-            <a:endParaRPr lang="zh-CN" altLang="en-US" sz="12000" b="1" dirty="0"/>
+            <a:endParaRPr lang="zh-CN" altLang="en-US" sz="12000" b="1" dirty="0">
+              <a:latin typeface="+mn-ea"/>
+              <a:ea typeface="+mn-ea"/>
+            </a:endParaRPr>
           </a:p>
         </p:txBody>
       </p:sp>
@@ -4742,21 +5004,36 @@
           <a:lstStyle/>
           <a:p>
             <a:r>
-              <a:rPr lang="en-US" altLang="zh-CN" sz="12000" b="1" dirty="0" err="1"/>
+              <a:rPr lang="en-US" altLang="zh-CN" sz="12000" b="1" dirty="0" err="1">
+                <a:latin typeface="+mn-ea"/>
+                <a:ea typeface="+mn-ea"/>
+              </a:rPr>
               <a:t>Youtube</a:t>
             </a:r>
             <a:r>
-              <a:rPr lang="en-US" altLang="zh-CN" sz="12000" b="1" dirty="0"/>
+              <a:rPr lang="en-US" altLang="zh-CN" sz="12000" b="1" dirty="0">
+                <a:latin typeface="+mn-ea"/>
+                <a:ea typeface="+mn-ea"/>
+              </a:rPr>
               <a:t> #1</a:t>
             </a:r>
             <a:br>
-              <a:rPr lang="en-US" altLang="zh-CN" sz="12000" b="1" dirty="0"/>
+              <a:rPr lang="en-US" altLang="zh-CN" sz="12000" b="1" dirty="0">
+                <a:latin typeface="+mn-ea"/>
+                <a:ea typeface="+mn-ea"/>
+              </a:rPr>
             </a:br>
             <a:r>
-              <a:rPr lang="en-US" altLang="zh-CN" sz="12000" b="1" dirty="0"/>
+              <a:rPr lang="en-US" altLang="zh-CN" sz="12000" b="1" dirty="0">
+                <a:latin typeface="+mn-ea"/>
+                <a:ea typeface="+mn-ea"/>
+              </a:rPr>
               <a:t>FAST</a:t>
             </a:r>
-            <a:endParaRPr lang="zh-CN" altLang="en-US" sz="12000" b="1" dirty="0"/>
+            <a:endParaRPr lang="zh-CN" altLang="en-US" sz="12000" b="1" dirty="0">
+              <a:latin typeface="+mn-ea"/>
+              <a:ea typeface="+mn-ea"/>
+            </a:endParaRPr>
           </a:p>
         </p:txBody>
       </p:sp>
@@ -4808,7 +5085,7 @@
         </p:nvSpPr>
         <p:spPr>
           <a:xfrm>
-            <a:off x="1213164" y="2261607"/>
+            <a:off x="1213164" y="3510122"/>
             <a:ext cx="10251541" cy="2387600"/>
           </a:xfrm>
         </p:spPr>
@@ -4819,15 +5096,24 @@
           <a:lstStyle/>
           <a:p>
             <a:r>
-              <a:rPr lang="zh-CN" altLang="en-US" dirty="0"/>
+              <a:rPr lang="zh-CN" altLang="en-US" dirty="0">
+                <a:latin typeface="+mn-ea"/>
+                <a:ea typeface="+mn-ea"/>
+              </a:rPr>
               <a:t>第二大脑 增强版（</a:t>
             </a:r>
             <a:r>
-              <a:rPr lang="en-US" altLang="zh-CN" dirty="0"/>
+              <a:rPr lang="en-US" altLang="zh-CN" dirty="0">
+                <a:latin typeface="+mn-ea"/>
+                <a:ea typeface="+mn-ea"/>
+              </a:rPr>
               <a:t>CODE PRO</a:t>
             </a:r>
             <a:r>
-              <a:rPr lang="zh-CN" altLang="en-US" dirty="0"/>
+              <a:rPr lang="zh-CN" altLang="en-US" dirty="0">
+                <a:latin typeface="+mn-ea"/>
+                <a:ea typeface="+mn-ea"/>
+              </a:rPr>
               <a:t>）</a:t>
             </a:r>
           </a:p>
@@ -4851,7 +5137,7 @@
         </p:nvSpPr>
         <p:spPr>
           <a:xfrm>
-            <a:off x="1524000" y="4253888"/>
+            <a:off x="1523999" y="5237211"/>
             <a:ext cx="9144000" cy="1655762"/>
           </a:xfrm>
         </p:spPr>
@@ -4862,7 +5148,9 @@
           <a:lstStyle/>
           <a:p>
             <a:r>
-              <a:rPr lang="zh-CN" altLang="en-US" sz="6000" dirty="0"/>
+              <a:rPr lang="zh-CN" altLang="en-US" sz="6000" dirty="0">
+                <a:latin typeface="+mn-ea"/>
+              </a:rPr>
               <a:t>（搜 </a:t>
             </a:r>
             <a:r>
@@ -4870,11 +5158,14 @@
                 <a:solidFill>
                   <a:srgbClr val="FFC000"/>
                 </a:solidFill>
+                <a:latin typeface="+mn-ea"/>
               </a:rPr>
               <a:t>学</a:t>
             </a:r>
             <a:r>
-              <a:rPr lang="zh-CN" altLang="en-US" sz="6000" dirty="0"/>
+              <a:rPr lang="zh-CN" altLang="en-US" sz="6000" dirty="0">
+                <a:latin typeface="+mn-ea"/>
+              </a:rPr>
               <a:t> </a:t>
             </a:r>
             <a:r>
@@ -4882,11 +5173,14 @@
                 <a:solidFill>
                   <a:srgbClr val="FF0000"/>
                 </a:solidFill>
+                <a:latin typeface="+mn-ea"/>
               </a:rPr>
               <a:t>思</a:t>
             </a:r>
             <a:r>
-              <a:rPr lang="zh-CN" altLang="en-US" sz="6000" dirty="0"/>
+              <a:rPr lang="zh-CN" altLang="en-US" sz="6000" dirty="0">
+                <a:latin typeface="+mn-ea"/>
+              </a:rPr>
               <a:t> </a:t>
             </a:r>
             <a:r>
@@ -4894,11 +5188,14 @@
                 <a:solidFill>
                   <a:srgbClr val="00B050"/>
                 </a:solidFill>
+                <a:latin typeface="+mn-ea"/>
               </a:rPr>
               <a:t>教</a:t>
             </a:r>
             <a:r>
-              <a:rPr lang="zh-CN" altLang="en-US" sz="6000" dirty="0"/>
+              <a:rPr lang="zh-CN" altLang="en-US" sz="6000" dirty="0">
+                <a:latin typeface="+mn-ea"/>
+              </a:rPr>
               <a:t> 练 习 熟）</a:t>
             </a:r>
           </a:p>
@@ -4920,7 +5217,7 @@
         </p:nvSpPr>
         <p:spPr>
           <a:xfrm>
-            <a:off x="1213164" y="470514"/>
+            <a:off x="1213164" y="155137"/>
             <a:ext cx="9144000" cy="2387600"/>
           </a:xfrm>
           <a:prstGeom prst="rect">
@@ -4952,9 +5249,73 @@
           </a:lstStyle>
           <a:p>
             <a:r>
-              <a:rPr lang="zh-CN" altLang="en-US" sz="12000" b="1" dirty="0"/>
+              <a:rPr lang="zh-CN" altLang="en-US" sz="12000" b="1" dirty="0">
+                <a:latin typeface="+mn-ea"/>
+                <a:ea typeface="+mn-ea"/>
+              </a:rPr>
               <a:t>学</a:t>
             </a:r>
+          </a:p>
+        </p:txBody>
+      </p:sp>
+      <p:sp>
+        <p:nvSpPr>
+          <p:cNvPr id="5" name="Title 1">
+            <a:extLst>
+              <a:ext uri="{FF2B5EF4-FFF2-40B4-BE49-F238E27FC236}">
+                <a16:creationId xmlns:a16="http://schemas.microsoft.com/office/drawing/2014/main" id="{37D5FD84-F09B-66BF-6CDB-405205EED018}"/>
+              </a:ext>
+            </a:extLst>
+          </p:cNvPr>
+          <p:cNvSpPr txBox="1">
+            <a:spLocks/>
+          </p:cNvSpPr>
+          <p:nvPr/>
+        </p:nvSpPr>
+        <p:spPr>
+          <a:xfrm>
+            <a:off x="446636" y="1783032"/>
+            <a:ext cx="11298725" cy="2387600"/>
+          </a:xfrm>
+          <a:prstGeom prst="rect">
+            <a:avLst/>
+          </a:prstGeom>
+        </p:spPr>
+        <p:txBody>
+          <a:bodyPr vert="horz" lIns="91440" tIns="45720" rIns="91440" bIns="45720" rtlCol="0" anchor="ctr">
+            <a:normAutofit/>
+          </a:bodyPr>
+          <a:lstStyle>
+            <a:lvl1pPr algn="ctr" defTabSz="914400" rtl="0" eaLnBrk="1" latinLnBrk="0" hangingPunct="1">
+              <a:lnSpc>
+                <a:spcPct val="90000"/>
+              </a:lnSpc>
+              <a:spcBef>
+                <a:spcPct val="0"/>
+              </a:spcBef>
+              <a:buNone/>
+              <a:defRPr sz="6000" kern="1200">
+                <a:solidFill>
+                  <a:schemeClr val="tx1"/>
+                </a:solidFill>
+                <a:latin typeface="+mj-lt"/>
+                <a:ea typeface="+mj-ea"/>
+                <a:cs typeface="+mj-cs"/>
+              </a:defRPr>
+            </a:lvl1pPr>
+          </a:lstStyle>
+          <a:p>
+            <a:r>
+              <a:rPr lang="en-US" altLang="zh-CN" sz="7200" b="1" dirty="0">
+                <a:latin typeface="+mn-ea"/>
+                <a:ea typeface="+mn-ea"/>
+              </a:rPr>
+              <a:t>FAST  Learning &amp; Thinking</a:t>
+            </a:r>
+            <a:endParaRPr lang="zh-CN" altLang="en-US" sz="7200" b="1" dirty="0">
+              <a:latin typeface="+mn-ea"/>
+              <a:ea typeface="+mn-ea"/>
+            </a:endParaRPr>
           </a:p>
         </p:txBody>
       </p:sp>
@@ -4962,6 +5323,1115 @@
     <p:extLst>
       <p:ext uri="{BB962C8B-B14F-4D97-AF65-F5344CB8AC3E}">
         <p14:creationId xmlns:p14="http://schemas.microsoft.com/office/powerpoint/2010/main" val="644360334"/>
+      </p:ext>
+    </p:extLst>
+  </p:cSld>
+  <p:clrMapOvr>
+    <a:masterClrMapping/>
+  </p:clrMapOvr>
+</p:sld>
+</file>
+
+<file path=ppt/slides/slide20.xml><?xml version="1.0" encoding="utf-8"?>
+<p:sld xmlns:a="http://schemas.openxmlformats.org/drawingml/2006/main" xmlns:r="http://schemas.openxmlformats.org/officeDocument/2006/relationships" xmlns:p="http://schemas.openxmlformats.org/presentationml/2006/main">
+  <p:cSld>
+    <p:spTree>
+      <p:nvGrpSpPr>
+        <p:cNvPr id="1" name=""/>
+        <p:cNvGrpSpPr/>
+        <p:nvPr/>
+      </p:nvGrpSpPr>
+      <p:grpSpPr>
+        <a:xfrm>
+          <a:off x="0" y="0"/>
+          <a:ext cx="0" cy="0"/>
+          <a:chOff x="0" y="0"/>
+          <a:chExt cx="0" cy="0"/>
+        </a:xfrm>
+      </p:grpSpPr>
+      <p:sp>
+        <p:nvSpPr>
+          <p:cNvPr id="2" name="Title 1">
+            <a:extLst>
+              <a:ext uri="{FF2B5EF4-FFF2-40B4-BE49-F238E27FC236}">
+                <a16:creationId xmlns:a16="http://schemas.microsoft.com/office/drawing/2014/main" id="{FAD6AE50-F6C3-190C-104C-A886A623FC96}"/>
+              </a:ext>
+            </a:extLst>
+          </p:cNvPr>
+          <p:cNvSpPr>
+            <a:spLocks noGrp="1"/>
+          </p:cNvSpPr>
+          <p:nvPr>
+            <p:ph type="ctrTitle"/>
+          </p:nvPr>
+        </p:nvSpPr>
+        <p:spPr>
+          <a:xfrm>
+            <a:off x="401370" y="551994"/>
+            <a:ext cx="11389259" cy="2387600"/>
+          </a:xfrm>
+        </p:spPr>
+        <p:txBody>
+          <a:bodyPr anchor="ctr">
+            <a:normAutofit/>
+          </a:bodyPr>
+          <a:lstStyle/>
+          <a:p>
+            <a:r>
+              <a:rPr lang="zh-CN" altLang="en-US" sz="8000" b="1" dirty="0">
+                <a:latin typeface="+mn-ea"/>
+                <a:ea typeface="+mn-ea"/>
+              </a:rPr>
+              <a:t>知识库</a:t>
+            </a:r>
+            <a:r>
+              <a:rPr lang="en-US" altLang="zh-CN" sz="8000" b="1" dirty="0">
+                <a:latin typeface="+mn-ea"/>
+                <a:ea typeface="+mn-ea"/>
+              </a:rPr>
+              <a:t>RAG</a:t>
+            </a:r>
+            <a:r>
+              <a:rPr lang="zh-CN" altLang="en-US" sz="8000" b="1" dirty="0">
+                <a:latin typeface="+mn-ea"/>
+                <a:ea typeface="+mn-ea"/>
+              </a:rPr>
+              <a:t>（手臂！）</a:t>
+            </a:r>
+          </a:p>
+        </p:txBody>
+      </p:sp>
+      <p:sp>
+        <p:nvSpPr>
+          <p:cNvPr id="3" name="TextBox 2">
+            <a:extLst>
+              <a:ext uri="{FF2B5EF4-FFF2-40B4-BE49-F238E27FC236}">
+                <a16:creationId xmlns:a16="http://schemas.microsoft.com/office/drawing/2014/main" id="{09FA8A49-8178-6CDF-61E6-C6D5B0D00BDD}"/>
+              </a:ext>
+            </a:extLst>
+          </p:cNvPr>
+          <p:cNvSpPr txBox="1"/>
+          <p:nvPr/>
+        </p:nvSpPr>
+        <p:spPr>
+          <a:xfrm>
+            <a:off x="3310621" y="2939594"/>
+            <a:ext cx="5570756" cy="2862322"/>
+          </a:xfrm>
+          <a:prstGeom prst="rect">
+            <a:avLst/>
+          </a:prstGeom>
+          <a:noFill/>
+        </p:spPr>
+        <p:txBody>
+          <a:bodyPr wrap="none" rtlCol="0">
+            <a:spAutoFit/>
+          </a:bodyPr>
+          <a:lstStyle/>
+          <a:p>
+            <a:r>
+              <a:rPr lang="zh-CN" altLang="en-US" sz="6000" b="1" dirty="0"/>
+              <a:t>数据收集、清洗</a:t>
+            </a:r>
+            <a:endParaRPr lang="en-US" altLang="zh-CN" sz="6000" b="1" dirty="0"/>
+          </a:p>
+          <a:p>
+            <a:endParaRPr lang="en-US" altLang="zh-CN" sz="6000" b="1" dirty="0"/>
+          </a:p>
+          <a:p>
+            <a:r>
+              <a:rPr lang="zh-CN" altLang="en-US" sz="6000" b="1" dirty="0"/>
+              <a:t>向量数据库</a:t>
+            </a:r>
+            <a:endParaRPr lang="zh-CN" altLang="en-US" sz="6000" dirty="0"/>
+          </a:p>
+        </p:txBody>
+      </p:sp>
+    </p:spTree>
+    <p:extLst>
+      <p:ext uri="{BB962C8B-B14F-4D97-AF65-F5344CB8AC3E}">
+        <p14:creationId xmlns:p14="http://schemas.microsoft.com/office/powerpoint/2010/main" val="1875819306"/>
+      </p:ext>
+    </p:extLst>
+  </p:cSld>
+  <p:clrMapOvr>
+    <a:masterClrMapping/>
+  </p:clrMapOvr>
+</p:sld>
+</file>
+
+<file path=ppt/slides/slide21.xml><?xml version="1.0" encoding="utf-8"?>
+<p:sld xmlns:a="http://schemas.openxmlformats.org/drawingml/2006/main" xmlns:r="http://schemas.openxmlformats.org/officeDocument/2006/relationships" xmlns:p="http://schemas.openxmlformats.org/presentationml/2006/main">
+  <p:cSld>
+    <p:spTree>
+      <p:nvGrpSpPr>
+        <p:cNvPr id="1" name=""/>
+        <p:cNvGrpSpPr/>
+        <p:nvPr/>
+      </p:nvGrpSpPr>
+      <p:grpSpPr>
+        <a:xfrm>
+          <a:off x="0" y="0"/>
+          <a:ext cx="0" cy="0"/>
+          <a:chOff x="0" y="0"/>
+          <a:chExt cx="0" cy="0"/>
+        </a:xfrm>
+      </p:grpSpPr>
+      <p:sp>
+        <p:nvSpPr>
+          <p:cNvPr id="2" name="Title 1">
+            <a:extLst>
+              <a:ext uri="{FF2B5EF4-FFF2-40B4-BE49-F238E27FC236}">
+                <a16:creationId xmlns:a16="http://schemas.microsoft.com/office/drawing/2014/main" id="{FAD6AE50-F6C3-190C-104C-A886A623FC96}"/>
+              </a:ext>
+            </a:extLst>
+          </p:cNvPr>
+          <p:cNvSpPr>
+            <a:spLocks noGrp="1"/>
+          </p:cNvSpPr>
+          <p:nvPr>
+            <p:ph type="ctrTitle"/>
+          </p:nvPr>
+        </p:nvSpPr>
+        <p:spPr>
+          <a:xfrm>
+            <a:off x="401370" y="551994"/>
+            <a:ext cx="11389259" cy="2387600"/>
+          </a:xfrm>
+        </p:spPr>
+        <p:txBody>
+          <a:bodyPr anchor="ctr">
+            <a:normAutofit/>
+          </a:bodyPr>
+          <a:lstStyle/>
+          <a:p>
+            <a:r>
+              <a:rPr lang="en-US" altLang="zh-CN" sz="8000" b="1" dirty="0">
+                <a:latin typeface="+mn-ea"/>
+                <a:ea typeface="+mn-ea"/>
+              </a:rPr>
+              <a:t>n8n</a:t>
+            </a:r>
+            <a:r>
+              <a:rPr lang="zh-CN" altLang="en-US" sz="8000" b="1" dirty="0">
+                <a:latin typeface="+mn-ea"/>
+                <a:ea typeface="+mn-ea"/>
+              </a:rPr>
+              <a:t>：誊抄笔记</a:t>
+            </a:r>
+          </a:p>
+        </p:txBody>
+      </p:sp>
+      <p:sp>
+        <p:nvSpPr>
+          <p:cNvPr id="3" name="TextBox 2">
+            <a:extLst>
+              <a:ext uri="{FF2B5EF4-FFF2-40B4-BE49-F238E27FC236}">
+                <a16:creationId xmlns:a16="http://schemas.microsoft.com/office/drawing/2014/main" id="{09FA8A49-8178-6CDF-61E6-C6D5B0D00BDD}"/>
+              </a:ext>
+            </a:extLst>
+          </p:cNvPr>
+          <p:cNvSpPr txBox="1"/>
+          <p:nvPr/>
+        </p:nvSpPr>
+        <p:spPr>
+          <a:xfrm>
+            <a:off x="1002296" y="2431762"/>
+            <a:ext cx="10187404" cy="1015663"/>
+          </a:xfrm>
+          <a:prstGeom prst="rect">
+            <a:avLst/>
+          </a:prstGeom>
+          <a:noFill/>
+        </p:spPr>
+        <p:txBody>
+          <a:bodyPr wrap="none" rtlCol="0">
+            <a:spAutoFit/>
+          </a:bodyPr>
+          <a:lstStyle/>
+          <a:p>
+            <a:r>
+              <a:rPr lang="zh-CN" altLang="en-US" sz="6000" b="1" dirty="0">
+                <a:latin typeface="+mn-ea"/>
+              </a:rPr>
+              <a:t>清洗、结构化：原始杂乱文本</a:t>
+            </a:r>
+            <a:endParaRPr lang="zh-CN" altLang="en-US" sz="6000" dirty="0">
+              <a:latin typeface="+mn-ea"/>
+            </a:endParaRPr>
+          </a:p>
+        </p:txBody>
+      </p:sp>
+      <p:sp>
+        <p:nvSpPr>
+          <p:cNvPr id="4" name="TextBox 3">
+            <a:extLst>
+              <a:ext uri="{FF2B5EF4-FFF2-40B4-BE49-F238E27FC236}">
+                <a16:creationId xmlns:a16="http://schemas.microsoft.com/office/drawing/2014/main" id="{E19A6725-09EF-EA1B-32F1-707DE155238F}"/>
+              </a:ext>
+            </a:extLst>
+          </p:cNvPr>
+          <p:cNvSpPr txBox="1"/>
+          <p:nvPr/>
+        </p:nvSpPr>
+        <p:spPr>
+          <a:xfrm>
+            <a:off x="3438861" y="3720689"/>
+            <a:ext cx="5314275" cy="2554545"/>
+          </a:xfrm>
+          <a:prstGeom prst="rect">
+            <a:avLst/>
+          </a:prstGeom>
+          <a:noFill/>
+        </p:spPr>
+        <p:txBody>
+          <a:bodyPr wrap="none" rtlCol="0">
+            <a:spAutoFit/>
+          </a:bodyPr>
+          <a:lstStyle/>
+          <a:p>
+            <a:r>
+              <a:rPr lang="zh-CN" altLang="en-US" sz="4000" b="1" dirty="0">
+                <a:latin typeface="+mn-ea"/>
+              </a:rPr>
+              <a:t>网页</a:t>
+            </a:r>
+            <a:r>
+              <a:rPr lang="en-US" altLang="zh-CN" sz="4000" b="1" dirty="0">
+                <a:latin typeface="+mn-ea"/>
+              </a:rPr>
+              <a:t>URL》</a:t>
+            </a:r>
+            <a:r>
+              <a:rPr lang="zh-CN" altLang="en-US" sz="4000" b="1" dirty="0">
+                <a:latin typeface="+mn-ea"/>
+              </a:rPr>
+              <a:t>提取文本</a:t>
+            </a:r>
+            <a:endParaRPr lang="en-US" altLang="zh-CN" sz="4000" b="1" dirty="0">
+              <a:latin typeface="+mn-ea"/>
+            </a:endParaRPr>
+          </a:p>
+          <a:p>
+            <a:r>
+              <a:rPr lang="zh-CN" altLang="en-US" sz="4000" b="1" dirty="0">
+                <a:latin typeface="+mn-ea"/>
+              </a:rPr>
+              <a:t>视频</a:t>
+            </a:r>
+            <a:r>
+              <a:rPr lang="en-US" altLang="zh-CN" sz="4000" b="1" dirty="0">
+                <a:latin typeface="+mn-ea"/>
+              </a:rPr>
+              <a:t>URL》</a:t>
+            </a:r>
+            <a:r>
+              <a:rPr lang="zh-CN" altLang="en-US" sz="4000" b="1" dirty="0">
+                <a:latin typeface="+mn-ea"/>
+              </a:rPr>
+              <a:t>提取字幕</a:t>
+            </a:r>
+            <a:endParaRPr lang="en-US" altLang="zh-CN" sz="4000" b="1" dirty="0">
+              <a:latin typeface="+mn-ea"/>
+            </a:endParaRPr>
+          </a:p>
+          <a:p>
+            <a:r>
+              <a:rPr lang="zh-CN" altLang="en-US" sz="4000" b="1" dirty="0">
+                <a:latin typeface="+mn-ea"/>
+              </a:rPr>
+              <a:t>视频、音频</a:t>
+            </a:r>
+            <a:r>
+              <a:rPr lang="en-US" altLang="zh-CN" sz="4000" b="1" dirty="0">
+                <a:latin typeface="+mn-ea"/>
+              </a:rPr>
+              <a:t>》</a:t>
+            </a:r>
+            <a:r>
+              <a:rPr lang="zh-CN" altLang="en-US" sz="4000" b="1" dirty="0">
+                <a:latin typeface="+mn-ea"/>
+              </a:rPr>
+              <a:t>提取字幕</a:t>
+            </a:r>
+            <a:endParaRPr lang="en-US" altLang="zh-CN" sz="4000" b="1" dirty="0">
+              <a:latin typeface="+mn-ea"/>
+            </a:endParaRPr>
+          </a:p>
+          <a:p>
+            <a:r>
+              <a:rPr lang="zh-CN" altLang="en-US" sz="4000" b="1" dirty="0">
+                <a:latin typeface="+mn-ea"/>
+              </a:rPr>
+              <a:t>。。。</a:t>
+            </a:r>
+            <a:endParaRPr lang="zh-CN" altLang="en-US" sz="4000" dirty="0">
+              <a:latin typeface="+mn-ea"/>
+            </a:endParaRPr>
+          </a:p>
+        </p:txBody>
+      </p:sp>
+    </p:spTree>
+    <p:extLst>
+      <p:ext uri="{BB962C8B-B14F-4D97-AF65-F5344CB8AC3E}">
+        <p14:creationId xmlns:p14="http://schemas.microsoft.com/office/powerpoint/2010/main" val="3550286162"/>
+      </p:ext>
+    </p:extLst>
+  </p:cSld>
+  <p:clrMapOvr>
+    <a:masterClrMapping/>
+  </p:clrMapOvr>
+</p:sld>
+</file>
+
+<file path=ppt/slides/slide22.xml><?xml version="1.0" encoding="utf-8"?>
+<p:sld xmlns:a="http://schemas.openxmlformats.org/drawingml/2006/main" xmlns:r="http://schemas.openxmlformats.org/officeDocument/2006/relationships" xmlns:p="http://schemas.openxmlformats.org/presentationml/2006/main">
+  <p:cSld>
+    <p:spTree>
+      <p:nvGrpSpPr>
+        <p:cNvPr id="1" name=""/>
+        <p:cNvGrpSpPr/>
+        <p:nvPr/>
+      </p:nvGrpSpPr>
+      <p:grpSpPr>
+        <a:xfrm>
+          <a:off x="0" y="0"/>
+          <a:ext cx="0" cy="0"/>
+          <a:chOff x="0" y="0"/>
+          <a:chExt cx="0" cy="0"/>
+        </a:xfrm>
+      </p:grpSpPr>
+      <p:sp>
+        <p:nvSpPr>
+          <p:cNvPr id="2" name="Title 1">
+            <a:extLst>
+              <a:ext uri="{FF2B5EF4-FFF2-40B4-BE49-F238E27FC236}">
+                <a16:creationId xmlns:a16="http://schemas.microsoft.com/office/drawing/2014/main" id="{FAD6AE50-F6C3-190C-104C-A886A623FC96}"/>
+              </a:ext>
+            </a:extLst>
+          </p:cNvPr>
+          <p:cNvSpPr>
+            <a:spLocks noGrp="1"/>
+          </p:cNvSpPr>
+          <p:nvPr>
+            <p:ph type="ctrTitle"/>
+          </p:nvPr>
+        </p:nvSpPr>
+        <p:spPr>
+          <a:xfrm>
+            <a:off x="401370" y="1556929"/>
+            <a:ext cx="11389259" cy="2387600"/>
+          </a:xfrm>
+        </p:spPr>
+        <p:txBody>
+          <a:bodyPr anchor="ctr">
+            <a:noAutofit/>
+          </a:bodyPr>
+          <a:lstStyle/>
+          <a:p>
+            <a:r>
+              <a:rPr lang="en-US" altLang="zh-CN" sz="7200" b="1" dirty="0">
+                <a:latin typeface="+mn-ea"/>
+                <a:ea typeface="+mn-ea"/>
+              </a:rPr>
+              <a:t>RAG+n8n</a:t>
+            </a:r>
+            <a:r>
+              <a:rPr lang="zh-CN" altLang="en-US" sz="7200" b="1" dirty="0">
+                <a:latin typeface="+mn-ea"/>
+                <a:ea typeface="+mn-ea"/>
+              </a:rPr>
+              <a:t>：个人知识助手：</a:t>
+            </a:r>
+            <a:br>
+              <a:rPr lang="en-US" altLang="zh-CN" b="1" dirty="0">
+                <a:latin typeface="+mn-ea"/>
+                <a:ea typeface="+mn-ea"/>
+              </a:rPr>
+            </a:br>
+            <a:br>
+              <a:rPr lang="en-US" altLang="zh-CN" b="1" dirty="0">
+                <a:latin typeface="+mn-ea"/>
+                <a:ea typeface="+mn-ea"/>
+              </a:rPr>
+            </a:br>
+            <a:r>
+              <a:rPr lang="zh-CN" altLang="en-US" b="1" dirty="0">
+                <a:latin typeface="+mn-ea"/>
+                <a:ea typeface="+mn-ea"/>
+              </a:rPr>
+              <a:t>生成专业提示词</a:t>
+            </a:r>
+          </a:p>
+        </p:txBody>
+      </p:sp>
+      <p:sp>
+        <p:nvSpPr>
+          <p:cNvPr id="3" name="TextBox 2">
+            <a:extLst>
+              <a:ext uri="{FF2B5EF4-FFF2-40B4-BE49-F238E27FC236}">
+                <a16:creationId xmlns:a16="http://schemas.microsoft.com/office/drawing/2014/main" id="{AE02244F-47D4-D490-8F3D-B679EAAF32CD}"/>
+              </a:ext>
+            </a:extLst>
+          </p:cNvPr>
+          <p:cNvSpPr txBox="1"/>
+          <p:nvPr/>
+        </p:nvSpPr>
+        <p:spPr>
+          <a:xfrm>
+            <a:off x="3449370" y="4173648"/>
+            <a:ext cx="5739897" cy="646331"/>
+          </a:xfrm>
+          <a:prstGeom prst="rect">
+            <a:avLst/>
+          </a:prstGeom>
+          <a:noFill/>
+        </p:spPr>
+        <p:txBody>
+          <a:bodyPr wrap="square" rtlCol="0">
+            <a:spAutoFit/>
+          </a:bodyPr>
+          <a:lstStyle/>
+          <a:p>
+            <a:r>
+              <a:rPr lang="en-US" altLang="zh-CN" b="1" dirty="0">
+                <a:latin typeface="+mn-ea"/>
+              </a:rPr>
+              <a:t>FAST</a:t>
+            </a:r>
+            <a:r>
+              <a:rPr lang="zh-CN" altLang="en-US" b="1" dirty="0">
+                <a:latin typeface="+mn-ea"/>
+              </a:rPr>
+              <a:t>全栈树（知识网：点线面及联系）</a:t>
+            </a:r>
+            <a:endParaRPr lang="en-US" altLang="zh-CN" b="1" dirty="0">
+              <a:latin typeface="+mn-ea"/>
+            </a:endParaRPr>
+          </a:p>
+          <a:p>
+            <a:r>
+              <a:rPr lang="zh-CN" altLang="en-US" b="1" dirty="0">
+                <a:latin typeface="+mn-ea"/>
+              </a:rPr>
+              <a:t>。。。</a:t>
+            </a:r>
+          </a:p>
+        </p:txBody>
+      </p:sp>
+    </p:spTree>
+    <p:extLst>
+      <p:ext uri="{BB962C8B-B14F-4D97-AF65-F5344CB8AC3E}">
+        <p14:creationId xmlns:p14="http://schemas.microsoft.com/office/powerpoint/2010/main" val="2833158716"/>
+      </p:ext>
+    </p:extLst>
+  </p:cSld>
+  <p:clrMapOvr>
+    <a:masterClrMapping/>
+  </p:clrMapOvr>
+</p:sld>
+</file>
+
+<file path=ppt/slides/slide23.xml><?xml version="1.0" encoding="utf-8"?>
+<p:sld xmlns:a="http://schemas.openxmlformats.org/drawingml/2006/main" xmlns:r="http://schemas.openxmlformats.org/officeDocument/2006/relationships" xmlns:p="http://schemas.openxmlformats.org/presentationml/2006/main">
+  <p:cSld>
+    <p:spTree>
+      <p:nvGrpSpPr>
+        <p:cNvPr id="1" name=""/>
+        <p:cNvGrpSpPr/>
+        <p:nvPr/>
+      </p:nvGrpSpPr>
+      <p:grpSpPr>
+        <a:xfrm>
+          <a:off x="0" y="0"/>
+          <a:ext cx="0" cy="0"/>
+          <a:chOff x="0" y="0"/>
+          <a:chExt cx="0" cy="0"/>
+        </a:xfrm>
+      </p:grpSpPr>
+      <p:sp>
+        <p:nvSpPr>
+          <p:cNvPr id="2" name="Title 1">
+            <a:extLst>
+              <a:ext uri="{FF2B5EF4-FFF2-40B4-BE49-F238E27FC236}">
+                <a16:creationId xmlns:a16="http://schemas.microsoft.com/office/drawing/2014/main" id="{FAD6AE50-F6C3-190C-104C-A886A623FC96}"/>
+              </a:ext>
+            </a:extLst>
+          </p:cNvPr>
+          <p:cNvSpPr>
+            <a:spLocks noGrp="1"/>
+          </p:cNvSpPr>
+          <p:nvPr>
+            <p:ph type="ctrTitle"/>
+          </p:nvPr>
+        </p:nvSpPr>
+        <p:spPr>
+          <a:xfrm>
+            <a:off x="401370" y="959400"/>
+            <a:ext cx="11389259" cy="2387600"/>
+          </a:xfrm>
+        </p:spPr>
+        <p:txBody>
+          <a:bodyPr anchor="ctr">
+            <a:noAutofit/>
+          </a:bodyPr>
+          <a:lstStyle/>
+          <a:p>
+            <a:r>
+              <a:rPr lang="en-US" altLang="zh-CN" sz="7200" b="1" dirty="0">
+                <a:latin typeface="+mn-ea"/>
+                <a:ea typeface="+mn-ea"/>
+              </a:rPr>
+              <a:t>RAG+n8n</a:t>
+            </a:r>
+            <a:r>
+              <a:rPr lang="zh-CN" altLang="en-US" sz="7200" b="1" dirty="0">
+                <a:latin typeface="+mn-ea"/>
+                <a:ea typeface="+mn-ea"/>
+              </a:rPr>
+              <a:t>：个人知识助手：</a:t>
+            </a:r>
+            <a:br>
+              <a:rPr lang="en-US" altLang="zh-CN" b="1" dirty="0">
+                <a:latin typeface="+mn-ea"/>
+                <a:ea typeface="+mn-ea"/>
+              </a:rPr>
+            </a:br>
+            <a:br>
+              <a:rPr lang="en-US" altLang="zh-CN" b="1" dirty="0">
+                <a:latin typeface="+mn-ea"/>
+                <a:ea typeface="+mn-ea"/>
+              </a:rPr>
+            </a:br>
+            <a:r>
+              <a:rPr lang="zh-CN" altLang="en-US" b="1" dirty="0">
+                <a:latin typeface="+mn-ea"/>
+                <a:ea typeface="+mn-ea"/>
+              </a:rPr>
+              <a:t>生成</a:t>
+            </a:r>
+            <a:r>
+              <a:rPr lang="en-US" altLang="zh-CN" b="1" dirty="0">
+                <a:latin typeface="+mn-ea"/>
+                <a:ea typeface="+mn-ea"/>
+              </a:rPr>
+              <a:t>FAST</a:t>
+            </a:r>
+            <a:r>
+              <a:rPr lang="zh-CN" altLang="en-US" b="1" dirty="0">
+                <a:latin typeface="+mn-ea"/>
+                <a:ea typeface="+mn-ea"/>
+              </a:rPr>
+              <a:t>笔记（手掌！！！）</a:t>
+            </a:r>
+          </a:p>
+        </p:txBody>
+      </p:sp>
+      <p:sp>
+        <p:nvSpPr>
+          <p:cNvPr id="3" name="TextBox 2">
+            <a:extLst>
+              <a:ext uri="{FF2B5EF4-FFF2-40B4-BE49-F238E27FC236}">
+                <a16:creationId xmlns:a16="http://schemas.microsoft.com/office/drawing/2014/main" id="{F65A27A5-AC32-C35E-51D2-900AA09EE5DE}"/>
+              </a:ext>
+            </a:extLst>
+          </p:cNvPr>
+          <p:cNvSpPr txBox="1"/>
+          <p:nvPr/>
+        </p:nvSpPr>
+        <p:spPr>
+          <a:xfrm>
+            <a:off x="3449370" y="3511001"/>
+            <a:ext cx="8341259" cy="3170099"/>
+          </a:xfrm>
+          <a:prstGeom prst="rect">
+            <a:avLst/>
+          </a:prstGeom>
+          <a:noFill/>
+        </p:spPr>
+        <p:txBody>
+          <a:bodyPr wrap="square" rtlCol="0">
+            <a:spAutoFit/>
+          </a:bodyPr>
+          <a:lstStyle/>
+          <a:p>
+            <a:r>
+              <a:rPr lang="zh-CN" altLang="en-US" sz="4000" b="1" dirty="0">
+                <a:latin typeface="+mn-ea"/>
+              </a:rPr>
+              <a:t>一句话</a:t>
+            </a:r>
+            <a:endParaRPr lang="en-US" altLang="zh-CN" sz="4000" b="1" dirty="0">
+              <a:latin typeface="+mn-ea"/>
+            </a:endParaRPr>
+          </a:p>
+          <a:p>
+            <a:r>
+              <a:rPr lang="zh-CN" altLang="en-US" sz="4000" b="1" dirty="0">
+                <a:latin typeface="+mn-ea"/>
+              </a:rPr>
+              <a:t>上传文档</a:t>
+            </a:r>
+            <a:r>
+              <a:rPr lang="en-US" altLang="zh-CN" sz="4000" b="1" dirty="0">
+                <a:latin typeface="+mn-ea"/>
+              </a:rPr>
+              <a:t>OPC</a:t>
+            </a:r>
+            <a:r>
+              <a:rPr lang="zh-CN" altLang="en-US" sz="4000" b="1" dirty="0">
+                <a:latin typeface="+mn-ea"/>
+              </a:rPr>
+              <a:t>、</a:t>
+            </a:r>
+            <a:r>
+              <a:rPr lang="en-US" altLang="zh-CN" sz="4000" b="1" dirty="0">
+                <a:latin typeface="+mn-ea"/>
+              </a:rPr>
+              <a:t>FAST</a:t>
+            </a:r>
+            <a:r>
+              <a:rPr lang="zh-CN" altLang="en-US" sz="4000" b="1" dirty="0">
+                <a:latin typeface="+mn-ea"/>
+              </a:rPr>
+              <a:t>、、、</a:t>
+            </a:r>
+            <a:endParaRPr lang="en-US" altLang="zh-CN" sz="4000" b="1" dirty="0">
+              <a:latin typeface="+mn-ea"/>
+            </a:endParaRPr>
+          </a:p>
+          <a:p>
+            <a:r>
+              <a:rPr lang="zh-CN" altLang="en-US" sz="4000" b="1" dirty="0">
+                <a:latin typeface="+mn-ea"/>
+              </a:rPr>
+              <a:t>网页</a:t>
+            </a:r>
+            <a:endParaRPr lang="en-US" altLang="zh-CN" sz="4000" b="1" dirty="0">
+              <a:latin typeface="+mn-ea"/>
+            </a:endParaRPr>
+          </a:p>
+          <a:p>
+            <a:r>
+              <a:rPr lang="zh-CN" altLang="en-US" sz="4000" b="1" dirty="0">
+                <a:latin typeface="+mn-ea"/>
+              </a:rPr>
+              <a:t>视频</a:t>
+            </a:r>
+            <a:endParaRPr lang="en-US" altLang="zh-CN" sz="4000" b="1" dirty="0">
+              <a:latin typeface="+mn-ea"/>
+            </a:endParaRPr>
+          </a:p>
+          <a:p>
+            <a:r>
+              <a:rPr lang="zh-CN" altLang="en-US" sz="4000" b="1" dirty="0">
+                <a:latin typeface="+mn-ea"/>
+              </a:rPr>
+              <a:t>。。。</a:t>
+            </a:r>
+          </a:p>
+        </p:txBody>
+      </p:sp>
+    </p:spTree>
+    <p:extLst>
+      <p:ext uri="{BB962C8B-B14F-4D97-AF65-F5344CB8AC3E}">
+        <p14:creationId xmlns:p14="http://schemas.microsoft.com/office/powerpoint/2010/main" val="1478696572"/>
+      </p:ext>
+    </p:extLst>
+  </p:cSld>
+  <p:clrMapOvr>
+    <a:masterClrMapping/>
+  </p:clrMapOvr>
+</p:sld>
+</file>
+
+<file path=ppt/slides/slide24.xml><?xml version="1.0" encoding="utf-8"?>
+<p:sld xmlns:a="http://schemas.openxmlformats.org/drawingml/2006/main" xmlns:r="http://schemas.openxmlformats.org/officeDocument/2006/relationships" xmlns:p="http://schemas.openxmlformats.org/presentationml/2006/main">
+  <p:cSld>
+    <p:spTree>
+      <p:nvGrpSpPr>
+        <p:cNvPr id="1" name=""/>
+        <p:cNvGrpSpPr/>
+        <p:nvPr/>
+      </p:nvGrpSpPr>
+      <p:grpSpPr>
+        <a:xfrm>
+          <a:off x="0" y="0"/>
+          <a:ext cx="0" cy="0"/>
+          <a:chOff x="0" y="0"/>
+          <a:chExt cx="0" cy="0"/>
+        </a:xfrm>
+      </p:grpSpPr>
+      <p:sp>
+        <p:nvSpPr>
+          <p:cNvPr id="2" name="Title 1">
+            <a:extLst>
+              <a:ext uri="{FF2B5EF4-FFF2-40B4-BE49-F238E27FC236}">
+                <a16:creationId xmlns:a16="http://schemas.microsoft.com/office/drawing/2014/main" id="{FAD6AE50-F6C3-190C-104C-A886A623FC96}"/>
+              </a:ext>
+            </a:extLst>
+          </p:cNvPr>
+          <p:cNvSpPr>
+            <a:spLocks noGrp="1"/>
+          </p:cNvSpPr>
+          <p:nvPr>
+            <p:ph type="ctrTitle"/>
+          </p:nvPr>
+        </p:nvSpPr>
+        <p:spPr>
+          <a:xfrm>
+            <a:off x="200685" y="1321539"/>
+            <a:ext cx="11790629" cy="2387600"/>
+          </a:xfrm>
+        </p:spPr>
+        <p:txBody>
+          <a:bodyPr anchor="ctr">
+            <a:noAutofit/>
+          </a:bodyPr>
+          <a:lstStyle/>
+          <a:p>
+            <a:r>
+              <a:rPr lang="en-US" altLang="zh-CN" sz="6600" b="1" dirty="0">
+                <a:latin typeface="+mn-ea"/>
+                <a:ea typeface="+mn-ea"/>
+              </a:rPr>
+              <a:t>n8n </a:t>
+            </a:r>
+            <a:r>
+              <a:rPr lang="zh-CN" altLang="en-US" sz="6600" b="1" dirty="0">
+                <a:latin typeface="+mn-ea"/>
+                <a:ea typeface="+mn-ea"/>
+              </a:rPr>
+              <a:t>：</a:t>
+            </a:r>
+            <a:r>
+              <a:rPr lang="en-US" altLang="zh-CN" sz="6600" b="1" dirty="0">
+                <a:latin typeface="+mn-ea"/>
+                <a:ea typeface="+mn-ea"/>
+              </a:rPr>
+              <a:t>AIGC</a:t>
+            </a:r>
+            <a:r>
+              <a:rPr lang="zh-CN" altLang="en-US" sz="6600" b="1" dirty="0">
+                <a:latin typeface="+mn-ea"/>
+                <a:ea typeface="+mn-ea"/>
+              </a:rPr>
+              <a:t>：生成文音图视商</a:t>
+            </a:r>
+            <a:br>
+              <a:rPr lang="en-US" altLang="zh-CN" b="1" dirty="0">
+                <a:latin typeface="+mn-ea"/>
+                <a:ea typeface="+mn-ea"/>
+              </a:rPr>
+            </a:br>
+            <a:br>
+              <a:rPr lang="en-US" altLang="zh-CN" b="1" dirty="0">
+                <a:latin typeface="+mn-ea"/>
+                <a:ea typeface="+mn-ea"/>
+              </a:rPr>
+            </a:br>
+            <a:r>
+              <a:rPr lang="zh-CN" altLang="en-US" b="1" dirty="0">
+                <a:latin typeface="+mn-ea"/>
+                <a:ea typeface="+mn-ea"/>
+              </a:rPr>
+              <a:t>（手指！）</a:t>
+            </a:r>
+            <a:endParaRPr lang="zh-CN" altLang="en-US" sz="4800" b="1" dirty="0">
+              <a:latin typeface="+mn-ea"/>
+              <a:ea typeface="+mn-ea"/>
+            </a:endParaRPr>
+          </a:p>
+        </p:txBody>
+      </p:sp>
+    </p:spTree>
+    <p:extLst>
+      <p:ext uri="{BB962C8B-B14F-4D97-AF65-F5344CB8AC3E}">
+        <p14:creationId xmlns:p14="http://schemas.microsoft.com/office/powerpoint/2010/main" val="2563359038"/>
+      </p:ext>
+    </p:extLst>
+  </p:cSld>
+  <p:clrMapOvr>
+    <a:masterClrMapping/>
+  </p:clrMapOvr>
+</p:sld>
+</file>
+
+<file path=ppt/slides/slide25.xml><?xml version="1.0" encoding="utf-8"?>
+<p:sld xmlns:a="http://schemas.openxmlformats.org/drawingml/2006/main" xmlns:r="http://schemas.openxmlformats.org/officeDocument/2006/relationships" xmlns:p="http://schemas.openxmlformats.org/presentationml/2006/main">
+  <p:cSld>
+    <p:spTree>
+      <p:nvGrpSpPr>
+        <p:cNvPr id="1" name=""/>
+        <p:cNvGrpSpPr/>
+        <p:nvPr/>
+      </p:nvGrpSpPr>
+      <p:grpSpPr>
+        <a:xfrm>
+          <a:off x="0" y="0"/>
+          <a:ext cx="0" cy="0"/>
+          <a:chOff x="0" y="0"/>
+          <a:chExt cx="0" cy="0"/>
+        </a:xfrm>
+      </p:grpSpPr>
+      <p:sp>
+        <p:nvSpPr>
+          <p:cNvPr id="2" name="Title 1">
+            <a:extLst>
+              <a:ext uri="{FF2B5EF4-FFF2-40B4-BE49-F238E27FC236}">
+                <a16:creationId xmlns:a16="http://schemas.microsoft.com/office/drawing/2014/main" id="{FAD6AE50-F6C3-190C-104C-A886A623FC96}"/>
+              </a:ext>
+            </a:extLst>
+          </p:cNvPr>
+          <p:cNvSpPr>
+            <a:spLocks noGrp="1"/>
+          </p:cNvSpPr>
+          <p:nvPr>
+            <p:ph type="ctrTitle"/>
+          </p:nvPr>
+        </p:nvSpPr>
+        <p:spPr>
+          <a:xfrm>
+            <a:off x="401370" y="1728944"/>
+            <a:ext cx="11389259" cy="2387600"/>
+          </a:xfrm>
+        </p:spPr>
+        <p:txBody>
+          <a:bodyPr anchor="ctr">
+            <a:noAutofit/>
+          </a:bodyPr>
+          <a:lstStyle/>
+          <a:p>
+            <a:r>
+              <a:rPr lang="en-US" altLang="zh-CN" sz="8000" b="1" dirty="0">
+                <a:latin typeface="+mn-ea"/>
+                <a:ea typeface="+mn-ea"/>
+              </a:rPr>
+              <a:t>n8n</a:t>
+            </a:r>
+            <a:r>
+              <a:rPr lang="zh-CN" altLang="en-US" sz="8000" b="1" dirty="0">
+                <a:latin typeface="+mn-ea"/>
+                <a:ea typeface="+mn-ea"/>
+              </a:rPr>
+              <a:t>：多平台发布管理</a:t>
+            </a:r>
+            <a:br>
+              <a:rPr lang="en-US" altLang="zh-CN" b="1" dirty="0">
+                <a:latin typeface="+mn-ea"/>
+                <a:ea typeface="+mn-ea"/>
+              </a:rPr>
+            </a:br>
+            <a:br>
+              <a:rPr lang="en-US" altLang="zh-CN" b="1" dirty="0">
+                <a:latin typeface="+mn-ea"/>
+                <a:ea typeface="+mn-ea"/>
+              </a:rPr>
+            </a:br>
+            <a:r>
+              <a:rPr lang="zh-CN" altLang="en-US" b="1" dirty="0">
+                <a:latin typeface="+mn-ea"/>
+                <a:ea typeface="+mn-ea"/>
+              </a:rPr>
+              <a:t>（手套！）</a:t>
+            </a:r>
+            <a:endParaRPr lang="zh-CN" altLang="en-US" sz="4800" b="1" dirty="0">
+              <a:latin typeface="+mn-ea"/>
+              <a:ea typeface="+mn-ea"/>
+            </a:endParaRPr>
+          </a:p>
+        </p:txBody>
+      </p:sp>
+    </p:spTree>
+    <p:extLst>
+      <p:ext uri="{BB962C8B-B14F-4D97-AF65-F5344CB8AC3E}">
+        <p14:creationId xmlns:p14="http://schemas.microsoft.com/office/powerpoint/2010/main" val="2623233059"/>
+      </p:ext>
+    </p:extLst>
+  </p:cSld>
+  <p:clrMapOvr>
+    <a:masterClrMapping/>
+  </p:clrMapOvr>
+</p:sld>
+</file>
+
+<file path=ppt/slides/slide26.xml><?xml version="1.0" encoding="utf-8"?>
+<p:sld xmlns:a="http://schemas.openxmlformats.org/drawingml/2006/main" xmlns:r="http://schemas.openxmlformats.org/officeDocument/2006/relationships" xmlns:p="http://schemas.openxmlformats.org/presentationml/2006/main">
+  <p:cSld>
+    <p:spTree>
+      <p:nvGrpSpPr>
+        <p:cNvPr id="1" name=""/>
+        <p:cNvGrpSpPr/>
+        <p:nvPr/>
+      </p:nvGrpSpPr>
+      <p:grpSpPr>
+        <a:xfrm>
+          <a:off x="0" y="0"/>
+          <a:ext cx="0" cy="0"/>
+          <a:chOff x="0" y="0"/>
+          <a:chExt cx="0" cy="0"/>
+        </a:xfrm>
+      </p:grpSpPr>
+      <p:sp>
+        <p:nvSpPr>
+          <p:cNvPr id="2" name="Title 1">
+            <a:extLst>
+              <a:ext uri="{FF2B5EF4-FFF2-40B4-BE49-F238E27FC236}">
+                <a16:creationId xmlns:a16="http://schemas.microsoft.com/office/drawing/2014/main" id="{FAD6AE50-F6C3-190C-104C-A886A623FC96}"/>
+              </a:ext>
+            </a:extLst>
+          </p:cNvPr>
+          <p:cNvSpPr>
+            <a:spLocks noGrp="1"/>
+          </p:cNvSpPr>
+          <p:nvPr>
+            <p:ph type="ctrTitle"/>
+          </p:nvPr>
+        </p:nvSpPr>
+        <p:spPr>
+          <a:xfrm>
+            <a:off x="401370" y="1149522"/>
+            <a:ext cx="11389259" cy="2387600"/>
+          </a:xfrm>
+        </p:spPr>
+        <p:txBody>
+          <a:bodyPr anchor="ctr">
+            <a:noAutofit/>
+          </a:bodyPr>
+          <a:lstStyle/>
+          <a:p>
+            <a:r>
+              <a:rPr lang="en-US" altLang="zh-CN" sz="8000" b="1" dirty="0">
+                <a:latin typeface="+mn-ea"/>
+                <a:ea typeface="+mn-ea"/>
+              </a:rPr>
+              <a:t>n8n</a:t>
+            </a:r>
+            <a:r>
+              <a:rPr lang="zh-CN" altLang="en-US" sz="8000" b="1" dirty="0">
+                <a:latin typeface="+mn-ea"/>
+                <a:ea typeface="+mn-ea"/>
+              </a:rPr>
+              <a:t>：</a:t>
+            </a:r>
+            <a:r>
+              <a:rPr lang="en-US" altLang="zh-CN" sz="8000" b="1" dirty="0" err="1">
+                <a:latin typeface="+mn-ea"/>
+                <a:ea typeface="+mn-ea"/>
+              </a:rPr>
+              <a:t>Youtube</a:t>
+            </a:r>
+            <a:r>
+              <a:rPr lang="zh-CN" altLang="en-US" sz="8000" b="1" dirty="0">
+                <a:latin typeface="+mn-ea"/>
+                <a:ea typeface="+mn-ea"/>
+              </a:rPr>
+              <a:t>情报分析</a:t>
+            </a:r>
+            <a:endParaRPr lang="zh-CN" altLang="en-US" sz="4800" b="1" dirty="0">
+              <a:latin typeface="+mn-ea"/>
+              <a:ea typeface="+mn-ea"/>
+            </a:endParaRPr>
+          </a:p>
+        </p:txBody>
+      </p:sp>
+    </p:spTree>
+    <p:extLst>
+      <p:ext uri="{BB962C8B-B14F-4D97-AF65-F5344CB8AC3E}">
+        <p14:creationId xmlns:p14="http://schemas.microsoft.com/office/powerpoint/2010/main" val="3080334700"/>
+      </p:ext>
+    </p:extLst>
+  </p:cSld>
+  <p:clrMapOvr>
+    <a:masterClrMapping/>
+  </p:clrMapOvr>
+</p:sld>
+</file>
+
+<file path=ppt/slides/slide27.xml><?xml version="1.0" encoding="utf-8"?>
+<p:sld xmlns:a="http://schemas.openxmlformats.org/drawingml/2006/main" xmlns:r="http://schemas.openxmlformats.org/officeDocument/2006/relationships" xmlns:p="http://schemas.openxmlformats.org/presentationml/2006/main">
+  <p:cSld>
+    <p:spTree>
+      <p:nvGrpSpPr>
+        <p:cNvPr id="1" name=""/>
+        <p:cNvGrpSpPr/>
+        <p:nvPr/>
+      </p:nvGrpSpPr>
+      <p:grpSpPr>
+        <a:xfrm>
+          <a:off x="0" y="0"/>
+          <a:ext cx="0" cy="0"/>
+          <a:chOff x="0" y="0"/>
+          <a:chExt cx="0" cy="0"/>
+        </a:xfrm>
+      </p:grpSpPr>
+      <p:sp>
+        <p:nvSpPr>
+          <p:cNvPr id="2" name="Title 1">
+            <a:extLst>
+              <a:ext uri="{FF2B5EF4-FFF2-40B4-BE49-F238E27FC236}">
+                <a16:creationId xmlns:a16="http://schemas.microsoft.com/office/drawing/2014/main" id="{FAD6AE50-F6C3-190C-104C-A886A623FC96}"/>
+              </a:ext>
+            </a:extLst>
+          </p:cNvPr>
+          <p:cNvSpPr>
+            <a:spLocks noGrp="1"/>
+          </p:cNvSpPr>
+          <p:nvPr>
+            <p:ph type="ctrTitle"/>
+          </p:nvPr>
+        </p:nvSpPr>
+        <p:spPr>
+          <a:xfrm>
+            <a:off x="401370" y="1149522"/>
+            <a:ext cx="11389259" cy="2387600"/>
+          </a:xfrm>
+        </p:spPr>
+        <p:txBody>
+          <a:bodyPr anchor="ctr">
+            <a:noAutofit/>
+          </a:bodyPr>
+          <a:lstStyle/>
+          <a:p>
+            <a:r>
+              <a:rPr lang="en-US" altLang="zh-CN" sz="8000" b="1" dirty="0">
+                <a:latin typeface="+mn-ea"/>
+                <a:ea typeface="+mn-ea"/>
+              </a:rPr>
+              <a:t>n8n</a:t>
+            </a:r>
+            <a:r>
+              <a:rPr lang="zh-CN" altLang="en-US" sz="8000" b="1" dirty="0">
+                <a:latin typeface="+mn-ea"/>
+                <a:ea typeface="+mn-ea"/>
+              </a:rPr>
+              <a:t>：</a:t>
+            </a:r>
+            <a:r>
+              <a:rPr lang="en-US" altLang="zh-CN" sz="8000" b="1" dirty="0" err="1">
+                <a:latin typeface="+mn-ea"/>
+                <a:ea typeface="+mn-ea"/>
+              </a:rPr>
+              <a:t>Youtube</a:t>
+            </a:r>
+            <a:r>
+              <a:rPr lang="zh-CN" altLang="en-US" sz="8000" b="1" dirty="0">
+                <a:latin typeface="+mn-ea"/>
+                <a:ea typeface="+mn-ea"/>
+              </a:rPr>
+              <a:t>双人播客</a:t>
+            </a:r>
+            <a:endParaRPr lang="zh-CN" altLang="en-US" sz="4800" b="1" dirty="0">
+              <a:latin typeface="+mn-ea"/>
+              <a:ea typeface="+mn-ea"/>
+            </a:endParaRPr>
+          </a:p>
+        </p:txBody>
+      </p:sp>
+    </p:spTree>
+    <p:extLst>
+      <p:ext uri="{BB962C8B-B14F-4D97-AF65-F5344CB8AC3E}">
+        <p14:creationId xmlns:p14="http://schemas.microsoft.com/office/powerpoint/2010/main" val="2101464867"/>
       </p:ext>
     </p:extLst>
   </p:cSld>
@@ -5012,10 +6482,16 @@
           <a:lstStyle/>
           <a:p>
             <a:r>
-              <a:rPr lang="en-US" altLang="zh-CN" sz="12000" b="1" dirty="0"/>
+              <a:rPr lang="en-US" altLang="zh-CN" sz="12000" b="1" dirty="0">
+                <a:latin typeface="+mn-ea"/>
+                <a:ea typeface="+mn-ea"/>
+              </a:rPr>
               <a:t>AI</a:t>
             </a:r>
-            <a:endParaRPr lang="zh-CN" altLang="en-US" sz="12000" b="1" dirty="0"/>
+            <a:endParaRPr lang="zh-CN" altLang="en-US" sz="12000" b="1" dirty="0">
+              <a:latin typeface="+mn-ea"/>
+              <a:ea typeface="+mn-ea"/>
+            </a:endParaRPr>
           </a:p>
         </p:txBody>
       </p:sp>
@@ -5048,15 +6524,21 @@
           <a:lstStyle/>
           <a:p>
             <a:r>
-              <a:rPr lang="zh-CN" altLang="en-US" sz="9600" dirty="0"/>
+              <a:rPr lang="zh-CN" altLang="en-US" sz="9600" dirty="0">
+                <a:latin typeface="+mn-ea"/>
+              </a:rPr>
               <a:t>（</a:t>
             </a:r>
             <a:r>
-              <a:rPr lang="en-US" altLang="zh-CN" sz="9600" dirty="0"/>
+              <a:rPr lang="en-US" altLang="zh-CN" sz="9600" dirty="0">
+                <a:latin typeface="+mn-ea"/>
+              </a:rPr>
               <a:t> Full Stack Tree </a:t>
             </a:r>
             <a:r>
-              <a:rPr lang="zh-CN" altLang="en-US" sz="9600" dirty="0"/>
+              <a:rPr lang="zh-CN" altLang="en-US" sz="9600" dirty="0">
+                <a:latin typeface="+mn-ea"/>
+              </a:rPr>
               <a:t>）</a:t>
             </a:r>
           </a:p>
@@ -5116,7 +6598,10 @@
           <a:lstStyle/>
           <a:p>
             <a:r>
-              <a:rPr lang="zh-CN" altLang="en-US" sz="12000" b="1" dirty="0"/>
+              <a:rPr lang="zh-CN" altLang="en-US" sz="12000" b="1" dirty="0">
+                <a:latin typeface="+mn-ea"/>
+                <a:ea typeface="+mn-ea"/>
+              </a:rPr>
               <a:t>赚</a:t>
             </a:r>
           </a:p>
@@ -5151,23 +6636,33 @@
           <a:lstStyle/>
           <a:p>
             <a:r>
-              <a:rPr lang="zh-CN" altLang="en-US" sz="9600" dirty="0"/>
+              <a:rPr lang="zh-CN" altLang="en-US" sz="9600" dirty="0">
+                <a:latin typeface="+mn-ea"/>
+              </a:rPr>
               <a:t>（</a:t>
             </a:r>
             <a:r>
-              <a:rPr lang="en-US" altLang="zh-CN" sz="9600" dirty="0"/>
+              <a:rPr lang="en-US" altLang="zh-CN" sz="9600" dirty="0">
+                <a:latin typeface="+mn-ea"/>
+              </a:rPr>
               <a:t> </a:t>
             </a:r>
             <a:r>
-              <a:rPr lang="zh-CN" altLang="en-US" sz="9600" dirty="0"/>
+              <a:rPr lang="zh-CN" altLang="en-US" sz="9600" dirty="0">
+                <a:latin typeface="+mn-ea"/>
+              </a:rPr>
               <a:t>人气、</a:t>
             </a:r>
             <a:r>
-              <a:rPr lang="en-US" altLang="zh-CN" sz="9600" dirty="0"/>
+              <a:rPr lang="en-US" altLang="zh-CN" sz="9600" dirty="0">
+                <a:latin typeface="+mn-ea"/>
+              </a:rPr>
               <a:t>$$$</a:t>
             </a:r>
             <a:r>
-              <a:rPr lang="zh-CN" altLang="en-US" sz="9600" dirty="0"/>
+              <a:rPr lang="zh-CN" altLang="en-US" sz="9600" dirty="0">
+                <a:latin typeface="+mn-ea"/>
+              </a:rPr>
               <a:t>）</a:t>
             </a:r>
           </a:p>
@@ -5227,10 +6722,16 @@
           <a:lstStyle/>
           <a:p>
             <a:r>
-              <a:rPr lang="en-US" altLang="zh-CN" sz="12000" b="1" dirty="0"/>
+              <a:rPr lang="en-US" altLang="zh-CN" sz="12000" b="1" dirty="0">
+                <a:latin typeface="+mn-ea"/>
+                <a:ea typeface="+mn-ea"/>
+              </a:rPr>
               <a:t>Notion</a:t>
             </a:r>
-            <a:endParaRPr lang="zh-CN" altLang="en-US" sz="12000" b="1" dirty="0"/>
+            <a:endParaRPr lang="zh-CN" altLang="en-US" sz="12000" b="1" dirty="0">
+              <a:latin typeface="+mn-ea"/>
+              <a:ea typeface="+mn-ea"/>
+            </a:endParaRPr>
           </a:p>
         </p:txBody>
       </p:sp>
@@ -5263,34 +6764,50 @@
           <a:lstStyle/>
           <a:p>
             <a:r>
-              <a:rPr lang="en-US" altLang="zh-CN" sz="5000" dirty="0"/>
+              <a:rPr lang="en-US" altLang="zh-CN" sz="5000" dirty="0">
+                <a:latin typeface="+mn-ea"/>
+              </a:rPr>
               <a:t>【</a:t>
             </a:r>
             <a:r>
-              <a:rPr lang="zh-CN" altLang="en-US" sz="5000" dirty="0"/>
+              <a:rPr lang="zh-CN" altLang="en-US" sz="5000" dirty="0">
+                <a:latin typeface="+mn-ea"/>
+              </a:rPr>
               <a:t>随手记</a:t>
             </a:r>
             <a:r>
-              <a:rPr lang="en-US" altLang="zh-CN" sz="5000" dirty="0"/>
+              <a:rPr lang="en-US" altLang="zh-CN" sz="5000" dirty="0">
+                <a:latin typeface="+mn-ea"/>
+              </a:rPr>
               <a:t>】【</a:t>
             </a:r>
             <a:r>
-              <a:rPr lang="zh-CN" altLang="en-US" sz="5000" dirty="0"/>
+              <a:rPr lang="zh-CN" altLang="en-US" sz="5000" dirty="0">
+                <a:latin typeface="+mn-ea"/>
+              </a:rPr>
               <a:t>日记</a:t>
             </a:r>
             <a:r>
-              <a:rPr lang="en-US" altLang="zh-CN" sz="5000" dirty="0"/>
+              <a:rPr lang="en-US" altLang="zh-CN" sz="5000" dirty="0">
+                <a:latin typeface="+mn-ea"/>
+              </a:rPr>
               <a:t>】【GTD】【</a:t>
             </a:r>
             <a:r>
-              <a:rPr lang="zh-CN" altLang="en-US" sz="5000" dirty="0"/>
+              <a:rPr lang="zh-CN" altLang="en-US" sz="5000" dirty="0">
+                <a:latin typeface="+mn-ea"/>
+              </a:rPr>
               <a:t>网络资源</a:t>
             </a:r>
             <a:r>
-              <a:rPr lang="en-US" altLang="zh-CN" sz="5000" dirty="0"/>
+              <a:rPr lang="en-US" altLang="zh-CN" sz="5000" dirty="0">
+                <a:latin typeface="+mn-ea"/>
+              </a:rPr>
               <a:t>】</a:t>
             </a:r>
-            <a:endParaRPr lang="zh-CN" altLang="en-US" sz="5000" dirty="0"/>
+            <a:endParaRPr lang="zh-CN" altLang="en-US" sz="5000" dirty="0">
+              <a:latin typeface="+mn-ea"/>
+            </a:endParaRPr>
           </a:p>
         </p:txBody>
       </p:sp>
@@ -5348,10 +6865,16 @@
           <a:lstStyle/>
           <a:p>
             <a:r>
-              <a:rPr lang="en-US" altLang="zh-CN" sz="12000" b="1" dirty="0"/>
+              <a:rPr lang="en-US" altLang="zh-CN" sz="12000" b="1" dirty="0">
+                <a:latin typeface="+mn-ea"/>
+                <a:ea typeface="+mn-ea"/>
+              </a:rPr>
               <a:t>OB</a:t>
             </a:r>
-            <a:endParaRPr lang="zh-CN" altLang="en-US" sz="12000" b="1" dirty="0"/>
+            <a:endParaRPr lang="zh-CN" altLang="en-US" sz="12000" b="1" dirty="0">
+              <a:latin typeface="+mn-ea"/>
+              <a:ea typeface="+mn-ea"/>
+            </a:endParaRPr>
           </a:p>
         </p:txBody>
       </p:sp>
@@ -5384,7 +6907,9 @@
           <a:lstStyle/>
           <a:p>
             <a:r>
-              <a:rPr lang="zh-CN" altLang="en-US" sz="5000" dirty="0"/>
+              <a:rPr lang="zh-CN" altLang="en-US" sz="5000" dirty="0">
+                <a:latin typeface="+mn-ea"/>
+              </a:rPr>
               <a:t>（知识库、知识图谱、链接）</a:t>
             </a:r>
           </a:p>
@@ -5438,8 +6963,87 @@
         </p:nvSpPr>
         <p:spPr>
           <a:xfrm>
-            <a:off x="446637" y="660402"/>
-            <a:ext cx="11298725" cy="2387600"/>
+            <a:off x="401370" y="461459"/>
+            <a:ext cx="11389259" cy="2387600"/>
+          </a:xfrm>
+        </p:spPr>
+        <p:txBody>
+          <a:bodyPr anchor="ctr">
+            <a:noAutofit/>
+          </a:bodyPr>
+          <a:lstStyle/>
+          <a:p>
+            <a:r>
+              <a:rPr lang="en-US" altLang="zh-CN" sz="7200" b="1" dirty="0" err="1">
+                <a:latin typeface="+mn-ea"/>
+                <a:ea typeface="+mn-ea"/>
+              </a:rPr>
+              <a:t>NotebookLM</a:t>
+            </a:r>
+            <a:br>
+              <a:rPr lang="en-US" altLang="zh-CN" b="1" dirty="0">
+                <a:latin typeface="+mn-ea"/>
+                <a:ea typeface="+mn-ea"/>
+              </a:rPr>
+            </a:br>
+            <a:r>
+              <a:rPr lang="zh-CN" altLang="en-US" b="1" dirty="0">
+                <a:latin typeface="+mn-ea"/>
+                <a:ea typeface="+mn-ea"/>
+              </a:rPr>
+              <a:t>（</a:t>
+            </a:r>
+            <a:r>
+              <a:rPr lang="en-US" altLang="zh-CN" b="1" dirty="0">
+                <a:latin typeface="+mn-ea"/>
+                <a:ea typeface="+mn-ea"/>
+              </a:rPr>
+              <a:t>AI</a:t>
+            </a:r>
+            <a:r>
+              <a:rPr lang="zh-CN" altLang="en-US" b="1" dirty="0">
+                <a:latin typeface="+mn-ea"/>
+                <a:ea typeface="+mn-ea"/>
+              </a:rPr>
+              <a:t>学习助手！</a:t>
+            </a:r>
+            <a:r>
+              <a:rPr lang="en-US" altLang="zh-CN" b="1" dirty="0">
+                <a:latin typeface="+mn-ea"/>
+                <a:ea typeface="+mn-ea"/>
+              </a:rPr>
+              <a:t>FAST L&amp;T</a:t>
+            </a:r>
+            <a:r>
+              <a:rPr lang="zh-CN" altLang="en-US" b="1" dirty="0">
+                <a:latin typeface="+mn-ea"/>
+                <a:ea typeface="+mn-ea"/>
+              </a:rPr>
+              <a:t>）</a:t>
+            </a:r>
+          </a:p>
+        </p:txBody>
+      </p:sp>
+      <p:sp>
+        <p:nvSpPr>
+          <p:cNvPr id="3" name="Subtitle 2">
+            <a:extLst>
+              <a:ext uri="{FF2B5EF4-FFF2-40B4-BE49-F238E27FC236}">
+                <a16:creationId xmlns:a16="http://schemas.microsoft.com/office/drawing/2014/main" id="{2F1F2B62-AC0C-0480-A37B-C6BB0164D2BE}"/>
+              </a:ext>
+            </a:extLst>
+          </p:cNvPr>
+          <p:cNvSpPr>
+            <a:spLocks noGrp="1"/>
+          </p:cNvSpPr>
+          <p:nvPr>
+            <p:ph type="subTitle" idx="1"/>
+          </p:nvPr>
+        </p:nvSpPr>
+        <p:spPr>
+          <a:xfrm>
+            <a:off x="297256" y="3509963"/>
+            <a:ext cx="11597488" cy="1655762"/>
           </a:xfrm>
         </p:spPr>
         <p:txBody>
@@ -5449,419 +7053,45 @@
           <a:lstStyle/>
           <a:p>
             <a:r>
-              <a:rPr lang="en-US" altLang="zh-CN" sz="7200" b="1" dirty="0"/>
-              <a:t>FAST  Learning &amp; Thinking</a:t>
-            </a:r>
-            <a:endParaRPr lang="zh-CN" altLang="en-US" sz="7200" b="1" dirty="0"/>
-          </a:p>
-        </p:txBody>
-      </p:sp>
-      <p:sp>
-        <p:nvSpPr>
-          <p:cNvPr id="4" name="Subtitle 2">
-            <a:extLst>
-              <a:ext uri="{FF2B5EF4-FFF2-40B4-BE49-F238E27FC236}">
-                <a16:creationId xmlns:a16="http://schemas.microsoft.com/office/drawing/2014/main" id="{468994D0-35F4-420B-0B2F-88887FD19675}"/>
-              </a:ext>
-            </a:extLst>
-          </p:cNvPr>
-          <p:cNvSpPr txBox="1">
-            <a:spLocks/>
-          </p:cNvSpPr>
-          <p:nvPr/>
-        </p:nvSpPr>
-        <p:spPr>
-          <a:xfrm>
-            <a:off x="297256" y="4694458"/>
-            <a:ext cx="11597488" cy="1655762"/>
-          </a:xfrm>
-          <a:prstGeom prst="rect">
-            <a:avLst/>
-          </a:prstGeom>
-        </p:spPr>
-        <p:txBody>
-          <a:bodyPr vert="horz" lIns="91440" tIns="45720" rIns="91440" bIns="45720" rtlCol="0" anchor="ctr">
-            <a:normAutofit/>
-          </a:bodyPr>
-          <a:lstStyle>
-            <a:lvl1pPr marL="0" indent="0" algn="ctr" defTabSz="914400" rtl="0" eaLnBrk="1" latinLnBrk="0" hangingPunct="1">
-              <a:lnSpc>
-                <a:spcPct val="90000"/>
-              </a:lnSpc>
-              <a:spcBef>
-                <a:spcPts val="1000"/>
-              </a:spcBef>
-              <a:buFont typeface="Arial" panose="020B0604020202020204" pitchFamily="34" charset="0"/>
-              <a:buNone/>
-              <a:defRPr sz="2400" kern="1200">
-                <a:solidFill>
-                  <a:schemeClr val="tx1"/>
-                </a:solidFill>
-                <a:latin typeface="+mn-lt"/>
-                <a:ea typeface="+mn-ea"/>
-                <a:cs typeface="+mn-cs"/>
-              </a:defRPr>
-            </a:lvl1pPr>
-            <a:lvl2pPr marL="457200" indent="0" algn="ctr" defTabSz="914400" rtl="0" eaLnBrk="1" latinLnBrk="0" hangingPunct="1">
-              <a:lnSpc>
-                <a:spcPct val="90000"/>
-              </a:lnSpc>
-              <a:spcBef>
-                <a:spcPts val="500"/>
-              </a:spcBef>
-              <a:buFont typeface="Arial" panose="020B0604020202020204" pitchFamily="34" charset="0"/>
-              <a:buNone/>
-              <a:defRPr sz="2000" kern="1200">
-                <a:solidFill>
-                  <a:schemeClr val="tx1"/>
-                </a:solidFill>
-                <a:latin typeface="+mn-lt"/>
-                <a:ea typeface="+mn-ea"/>
-                <a:cs typeface="+mn-cs"/>
-              </a:defRPr>
-            </a:lvl2pPr>
-            <a:lvl3pPr marL="914400" indent="0" algn="ctr" defTabSz="914400" rtl="0" eaLnBrk="1" latinLnBrk="0" hangingPunct="1">
-              <a:lnSpc>
-                <a:spcPct val="90000"/>
-              </a:lnSpc>
-              <a:spcBef>
-                <a:spcPts val="500"/>
-              </a:spcBef>
-              <a:buFont typeface="Arial" panose="020B0604020202020204" pitchFamily="34" charset="0"/>
-              <a:buNone/>
-              <a:defRPr sz="1800" kern="1200">
-                <a:solidFill>
-                  <a:schemeClr val="tx1"/>
-                </a:solidFill>
-                <a:latin typeface="+mn-lt"/>
-                <a:ea typeface="+mn-ea"/>
-                <a:cs typeface="+mn-cs"/>
-              </a:defRPr>
-            </a:lvl3pPr>
-            <a:lvl4pPr marL="1371600" indent="0" algn="ctr" defTabSz="914400" rtl="0" eaLnBrk="1" latinLnBrk="0" hangingPunct="1">
-              <a:lnSpc>
-                <a:spcPct val="90000"/>
-              </a:lnSpc>
-              <a:spcBef>
-                <a:spcPts val="500"/>
-              </a:spcBef>
-              <a:buFont typeface="Arial" panose="020B0604020202020204" pitchFamily="34" charset="0"/>
-              <a:buNone/>
-              <a:defRPr sz="1600" kern="1200">
-                <a:solidFill>
-                  <a:schemeClr val="tx1"/>
-                </a:solidFill>
-                <a:latin typeface="+mn-lt"/>
-                <a:ea typeface="+mn-ea"/>
-                <a:cs typeface="+mn-cs"/>
-              </a:defRPr>
-            </a:lvl4pPr>
-            <a:lvl5pPr marL="1828800" indent="0" algn="ctr" defTabSz="914400" rtl="0" eaLnBrk="1" latinLnBrk="0" hangingPunct="1">
-              <a:lnSpc>
-                <a:spcPct val="90000"/>
-              </a:lnSpc>
-              <a:spcBef>
-                <a:spcPts val="500"/>
-              </a:spcBef>
-              <a:buFont typeface="Arial" panose="020B0604020202020204" pitchFamily="34" charset="0"/>
-              <a:buNone/>
-              <a:defRPr sz="1600" kern="1200">
-                <a:solidFill>
-                  <a:schemeClr val="tx1"/>
-                </a:solidFill>
-                <a:latin typeface="+mn-lt"/>
-                <a:ea typeface="+mn-ea"/>
-                <a:cs typeface="+mn-cs"/>
-              </a:defRPr>
-            </a:lvl5pPr>
-            <a:lvl6pPr marL="2286000" indent="0" algn="ctr" defTabSz="914400" rtl="0" eaLnBrk="1" latinLnBrk="0" hangingPunct="1">
-              <a:lnSpc>
-                <a:spcPct val="90000"/>
-              </a:lnSpc>
-              <a:spcBef>
-                <a:spcPts val="500"/>
-              </a:spcBef>
-              <a:buFont typeface="Arial" panose="020B0604020202020204" pitchFamily="34" charset="0"/>
-              <a:buNone/>
-              <a:defRPr sz="1600" kern="1200">
-                <a:solidFill>
-                  <a:schemeClr val="tx1"/>
-                </a:solidFill>
-                <a:latin typeface="+mn-lt"/>
-                <a:ea typeface="+mn-ea"/>
-                <a:cs typeface="+mn-cs"/>
-              </a:defRPr>
-            </a:lvl6pPr>
-            <a:lvl7pPr marL="2743200" indent="0" algn="ctr" defTabSz="914400" rtl="0" eaLnBrk="1" latinLnBrk="0" hangingPunct="1">
-              <a:lnSpc>
-                <a:spcPct val="90000"/>
-              </a:lnSpc>
-              <a:spcBef>
-                <a:spcPts val="500"/>
-              </a:spcBef>
-              <a:buFont typeface="Arial" panose="020B0604020202020204" pitchFamily="34" charset="0"/>
-              <a:buNone/>
-              <a:defRPr sz="1600" kern="1200">
-                <a:solidFill>
-                  <a:schemeClr val="tx1"/>
-                </a:solidFill>
-                <a:latin typeface="+mn-lt"/>
-                <a:ea typeface="+mn-ea"/>
-                <a:cs typeface="+mn-cs"/>
-              </a:defRPr>
-            </a:lvl7pPr>
-            <a:lvl8pPr marL="3200400" indent="0" algn="ctr" defTabSz="914400" rtl="0" eaLnBrk="1" latinLnBrk="0" hangingPunct="1">
-              <a:lnSpc>
-                <a:spcPct val="90000"/>
-              </a:lnSpc>
-              <a:spcBef>
-                <a:spcPts val="500"/>
-              </a:spcBef>
-              <a:buFont typeface="Arial" panose="020B0604020202020204" pitchFamily="34" charset="0"/>
-              <a:buNone/>
-              <a:defRPr sz="1600" kern="1200">
-                <a:solidFill>
-                  <a:schemeClr val="tx1"/>
-                </a:solidFill>
-                <a:latin typeface="+mn-lt"/>
-                <a:ea typeface="+mn-ea"/>
-                <a:cs typeface="+mn-cs"/>
-              </a:defRPr>
-            </a:lvl8pPr>
-            <a:lvl9pPr marL="3657600" indent="0" algn="ctr" defTabSz="914400" rtl="0" eaLnBrk="1" latinLnBrk="0" hangingPunct="1">
-              <a:lnSpc>
-                <a:spcPct val="90000"/>
-              </a:lnSpc>
-              <a:spcBef>
-                <a:spcPts val="500"/>
-              </a:spcBef>
-              <a:buFont typeface="Arial" panose="020B0604020202020204" pitchFamily="34" charset="0"/>
-              <a:buNone/>
-              <a:defRPr sz="1600" kern="1200">
-                <a:solidFill>
-                  <a:schemeClr val="tx1"/>
-                </a:solidFill>
-                <a:latin typeface="+mn-lt"/>
-                <a:ea typeface="+mn-ea"/>
-                <a:cs typeface="+mn-cs"/>
-              </a:defRPr>
-            </a:lvl9pPr>
-          </a:lstStyle>
-          <a:p>
-            <a:r>
-              <a:rPr lang="zh-CN" altLang="en-US" sz="4000" dirty="0"/>
-              <a:t>（知识网：点、线、面，以及彼此间的联系）</a:t>
-            </a:r>
-          </a:p>
-        </p:txBody>
-      </p:sp>
-      <p:sp>
-        <p:nvSpPr>
-          <p:cNvPr id="7" name="Subtitle 2">
-            <a:extLst>
-              <a:ext uri="{FF2B5EF4-FFF2-40B4-BE49-F238E27FC236}">
-                <a16:creationId xmlns:a16="http://schemas.microsoft.com/office/drawing/2014/main" id="{D4EE80BF-55F9-0C3E-8BCA-5F7E220C1528}"/>
-              </a:ext>
-            </a:extLst>
-          </p:cNvPr>
-          <p:cNvSpPr txBox="1">
-            <a:spLocks/>
-          </p:cNvSpPr>
-          <p:nvPr/>
-        </p:nvSpPr>
-        <p:spPr>
-          <a:xfrm>
-            <a:off x="297256" y="3274330"/>
-            <a:ext cx="11597488" cy="1655762"/>
-          </a:xfrm>
-          <a:prstGeom prst="rect">
-            <a:avLst/>
-          </a:prstGeom>
-        </p:spPr>
-        <p:txBody>
-          <a:bodyPr vert="horz" lIns="91440" tIns="45720" rIns="91440" bIns="45720" rtlCol="0" anchor="ctr">
-            <a:normAutofit/>
-          </a:bodyPr>
-          <a:lstStyle>
-            <a:lvl1pPr marL="0" indent="0" algn="ctr" defTabSz="914400" rtl="0" eaLnBrk="1" latinLnBrk="0" hangingPunct="1">
-              <a:lnSpc>
-                <a:spcPct val="90000"/>
-              </a:lnSpc>
-              <a:spcBef>
-                <a:spcPts val="1000"/>
-              </a:spcBef>
-              <a:buFont typeface="Arial" panose="020B0604020202020204" pitchFamily="34" charset="0"/>
-              <a:buNone/>
-              <a:defRPr sz="2400" kern="1200">
-                <a:solidFill>
-                  <a:schemeClr val="tx1"/>
-                </a:solidFill>
-                <a:latin typeface="+mn-lt"/>
-                <a:ea typeface="+mn-ea"/>
-                <a:cs typeface="+mn-cs"/>
-              </a:defRPr>
-            </a:lvl1pPr>
-            <a:lvl2pPr marL="457200" indent="0" algn="ctr" defTabSz="914400" rtl="0" eaLnBrk="1" latinLnBrk="0" hangingPunct="1">
-              <a:lnSpc>
-                <a:spcPct val="90000"/>
-              </a:lnSpc>
-              <a:spcBef>
-                <a:spcPts val="500"/>
-              </a:spcBef>
-              <a:buFont typeface="Arial" panose="020B0604020202020204" pitchFamily="34" charset="0"/>
-              <a:buNone/>
-              <a:defRPr sz="2000" kern="1200">
-                <a:solidFill>
-                  <a:schemeClr val="tx1"/>
-                </a:solidFill>
-                <a:latin typeface="+mn-lt"/>
-                <a:ea typeface="+mn-ea"/>
-                <a:cs typeface="+mn-cs"/>
-              </a:defRPr>
-            </a:lvl2pPr>
-            <a:lvl3pPr marL="914400" indent="0" algn="ctr" defTabSz="914400" rtl="0" eaLnBrk="1" latinLnBrk="0" hangingPunct="1">
-              <a:lnSpc>
-                <a:spcPct val="90000"/>
-              </a:lnSpc>
-              <a:spcBef>
-                <a:spcPts val="500"/>
-              </a:spcBef>
-              <a:buFont typeface="Arial" panose="020B0604020202020204" pitchFamily="34" charset="0"/>
-              <a:buNone/>
-              <a:defRPr sz="1800" kern="1200">
-                <a:solidFill>
-                  <a:schemeClr val="tx1"/>
-                </a:solidFill>
-                <a:latin typeface="+mn-lt"/>
-                <a:ea typeface="+mn-ea"/>
-                <a:cs typeface="+mn-cs"/>
-              </a:defRPr>
-            </a:lvl3pPr>
-            <a:lvl4pPr marL="1371600" indent="0" algn="ctr" defTabSz="914400" rtl="0" eaLnBrk="1" latinLnBrk="0" hangingPunct="1">
-              <a:lnSpc>
-                <a:spcPct val="90000"/>
-              </a:lnSpc>
-              <a:spcBef>
-                <a:spcPts val="500"/>
-              </a:spcBef>
-              <a:buFont typeface="Arial" panose="020B0604020202020204" pitchFamily="34" charset="0"/>
-              <a:buNone/>
-              <a:defRPr sz="1600" kern="1200">
-                <a:solidFill>
-                  <a:schemeClr val="tx1"/>
-                </a:solidFill>
-                <a:latin typeface="+mn-lt"/>
-                <a:ea typeface="+mn-ea"/>
-                <a:cs typeface="+mn-cs"/>
-              </a:defRPr>
-            </a:lvl4pPr>
-            <a:lvl5pPr marL="1828800" indent="0" algn="ctr" defTabSz="914400" rtl="0" eaLnBrk="1" latinLnBrk="0" hangingPunct="1">
-              <a:lnSpc>
-                <a:spcPct val="90000"/>
-              </a:lnSpc>
-              <a:spcBef>
-                <a:spcPts val="500"/>
-              </a:spcBef>
-              <a:buFont typeface="Arial" panose="020B0604020202020204" pitchFamily="34" charset="0"/>
-              <a:buNone/>
-              <a:defRPr sz="1600" kern="1200">
-                <a:solidFill>
-                  <a:schemeClr val="tx1"/>
-                </a:solidFill>
-                <a:latin typeface="+mn-lt"/>
-                <a:ea typeface="+mn-ea"/>
-                <a:cs typeface="+mn-cs"/>
-              </a:defRPr>
-            </a:lvl5pPr>
-            <a:lvl6pPr marL="2286000" indent="0" algn="ctr" defTabSz="914400" rtl="0" eaLnBrk="1" latinLnBrk="0" hangingPunct="1">
-              <a:lnSpc>
-                <a:spcPct val="90000"/>
-              </a:lnSpc>
-              <a:spcBef>
-                <a:spcPts val="500"/>
-              </a:spcBef>
-              <a:buFont typeface="Arial" panose="020B0604020202020204" pitchFamily="34" charset="0"/>
-              <a:buNone/>
-              <a:defRPr sz="1600" kern="1200">
-                <a:solidFill>
-                  <a:schemeClr val="tx1"/>
-                </a:solidFill>
-                <a:latin typeface="+mn-lt"/>
-                <a:ea typeface="+mn-ea"/>
-                <a:cs typeface="+mn-cs"/>
-              </a:defRPr>
-            </a:lvl6pPr>
-            <a:lvl7pPr marL="2743200" indent="0" algn="ctr" defTabSz="914400" rtl="0" eaLnBrk="1" latinLnBrk="0" hangingPunct="1">
-              <a:lnSpc>
-                <a:spcPct val="90000"/>
-              </a:lnSpc>
-              <a:spcBef>
-                <a:spcPts val="500"/>
-              </a:spcBef>
-              <a:buFont typeface="Arial" panose="020B0604020202020204" pitchFamily="34" charset="0"/>
-              <a:buNone/>
-              <a:defRPr sz="1600" kern="1200">
-                <a:solidFill>
-                  <a:schemeClr val="tx1"/>
-                </a:solidFill>
-                <a:latin typeface="+mn-lt"/>
-                <a:ea typeface="+mn-ea"/>
-                <a:cs typeface="+mn-cs"/>
-              </a:defRPr>
-            </a:lvl7pPr>
-            <a:lvl8pPr marL="3200400" indent="0" algn="ctr" defTabSz="914400" rtl="0" eaLnBrk="1" latinLnBrk="0" hangingPunct="1">
-              <a:lnSpc>
-                <a:spcPct val="90000"/>
-              </a:lnSpc>
-              <a:spcBef>
-                <a:spcPts val="500"/>
-              </a:spcBef>
-              <a:buFont typeface="Arial" panose="020B0604020202020204" pitchFamily="34" charset="0"/>
-              <a:buNone/>
-              <a:defRPr sz="1600" kern="1200">
-                <a:solidFill>
-                  <a:schemeClr val="tx1"/>
-                </a:solidFill>
-                <a:latin typeface="+mn-lt"/>
-                <a:ea typeface="+mn-ea"/>
-                <a:cs typeface="+mn-cs"/>
-              </a:defRPr>
-            </a:lvl8pPr>
-            <a:lvl9pPr marL="3657600" indent="0" algn="ctr" defTabSz="914400" rtl="0" eaLnBrk="1" latinLnBrk="0" hangingPunct="1">
-              <a:lnSpc>
-                <a:spcPct val="90000"/>
-              </a:lnSpc>
-              <a:spcBef>
-                <a:spcPts val="500"/>
-              </a:spcBef>
-              <a:buFont typeface="Arial" panose="020B0604020202020204" pitchFamily="34" charset="0"/>
-              <a:buNone/>
-              <a:defRPr sz="1600" kern="1200">
-                <a:solidFill>
-                  <a:schemeClr val="tx1"/>
-                </a:solidFill>
-                <a:latin typeface="+mn-lt"/>
-                <a:ea typeface="+mn-ea"/>
-                <a:cs typeface="+mn-cs"/>
-              </a:defRPr>
-            </a:lvl9pPr>
-          </a:lstStyle>
-          <a:p>
-            <a:r>
-              <a:rPr lang="en-US" altLang="zh-CN" sz="4000" dirty="0"/>
-              <a:t>Full Area Stack Tree </a:t>
-            </a:r>
-            <a:r>
-              <a:rPr lang="zh-CN" altLang="en-US" sz="4000" dirty="0"/>
-              <a:t>学习（笔记）思考（链接）</a:t>
-            </a:r>
+              <a:rPr lang="zh-CN" altLang="en-US" sz="5000" b="1" dirty="0">
+                <a:latin typeface="+mn-ea"/>
+              </a:rPr>
+              <a:t>多账户、</a:t>
+            </a:r>
+            <a:r>
+              <a:rPr lang="en-US" altLang="zh-CN" sz="5000" b="1" dirty="0">
+                <a:latin typeface="+mn-ea"/>
+              </a:rPr>
+              <a:t>2</a:t>
+            </a:r>
+            <a:r>
+              <a:rPr lang="zh-CN" altLang="en-US" sz="5000" b="1" dirty="0">
+                <a:latin typeface="+mn-ea"/>
+              </a:rPr>
+              <a:t>分身、</a:t>
+            </a:r>
+            <a:r>
+              <a:rPr lang="en-US" altLang="zh-CN" sz="5000" b="1" dirty="0">
+                <a:latin typeface="+mn-ea"/>
+              </a:rPr>
+              <a:t>FAST</a:t>
+            </a:r>
+            <a:r>
+              <a:rPr lang="zh-CN" altLang="en-US" sz="5000" b="1" dirty="0">
+                <a:latin typeface="+mn-ea"/>
+              </a:rPr>
+              <a:t>笔记</a:t>
+            </a:r>
+            <a:endParaRPr lang="en-US" altLang="zh-CN" sz="5000" b="1" dirty="0">
+              <a:latin typeface="+mn-ea"/>
+            </a:endParaRPr>
           </a:p>
         </p:txBody>
       </p:sp>
     </p:spTree>
     <p:extLst>
       <p:ext uri="{BB962C8B-B14F-4D97-AF65-F5344CB8AC3E}">
-        <p14:creationId xmlns:p14="http://schemas.microsoft.com/office/powerpoint/2010/main" val="1331241091"/>
+        <p14:creationId xmlns:p14="http://schemas.microsoft.com/office/powerpoint/2010/main" val="2514589834"/>
       </p:ext>
     </p:extLst>
   </p:cSld>
@@ -5912,11 +7142,17 @@
           <a:lstStyle/>
           <a:p>
             <a:r>
-              <a:rPr lang="en-US" altLang="zh-CN" sz="12000" b="1" dirty="0"/>
+              <a:rPr lang="en-US" altLang="zh-CN" sz="12000" b="1" dirty="0">
+                <a:latin typeface="+mn-ea"/>
+                <a:ea typeface="+mn-ea"/>
+              </a:rPr>
               <a:t>AI</a:t>
             </a:r>
             <a:r>
-              <a:rPr lang="zh-CN" altLang="en-US" sz="12000" b="1" dirty="0"/>
+              <a:rPr lang="zh-CN" altLang="en-US" sz="12000" b="1" dirty="0">
+                <a:latin typeface="+mn-ea"/>
+                <a:ea typeface="+mn-ea"/>
+              </a:rPr>
               <a:t>概念术语</a:t>
             </a:r>
           </a:p>
@@ -5951,15 +7187,21 @@
           <a:lstStyle/>
           <a:p>
             <a:r>
-              <a:rPr lang="zh-CN" altLang="en-US" sz="5000" dirty="0"/>
+              <a:rPr lang="zh-CN" altLang="en-US" sz="5000" dirty="0">
+                <a:latin typeface="+mn-ea"/>
+              </a:rPr>
               <a:t>（</a:t>
             </a:r>
             <a:r>
-              <a:rPr lang="en-US" altLang="zh-CN" sz="5000" dirty="0"/>
+              <a:rPr lang="en-US" altLang="zh-CN" sz="5000" dirty="0">
+                <a:latin typeface="+mn-ea"/>
+              </a:rPr>
               <a:t>Cutting-edge Terms</a:t>
             </a:r>
             <a:r>
-              <a:rPr lang="zh-CN" altLang="en-US" sz="5000" dirty="0"/>
+              <a:rPr lang="zh-CN" altLang="en-US" sz="5000" dirty="0">
+                <a:latin typeface="+mn-ea"/>
+              </a:rPr>
               <a:t>）</a:t>
             </a:r>
           </a:p>
@@ -6019,11 +7261,17 @@
           <a:lstStyle/>
           <a:p>
             <a:r>
-              <a:rPr lang="en-US" altLang="zh-CN" sz="12000" b="1" dirty="0"/>
+              <a:rPr lang="en-US" altLang="zh-CN" sz="12000" b="1" dirty="0">
+                <a:latin typeface="+mn-ea"/>
+                <a:ea typeface="+mn-ea"/>
+              </a:rPr>
               <a:t>AI</a:t>
             </a:r>
             <a:r>
-              <a:rPr lang="zh-CN" altLang="en-US" sz="12000" b="1" dirty="0"/>
+              <a:rPr lang="zh-CN" altLang="en-US" sz="12000" b="1" dirty="0">
+                <a:latin typeface="+mn-ea"/>
+                <a:ea typeface="+mn-ea"/>
+              </a:rPr>
               <a:t>工具</a:t>
             </a:r>
           </a:p>
@@ -6058,15 +7306,21 @@
           <a:lstStyle/>
           <a:p>
             <a:r>
-              <a:rPr lang="zh-CN" altLang="en-US" sz="5000" dirty="0"/>
+              <a:rPr lang="zh-CN" altLang="en-US" sz="5000" dirty="0">
+                <a:latin typeface="+mn-ea"/>
+              </a:rPr>
               <a:t>（</a:t>
             </a:r>
             <a:r>
-              <a:rPr lang="en-US" altLang="zh-CN" sz="5000" dirty="0"/>
+              <a:rPr lang="en-US" altLang="zh-CN" sz="5000" dirty="0">
+                <a:latin typeface="+mn-ea"/>
+              </a:rPr>
               <a:t>Cutting-edge Tools</a:t>
             </a:r>
             <a:r>
-              <a:rPr lang="zh-CN" altLang="en-US" sz="5000" dirty="0"/>
+              <a:rPr lang="zh-CN" altLang="en-US" sz="5000" dirty="0">
+                <a:latin typeface="+mn-ea"/>
+              </a:rPr>
               <a:t>）</a:t>
             </a:r>
           </a:p>
